--- a/sessions_in_Abu_Dhabi/session_6.pptx
+++ b/sessions_in_Abu_Dhabi/session_6.pptx
@@ -20,6 +20,8 @@
     <p:sldId id="268" r:id="rId14"/>
     <p:sldId id="269" r:id="rId15"/>
     <p:sldId id="270" r:id="rId16"/>
+    <p:sldId id="271" r:id="rId17"/>
+    <p:sldId id="272" r:id="rId18"/>
   </p:sldIdLst>
   <p:sldSz cx="9144000" cy="5143500" type="screen16x9"/>
   <p:notesSz cx="6858000" cy="9144000"/>
@@ -3212,6 +3214,1189 @@
             </a:pPr>
             <a:r>
               <a:rPr/>
+              <a:t>Visualizing the Results</a:t>
+            </a:r>
+          </a:p>
+        </p:txBody>
+      </p:sp>
+      <p:sp>
+        <p:nvSpPr>
+          <p:cNvPr id="3" name="Content Placeholder 2"/>
+          <p:cNvSpPr>
+            <a:spLocks noGrp="1"/>
+          </p:cNvSpPr>
+          <p:nvPr>
+            <p:ph idx="1" sz="half"/>
+          </p:nvPr>
+        </p:nvSpPr>
+        <p:spPr/>
+        <p:txBody>
+          <a:bodyPr/>
+          <a:lstStyle/>
+          <a:p>
+            <a:pPr lvl="0" indent="0">
+              <a:buNone/>
+            </a:pPr>
+            <a:r>
+              <a:rPr>
+                <a:solidFill>
+                  <a:srgbClr val="5E5E5E"/>
+                </a:solidFill>
+                <a:latin typeface="Courier"/>
+              </a:rPr>
+              <a:t># Step 1: Group the data by enrollment status (treatment vs. control) and round (before vs. after)</a:t>
+            </a:r>
+            <a:br/>
+            <a:r>
+              <a:rPr>
+                <a:solidFill>
+                  <a:srgbClr val="5E5E5E"/>
+                </a:solidFill>
+                <a:latin typeface="Courier"/>
+              </a:rPr>
+              <a:t># Step 2: Relabel variables to make the plot labels easier to understand ("0" becomes "Control" or "Before", "1" becomes "Treatment" or "After")</a:t>
+            </a:r>
+            <a:br/>
+            <a:r>
+              <a:rPr>
+                <a:solidFill>
+                  <a:srgbClr val="5E5E5E"/>
+                </a:solidFill>
+                <a:latin typeface="Courier"/>
+              </a:rPr>
+              <a:t># Step 3: Summarize the data by calculating the average waste management cost for each group and time period</a:t>
+            </a:r>
+            <a:br/>
+            <a:r>
+              <a:rPr>
+                <a:solidFill>
+                  <a:srgbClr val="5E5E5E"/>
+                </a:solidFill>
+                <a:latin typeface="Courier"/>
+              </a:rPr>
+              <a:t># Step 4: Plot the average costs over time, drawing separate lines for treatment and control groups</a:t>
+            </a:r>
+            <a:br/>
+            <a:r>
+              <a:rPr>
+                <a:solidFill>
+                  <a:srgbClr val="5E5E5E"/>
+                </a:solidFill>
+                <a:latin typeface="Courier"/>
+              </a:rPr>
+              <a:t>#Step 5: Customize the plot with titles, axis labels, colors, and a clean minimal theme</a:t>
+            </a:r>
+            <a:br/>
+            <a:br/>
+            <a:r>
+              <a:rPr>
+                <a:solidFill>
+                  <a:srgbClr val="003B4F"/>
+                </a:solidFill>
+                <a:latin typeface="Courier"/>
+              </a:rPr>
+              <a:t>df </a:t>
+            </a:r>
+            <a:r>
+              <a:rPr>
+                <a:solidFill>
+                  <a:srgbClr val="5E5E5E"/>
+                </a:solidFill>
+                <a:latin typeface="Courier"/>
+              </a:rPr>
+              <a:t>%&gt;%</a:t>
+            </a:r>
+            <a:r>
+              <a:rPr>
+                <a:solidFill>
+                  <a:srgbClr val="003B4F"/>
+                </a:solidFill>
+                <a:latin typeface="Courier"/>
+              </a:rPr>
+              <a:t> </a:t>
+            </a:r>
+            <a:r>
+              <a:rPr>
+                <a:solidFill>
+                  <a:srgbClr val="4758AB"/>
+                </a:solidFill>
+                <a:latin typeface="Courier"/>
+              </a:rPr>
+              <a:t>group_by</a:t>
+            </a:r>
+            <a:r>
+              <a:rPr>
+                <a:solidFill>
+                  <a:srgbClr val="003B4F"/>
+                </a:solidFill>
+                <a:latin typeface="Courier"/>
+              </a:rPr>
+              <a:t>(enrolled, round) </a:t>
+            </a:r>
+            <a:r>
+              <a:rPr>
+                <a:solidFill>
+                  <a:srgbClr val="5E5E5E"/>
+                </a:solidFill>
+                <a:latin typeface="Courier"/>
+              </a:rPr>
+              <a:t>%&gt;%</a:t>
+            </a:r>
+            <a:r>
+              <a:rPr>
+                <a:solidFill>
+                  <a:srgbClr val="003B4F"/>
+                </a:solidFill>
+                <a:latin typeface="Courier"/>
+              </a:rPr>
+              <a:t> </a:t>
+            </a:r>
+            <a:br/>
+            <a:r>
+              <a:rPr>
+                <a:solidFill>
+                  <a:srgbClr val="003B4F"/>
+                </a:solidFill>
+                <a:latin typeface="Courier"/>
+              </a:rPr>
+              <a:t>  </a:t>
+            </a:r>
+            <a:r>
+              <a:rPr>
+                <a:solidFill>
+                  <a:srgbClr val="4758AB"/>
+                </a:solidFill>
+                <a:latin typeface="Courier"/>
+              </a:rPr>
+              <a:t>mutate</a:t>
+            </a:r>
+            <a:r>
+              <a:rPr>
+                <a:solidFill>
+                  <a:srgbClr val="003B4F"/>
+                </a:solidFill>
+                <a:latin typeface="Courier"/>
+              </a:rPr>
+              <a:t>(</a:t>
+            </a:r>
+            <a:r>
+              <a:rPr>
+                <a:solidFill>
+                  <a:srgbClr val="657422"/>
+                </a:solidFill>
+                <a:latin typeface="Courier"/>
+              </a:rPr>
+              <a:t>enrolled =</a:t>
+            </a:r>
+            <a:r>
+              <a:rPr>
+                <a:solidFill>
+                  <a:srgbClr val="003B4F"/>
+                </a:solidFill>
+                <a:latin typeface="Courier"/>
+              </a:rPr>
+              <a:t> </a:t>
+            </a:r>
+            <a:r>
+              <a:rPr>
+                <a:solidFill>
+                  <a:srgbClr val="4758AB"/>
+                </a:solidFill>
+                <a:latin typeface="Courier"/>
+              </a:rPr>
+              <a:t>recode</a:t>
+            </a:r>
+            <a:r>
+              <a:rPr>
+                <a:solidFill>
+                  <a:srgbClr val="003B4F"/>
+                </a:solidFill>
+                <a:latin typeface="Courier"/>
+              </a:rPr>
+              <a:t>(</a:t>
+            </a:r>
+            <a:r>
+              <a:rPr>
+                <a:solidFill>
+                  <a:srgbClr val="4758AB"/>
+                </a:solidFill>
+                <a:latin typeface="Courier"/>
+              </a:rPr>
+              <a:t>as.factor</a:t>
+            </a:r>
+            <a:r>
+              <a:rPr>
+                <a:solidFill>
+                  <a:srgbClr val="003B4F"/>
+                </a:solidFill>
+                <a:latin typeface="Courier"/>
+              </a:rPr>
+              <a:t>(enrolled), </a:t>
+            </a:r>
+            <a:r>
+              <a:rPr>
+                <a:solidFill>
+                  <a:srgbClr val="20794D"/>
+                </a:solidFill>
+                <a:latin typeface="Courier"/>
+              </a:rPr>
+              <a:t>`</a:t>
+            </a:r>
+            <a:r>
+              <a:rPr>
+                <a:solidFill>
+                  <a:srgbClr val="657422"/>
+                </a:solidFill>
+                <a:latin typeface="Courier"/>
+              </a:rPr>
+              <a:t>0</a:t>
+            </a:r>
+            <a:r>
+              <a:rPr>
+                <a:solidFill>
+                  <a:srgbClr val="20794D"/>
+                </a:solidFill>
+                <a:latin typeface="Courier"/>
+              </a:rPr>
+              <a:t>`</a:t>
+            </a:r>
+            <a:r>
+              <a:rPr>
+                <a:solidFill>
+                  <a:srgbClr val="003B4F"/>
+                </a:solidFill>
+                <a:latin typeface="Courier"/>
+              </a:rPr>
+              <a:t> = </a:t>
+            </a:r>
+            <a:r>
+              <a:rPr>
+                <a:solidFill>
+                  <a:srgbClr val="20794D"/>
+                </a:solidFill>
+                <a:latin typeface="Courier"/>
+              </a:rPr>
+              <a:t>"Control"</a:t>
+            </a:r>
+            <a:r>
+              <a:rPr>
+                <a:solidFill>
+                  <a:srgbClr val="003B4F"/>
+                </a:solidFill>
+                <a:latin typeface="Courier"/>
+              </a:rPr>
+              <a:t>, </a:t>
+            </a:r>
+            <a:r>
+              <a:rPr>
+                <a:solidFill>
+                  <a:srgbClr val="20794D"/>
+                </a:solidFill>
+                <a:latin typeface="Courier"/>
+              </a:rPr>
+              <a:t>`</a:t>
+            </a:r>
+            <a:r>
+              <a:rPr>
+                <a:solidFill>
+                  <a:srgbClr val="657422"/>
+                </a:solidFill>
+                <a:latin typeface="Courier"/>
+              </a:rPr>
+              <a:t>1</a:t>
+            </a:r>
+            <a:r>
+              <a:rPr>
+                <a:solidFill>
+                  <a:srgbClr val="20794D"/>
+                </a:solidFill>
+                <a:latin typeface="Courier"/>
+              </a:rPr>
+              <a:t>`</a:t>
+            </a:r>
+            <a:r>
+              <a:rPr>
+                <a:solidFill>
+                  <a:srgbClr val="003B4F"/>
+                </a:solidFill>
+                <a:latin typeface="Courier"/>
+              </a:rPr>
+              <a:t> = </a:t>
+            </a:r>
+            <a:r>
+              <a:rPr>
+                <a:solidFill>
+                  <a:srgbClr val="20794D"/>
+                </a:solidFill>
+                <a:latin typeface="Courier"/>
+              </a:rPr>
+              <a:t>"Treatment"</a:t>
+            </a:r>
+            <a:r>
+              <a:rPr>
+                <a:solidFill>
+                  <a:srgbClr val="003B4F"/>
+                </a:solidFill>
+                <a:latin typeface="Courier"/>
+              </a:rPr>
+              <a:t>),</a:t>
+            </a:r>
+            <a:br/>
+            <a:r>
+              <a:rPr>
+                <a:solidFill>
+                  <a:srgbClr val="003B4F"/>
+                </a:solidFill>
+                <a:latin typeface="Courier"/>
+              </a:rPr>
+              <a:t>             </a:t>
+            </a:r>
+            <a:r>
+              <a:rPr>
+                <a:solidFill>
+                  <a:srgbClr val="657422"/>
+                </a:solidFill>
+                <a:latin typeface="Courier"/>
+              </a:rPr>
+              <a:t>round =</a:t>
+            </a:r>
+            <a:r>
+              <a:rPr>
+                <a:solidFill>
+                  <a:srgbClr val="003B4F"/>
+                </a:solidFill>
+                <a:latin typeface="Courier"/>
+              </a:rPr>
+              <a:t> </a:t>
+            </a:r>
+            <a:r>
+              <a:rPr>
+                <a:solidFill>
+                  <a:srgbClr val="4758AB"/>
+                </a:solidFill>
+                <a:latin typeface="Courier"/>
+              </a:rPr>
+              <a:t>recode</a:t>
+            </a:r>
+            <a:r>
+              <a:rPr>
+                <a:solidFill>
+                  <a:srgbClr val="003B4F"/>
+                </a:solidFill>
+                <a:latin typeface="Courier"/>
+              </a:rPr>
+              <a:t>(</a:t>
+            </a:r>
+            <a:r>
+              <a:rPr>
+                <a:solidFill>
+                  <a:srgbClr val="4758AB"/>
+                </a:solidFill>
+                <a:latin typeface="Courier"/>
+              </a:rPr>
+              <a:t>as.factor</a:t>
+            </a:r>
+            <a:r>
+              <a:rPr>
+                <a:solidFill>
+                  <a:srgbClr val="003B4F"/>
+                </a:solidFill>
+                <a:latin typeface="Courier"/>
+              </a:rPr>
+              <a:t>(round), </a:t>
+            </a:r>
+            <a:r>
+              <a:rPr>
+                <a:solidFill>
+                  <a:srgbClr val="20794D"/>
+                </a:solidFill>
+                <a:latin typeface="Courier"/>
+              </a:rPr>
+              <a:t>`</a:t>
+            </a:r>
+            <a:r>
+              <a:rPr>
+                <a:solidFill>
+                  <a:srgbClr val="657422"/>
+                </a:solidFill>
+                <a:latin typeface="Courier"/>
+              </a:rPr>
+              <a:t>0</a:t>
+            </a:r>
+            <a:r>
+              <a:rPr>
+                <a:solidFill>
+                  <a:srgbClr val="20794D"/>
+                </a:solidFill>
+                <a:latin typeface="Courier"/>
+              </a:rPr>
+              <a:t>`</a:t>
+            </a:r>
+            <a:r>
+              <a:rPr>
+                <a:solidFill>
+                  <a:srgbClr val="003B4F"/>
+                </a:solidFill>
+                <a:latin typeface="Courier"/>
+              </a:rPr>
+              <a:t> = </a:t>
+            </a:r>
+            <a:r>
+              <a:rPr>
+                <a:solidFill>
+                  <a:srgbClr val="20794D"/>
+                </a:solidFill>
+                <a:latin typeface="Courier"/>
+              </a:rPr>
+              <a:t>"Before"</a:t>
+            </a:r>
+            <a:r>
+              <a:rPr>
+                <a:solidFill>
+                  <a:srgbClr val="003B4F"/>
+                </a:solidFill>
+                <a:latin typeface="Courier"/>
+              </a:rPr>
+              <a:t>, </a:t>
+            </a:r>
+            <a:r>
+              <a:rPr>
+                <a:solidFill>
+                  <a:srgbClr val="20794D"/>
+                </a:solidFill>
+                <a:latin typeface="Courier"/>
+              </a:rPr>
+              <a:t>`</a:t>
+            </a:r>
+            <a:r>
+              <a:rPr>
+                <a:solidFill>
+                  <a:srgbClr val="657422"/>
+                </a:solidFill>
+                <a:latin typeface="Courier"/>
+              </a:rPr>
+              <a:t>1</a:t>
+            </a:r>
+            <a:r>
+              <a:rPr>
+                <a:solidFill>
+                  <a:srgbClr val="20794D"/>
+                </a:solidFill>
+                <a:latin typeface="Courier"/>
+              </a:rPr>
+              <a:t>`</a:t>
+            </a:r>
+            <a:r>
+              <a:rPr>
+                <a:solidFill>
+                  <a:srgbClr val="003B4F"/>
+                </a:solidFill>
+                <a:latin typeface="Courier"/>
+              </a:rPr>
+              <a:t> = </a:t>
+            </a:r>
+            <a:r>
+              <a:rPr>
+                <a:solidFill>
+                  <a:srgbClr val="20794D"/>
+                </a:solidFill>
+                <a:latin typeface="Courier"/>
+              </a:rPr>
+              <a:t>"After"</a:t>
+            </a:r>
+            <a:r>
+              <a:rPr>
+                <a:solidFill>
+                  <a:srgbClr val="003B4F"/>
+                </a:solidFill>
+                <a:latin typeface="Courier"/>
+              </a:rPr>
+              <a:t>)) </a:t>
+            </a:r>
+            <a:r>
+              <a:rPr>
+                <a:solidFill>
+                  <a:srgbClr val="5E5E5E"/>
+                </a:solidFill>
+                <a:latin typeface="Courier"/>
+              </a:rPr>
+              <a:t>%&gt;%</a:t>
+            </a:r>
+            <a:br/>
+            <a:r>
+              <a:rPr>
+                <a:solidFill>
+                  <a:srgbClr val="003B4F"/>
+                </a:solidFill>
+                <a:latin typeface="Courier"/>
+              </a:rPr>
+              <a:t>  </a:t>
+            </a:r>
+            <a:r>
+              <a:rPr>
+                <a:solidFill>
+                  <a:srgbClr val="4758AB"/>
+                </a:solidFill>
+                <a:latin typeface="Courier"/>
+              </a:rPr>
+              <a:t>summarise</a:t>
+            </a:r>
+            <a:r>
+              <a:rPr>
+                <a:solidFill>
+                  <a:srgbClr val="003B4F"/>
+                </a:solidFill>
+                <a:latin typeface="Courier"/>
+              </a:rPr>
+              <a:t>(</a:t>
+            </a:r>
+            <a:r>
+              <a:rPr>
+                <a:solidFill>
+                  <a:srgbClr val="657422"/>
+                </a:solidFill>
+                <a:latin typeface="Courier"/>
+              </a:rPr>
+              <a:t>waste_management_costs =</a:t>
+            </a:r>
+            <a:r>
+              <a:rPr>
+                <a:solidFill>
+                  <a:srgbClr val="003B4F"/>
+                </a:solidFill>
+                <a:latin typeface="Courier"/>
+              </a:rPr>
+              <a:t> </a:t>
+            </a:r>
+            <a:r>
+              <a:rPr>
+                <a:solidFill>
+                  <a:srgbClr val="4758AB"/>
+                </a:solidFill>
+                <a:latin typeface="Courier"/>
+              </a:rPr>
+              <a:t>mean</a:t>
+            </a:r>
+            <a:r>
+              <a:rPr>
+                <a:solidFill>
+                  <a:srgbClr val="003B4F"/>
+                </a:solidFill>
+                <a:latin typeface="Courier"/>
+              </a:rPr>
+              <a:t>(waste_management_costs)) </a:t>
+            </a:r>
+            <a:r>
+              <a:rPr>
+                <a:solidFill>
+                  <a:srgbClr val="5E5E5E"/>
+                </a:solidFill>
+                <a:latin typeface="Courier"/>
+              </a:rPr>
+              <a:t>%&gt;%</a:t>
+            </a:r>
+            <a:br/>
+            <a:r>
+              <a:rPr>
+                <a:solidFill>
+                  <a:srgbClr val="003B4F"/>
+                </a:solidFill>
+                <a:latin typeface="Courier"/>
+              </a:rPr>
+              <a:t>  </a:t>
+            </a:r>
+            <a:r>
+              <a:rPr>
+                <a:solidFill>
+                  <a:srgbClr val="4758AB"/>
+                </a:solidFill>
+                <a:latin typeface="Courier"/>
+              </a:rPr>
+              <a:t>ggplot</a:t>
+            </a:r>
+            <a:r>
+              <a:rPr>
+                <a:solidFill>
+                  <a:srgbClr val="003B4F"/>
+                </a:solidFill>
+                <a:latin typeface="Courier"/>
+              </a:rPr>
+              <a:t>(</a:t>
+            </a:r>
+            <a:r>
+              <a:rPr>
+                <a:solidFill>
+                  <a:srgbClr val="4758AB"/>
+                </a:solidFill>
+                <a:latin typeface="Courier"/>
+              </a:rPr>
+              <a:t>aes</a:t>
+            </a:r>
+            <a:r>
+              <a:rPr>
+                <a:solidFill>
+                  <a:srgbClr val="003B4F"/>
+                </a:solidFill>
+                <a:latin typeface="Courier"/>
+              </a:rPr>
+              <a:t>(</a:t>
+            </a:r>
+            <a:r>
+              <a:rPr>
+                <a:solidFill>
+                  <a:srgbClr val="657422"/>
+                </a:solidFill>
+                <a:latin typeface="Courier"/>
+              </a:rPr>
+              <a:t>x =</a:t>
+            </a:r>
+            <a:r>
+              <a:rPr>
+                <a:solidFill>
+                  <a:srgbClr val="003B4F"/>
+                </a:solidFill>
+                <a:latin typeface="Courier"/>
+              </a:rPr>
+              <a:t> round, </a:t>
+            </a:r>
+            <a:r>
+              <a:rPr>
+                <a:solidFill>
+                  <a:srgbClr val="657422"/>
+                </a:solidFill>
+                <a:latin typeface="Courier"/>
+              </a:rPr>
+              <a:t>y =</a:t>
+            </a:r>
+            <a:r>
+              <a:rPr>
+                <a:solidFill>
+                  <a:srgbClr val="003B4F"/>
+                </a:solidFill>
+                <a:latin typeface="Courier"/>
+              </a:rPr>
+              <a:t> waste_management_costs, </a:t>
+            </a:r>
+            <a:r>
+              <a:rPr>
+                <a:solidFill>
+                  <a:srgbClr val="657422"/>
+                </a:solidFill>
+                <a:latin typeface="Courier"/>
+              </a:rPr>
+              <a:t>group =</a:t>
+            </a:r>
+            <a:r>
+              <a:rPr>
+                <a:solidFill>
+                  <a:srgbClr val="003B4F"/>
+                </a:solidFill>
+                <a:latin typeface="Courier"/>
+              </a:rPr>
+              <a:t> enrolled, </a:t>
+            </a:r>
+            <a:r>
+              <a:rPr>
+                <a:solidFill>
+                  <a:srgbClr val="657422"/>
+                </a:solidFill>
+                <a:latin typeface="Courier"/>
+              </a:rPr>
+              <a:t>color =</a:t>
+            </a:r>
+            <a:r>
+              <a:rPr>
+                <a:solidFill>
+                  <a:srgbClr val="003B4F"/>
+                </a:solidFill>
+                <a:latin typeface="Courier"/>
+              </a:rPr>
+              <a:t> enrolled)) </a:t>
+            </a:r>
+            <a:r>
+              <a:rPr>
+                <a:solidFill>
+                  <a:srgbClr val="5E5E5E"/>
+                </a:solidFill>
+                <a:latin typeface="Courier"/>
+              </a:rPr>
+              <a:t>+</a:t>
+            </a:r>
+            <a:br/>
+            <a:r>
+              <a:rPr>
+                <a:solidFill>
+                  <a:srgbClr val="003B4F"/>
+                </a:solidFill>
+                <a:latin typeface="Courier"/>
+              </a:rPr>
+              <a:t>  </a:t>
+            </a:r>
+            <a:r>
+              <a:rPr>
+                <a:solidFill>
+                  <a:srgbClr val="4758AB"/>
+                </a:solidFill>
+                <a:latin typeface="Courier"/>
+              </a:rPr>
+              <a:t>geom_line</a:t>
+            </a:r>
+            <a:r>
+              <a:rPr>
+                <a:solidFill>
+                  <a:srgbClr val="003B4F"/>
+                </a:solidFill>
+                <a:latin typeface="Courier"/>
+              </a:rPr>
+              <a:t>(</a:t>
+            </a:r>
+            <a:r>
+              <a:rPr>
+                <a:solidFill>
+                  <a:srgbClr val="657422"/>
+                </a:solidFill>
+                <a:latin typeface="Courier"/>
+              </a:rPr>
+              <a:t>size =</a:t>
+            </a:r>
+            <a:r>
+              <a:rPr>
+                <a:solidFill>
+                  <a:srgbClr val="003B4F"/>
+                </a:solidFill>
+                <a:latin typeface="Courier"/>
+              </a:rPr>
+              <a:t> </a:t>
+            </a:r>
+            <a:r>
+              <a:rPr>
+                <a:solidFill>
+                  <a:srgbClr val="AD0000"/>
+                </a:solidFill>
+                <a:latin typeface="Courier"/>
+              </a:rPr>
+              <a:t>1.2</a:t>
+            </a:r>
+            <a:r>
+              <a:rPr>
+                <a:solidFill>
+                  <a:srgbClr val="003B4F"/>
+                </a:solidFill>
+                <a:latin typeface="Courier"/>
+              </a:rPr>
+              <a:t>) </a:t>
+            </a:r>
+            <a:r>
+              <a:rPr>
+                <a:solidFill>
+                  <a:srgbClr val="5E5E5E"/>
+                </a:solidFill>
+                <a:latin typeface="Courier"/>
+              </a:rPr>
+              <a:t>+</a:t>
+            </a:r>
+            <a:r>
+              <a:rPr>
+                <a:solidFill>
+                  <a:srgbClr val="003B4F"/>
+                </a:solidFill>
+                <a:latin typeface="Courier"/>
+              </a:rPr>
+              <a:t> </a:t>
+            </a:r>
+            <a:r>
+              <a:rPr>
+                <a:solidFill>
+                  <a:srgbClr val="4758AB"/>
+                </a:solidFill>
+                <a:latin typeface="Courier"/>
+              </a:rPr>
+              <a:t>geom_point</a:t>
+            </a:r>
+            <a:r>
+              <a:rPr>
+                <a:solidFill>
+                  <a:srgbClr val="003B4F"/>
+                </a:solidFill>
+                <a:latin typeface="Courier"/>
+              </a:rPr>
+              <a:t>(</a:t>
+            </a:r>
+            <a:r>
+              <a:rPr>
+                <a:solidFill>
+                  <a:srgbClr val="657422"/>
+                </a:solidFill>
+                <a:latin typeface="Courier"/>
+              </a:rPr>
+              <a:t>size =</a:t>
+            </a:r>
+            <a:r>
+              <a:rPr>
+                <a:solidFill>
+                  <a:srgbClr val="003B4F"/>
+                </a:solidFill>
+                <a:latin typeface="Courier"/>
+              </a:rPr>
+              <a:t> </a:t>
+            </a:r>
+            <a:r>
+              <a:rPr>
+                <a:solidFill>
+                  <a:srgbClr val="AD0000"/>
+                </a:solidFill>
+                <a:latin typeface="Courier"/>
+              </a:rPr>
+              <a:t>3</a:t>
+            </a:r>
+            <a:r>
+              <a:rPr>
+                <a:solidFill>
+                  <a:srgbClr val="003B4F"/>
+                </a:solidFill>
+                <a:latin typeface="Courier"/>
+              </a:rPr>
+              <a:t>) </a:t>
+            </a:r>
+            <a:r>
+              <a:rPr>
+                <a:solidFill>
+                  <a:srgbClr val="5E5E5E"/>
+                </a:solidFill>
+                <a:latin typeface="Courier"/>
+              </a:rPr>
+              <a:t>+</a:t>
+            </a:r>
+            <a:br/>
+            <a:r>
+              <a:rPr>
+                <a:solidFill>
+                  <a:srgbClr val="003B4F"/>
+                </a:solidFill>
+                <a:latin typeface="Courier"/>
+              </a:rPr>
+              <a:t>  </a:t>
+            </a:r>
+            <a:r>
+              <a:rPr>
+                <a:solidFill>
+                  <a:srgbClr val="4758AB"/>
+                </a:solidFill>
+                <a:latin typeface="Courier"/>
+              </a:rPr>
+              <a:t>labs</a:t>
+            </a:r>
+            <a:r>
+              <a:rPr>
+                <a:solidFill>
+                  <a:srgbClr val="003B4F"/>
+                </a:solidFill>
+                <a:latin typeface="Courier"/>
+              </a:rPr>
+              <a:t>(</a:t>
+            </a:r>
+            <a:r>
+              <a:rPr>
+                <a:solidFill>
+                  <a:srgbClr val="657422"/>
+                </a:solidFill>
+                <a:latin typeface="Courier"/>
+              </a:rPr>
+              <a:t>title =</a:t>
+            </a:r>
+            <a:r>
+              <a:rPr>
+                <a:solidFill>
+                  <a:srgbClr val="003B4F"/>
+                </a:solidFill>
+                <a:latin typeface="Courier"/>
+              </a:rPr>
+              <a:t> </a:t>
+            </a:r>
+            <a:r>
+              <a:rPr>
+                <a:solidFill>
+                  <a:srgbClr val="20794D"/>
+                </a:solidFill>
+                <a:latin typeface="Courier"/>
+              </a:rPr>
+              <a:t>"Program Impact on Waste Expenditures"</a:t>
+            </a:r>
+            <a:r>
+              <a:rPr>
+                <a:solidFill>
+                  <a:srgbClr val="003B4F"/>
+                </a:solidFill>
+                <a:latin typeface="Courier"/>
+              </a:rPr>
+              <a:t>, </a:t>
+            </a:r>
+            <a:r>
+              <a:rPr>
+                <a:solidFill>
+                  <a:srgbClr val="657422"/>
+                </a:solidFill>
+                <a:latin typeface="Courier"/>
+              </a:rPr>
+              <a:t>x =</a:t>
+            </a:r>
+            <a:r>
+              <a:rPr>
+                <a:solidFill>
+                  <a:srgbClr val="003B4F"/>
+                </a:solidFill>
+                <a:latin typeface="Courier"/>
+              </a:rPr>
+              <a:t> </a:t>
+            </a:r>
+            <a:r>
+              <a:rPr>
+                <a:solidFill>
+                  <a:srgbClr val="20794D"/>
+                </a:solidFill>
+                <a:latin typeface="Courier"/>
+              </a:rPr>
+              <a:t>"Round"</a:t>
+            </a:r>
+            <a:r>
+              <a:rPr>
+                <a:solidFill>
+                  <a:srgbClr val="003B4F"/>
+                </a:solidFill>
+                <a:latin typeface="Courier"/>
+              </a:rPr>
+              <a:t>,</a:t>
+            </a:r>
+            <a:br/>
+            <a:r>
+              <a:rPr>
+                <a:solidFill>
+                  <a:srgbClr val="003B4F"/>
+                </a:solidFill>
+                <a:latin typeface="Courier"/>
+              </a:rPr>
+              <a:t>       </a:t>
+            </a:r>
+            <a:r>
+              <a:rPr>
+                <a:solidFill>
+                  <a:srgbClr val="657422"/>
+                </a:solidFill>
+                <a:latin typeface="Courier"/>
+              </a:rPr>
+              <a:t>y =</a:t>
+            </a:r>
+            <a:r>
+              <a:rPr>
+                <a:solidFill>
+                  <a:srgbClr val="003B4F"/>
+                </a:solidFill>
+                <a:latin typeface="Courier"/>
+              </a:rPr>
+              <a:t> </a:t>
+            </a:r>
+            <a:r>
+              <a:rPr>
+                <a:solidFill>
+                  <a:srgbClr val="20794D"/>
+                </a:solidFill>
+                <a:latin typeface="Courier"/>
+              </a:rPr>
+              <a:t>"Waste Expenditures (USD)"</a:t>
+            </a:r>
+            <a:r>
+              <a:rPr>
+                <a:solidFill>
+                  <a:srgbClr val="003B4F"/>
+                </a:solidFill>
+                <a:latin typeface="Courier"/>
+              </a:rPr>
+              <a:t>) </a:t>
+            </a:r>
+            <a:r>
+              <a:rPr>
+                <a:solidFill>
+                  <a:srgbClr val="5E5E5E"/>
+                </a:solidFill>
+                <a:latin typeface="Courier"/>
+              </a:rPr>
+              <a:t>+</a:t>
+            </a:r>
+            <a:br/>
+            <a:r>
+              <a:rPr>
+                <a:solidFill>
+                  <a:srgbClr val="003B4F"/>
+                </a:solidFill>
+                <a:latin typeface="Courier"/>
+              </a:rPr>
+              <a:t>  </a:t>
+            </a:r>
+            <a:r>
+              <a:rPr>
+                <a:solidFill>
+                  <a:srgbClr val="4758AB"/>
+                </a:solidFill>
+                <a:latin typeface="Courier"/>
+              </a:rPr>
+              <a:t>theme_minimal</a:t>
+            </a:r>
+            <a:r>
+              <a:rPr>
+                <a:solidFill>
+                  <a:srgbClr val="003B4F"/>
+                </a:solidFill>
+                <a:latin typeface="Courier"/>
+              </a:rPr>
+              <a:t>() </a:t>
+            </a:r>
+            <a:r>
+              <a:rPr>
+                <a:solidFill>
+                  <a:srgbClr val="5E5E5E"/>
+                </a:solidFill>
+                <a:latin typeface="Courier"/>
+              </a:rPr>
+              <a:t>+</a:t>
+            </a:r>
+            <a:r>
+              <a:rPr>
+                <a:solidFill>
+                  <a:srgbClr val="003B4F"/>
+                </a:solidFill>
+                <a:latin typeface="Courier"/>
+              </a:rPr>
+              <a:t>  </a:t>
+            </a:r>
+            <a:r>
+              <a:rPr>
+                <a:solidFill>
+                  <a:srgbClr val="4758AB"/>
+                </a:solidFill>
+                <a:latin typeface="Courier"/>
+              </a:rPr>
+              <a:t>theme</a:t>
+            </a:r>
+            <a:r>
+              <a:rPr>
+                <a:solidFill>
+                  <a:srgbClr val="003B4F"/>
+                </a:solidFill>
+                <a:latin typeface="Courier"/>
+              </a:rPr>
+              <a:t>(</a:t>
+            </a:r>
+            <a:r>
+              <a:rPr>
+                <a:solidFill>
+                  <a:srgbClr val="657422"/>
+                </a:solidFill>
+                <a:latin typeface="Courier"/>
+              </a:rPr>
+              <a:t>legend.position =</a:t>
+            </a:r>
+            <a:r>
+              <a:rPr>
+                <a:solidFill>
+                  <a:srgbClr val="003B4F"/>
+                </a:solidFill>
+                <a:latin typeface="Courier"/>
+              </a:rPr>
+              <a:t> </a:t>
+            </a:r>
+            <a:r>
+              <a:rPr>
+                <a:solidFill>
+                  <a:srgbClr val="20794D"/>
+                </a:solidFill>
+                <a:latin typeface="Courier"/>
+              </a:rPr>
+              <a:t>"bottom"</a:t>
+            </a:r>
+            <a:r>
+              <a:rPr>
+                <a:solidFill>
+                  <a:srgbClr val="003B4F"/>
+                </a:solidFill>
+                <a:latin typeface="Courier"/>
+              </a:rPr>
+              <a:t>)</a:t>
+            </a:r>
+          </a:p>
+        </p:txBody>
+      </p:sp>
+      <p:pic>
+        <p:nvPicPr>
+          <p:cNvPr descr="session_6_files/figure-pptx/unnamed-chunk-12-1.png" id="0" name="Picture 1"/>
+          <p:cNvPicPr>
+            <a:picLocks noGrp="1" noChangeAspect="1"/>
+          </p:cNvPicPr>
+          <p:nvPr/>
+        </p:nvPicPr>
+        <p:blipFill>
+          <a:blip r:embed="rId2"/>
+          <a:stretch>
+            <a:fillRect/>
+          </a:stretch>
+        </p:blipFill>
+        <p:spPr bwMode="auto">
+          <a:xfrm>
+            <a:off x="4648200" y="1600200"/>
+            <a:ext cx="4038600" cy="2565400"/>
+          </a:xfrm>
+          <a:prstGeom prst="rect">
+            <a:avLst/>
+          </a:prstGeom>
+          <a:noFill/>
+          <a:ln w="9525">
+            <a:noFill/>
+            <a:headEnd/>
+            <a:tailEnd/>
+          </a:ln>
+        </p:spPr>
+      </p:pic>
+    </p:spTree>
+  </p:cSld>
+</p:sld>
+</file>
+
+<file path=ppt/slides/slide11.xml><?xml version="1.0" encoding="utf-8"?>
+<p:sld xmlns:a="http://schemas.openxmlformats.org/drawingml/2006/main" xmlns:r="http://schemas.openxmlformats.org/officeDocument/2006/relationships" xmlns:p="http://schemas.openxmlformats.org/presentationml/2006/main">
+  <p:cSld>
+    <p:spTree>
+      <p:nvGrpSpPr>
+        <p:cNvPr id="1" name=""/>
+        <p:cNvGrpSpPr/>
+        <p:nvPr/>
+      </p:nvGrpSpPr>
+      <p:grpSpPr>
+        <a:xfrm>
+          <a:off x="0" y="0"/>
+          <a:ext cx="0" cy="0"/>
+          <a:chOff x="0" y="0"/>
+          <a:chExt cx="0" cy="0"/>
+        </a:xfrm>
+      </p:grpSpPr>
+      <p:sp>
+        <p:nvSpPr>
+          <p:cNvPr id="2" name="Title 1"/>
+          <p:cNvSpPr>
+            <a:spLocks noGrp="1"/>
+          </p:cNvSpPr>
+          <p:nvPr>
+            <p:ph type="title"/>
+          </p:nvPr>
+        </p:nvSpPr>
+        <p:spPr/>
+        <p:txBody>
+          <a:bodyPr/>
+          <a:lstStyle/>
+          <a:p>
+            <a:pPr lvl="0" indent="0" marL="0">
+              <a:buNone/>
+            </a:pPr>
+            <a:r>
+              <a:rPr/>
               <a:t>Strength of the Results</a:t>
             </a:r>
           </a:p>
@@ -3272,7 +4457,7 @@
             </a:r>
             <a:r>
               <a:rPr/>
-              <a:t>: Impact exceeds the $10,000 threshold</a:t>
+              <a:t>: Impact exceeds the 1,000 AED threshold</a:t>
             </a:r>
           </a:p>
         </p:txBody>
@@ -3511,7 +4696,7 @@
 </p:sld>
 </file>
 
-<file path=ppt/slides/slide11.xml><?xml version="1.0" encoding="utf-8"?>
+<file path=ppt/slides/slide12.xml><?xml version="1.0" encoding="utf-8"?>
 <p:sld xmlns:a="http://schemas.openxmlformats.org/drawingml/2006/main" xmlns:r="http://schemas.openxmlformats.org/officeDocument/2006/relationships" xmlns:p="http://schemas.openxmlformats.org/presentationml/2006/main">
   <p:cSld>
     <p:spTree>
@@ -3590,7 +4775,7 @@
             </a:r>
             <a:r>
               <a:rPr/>
-              <a:t>: Program must reduce health expenditures by at least $10,000.</a:t>
+              <a:t>: Program must reduce waste expenditures by at least 1,000 AED.</a:t>
             </a:r>
           </a:p>
           <a:p>
@@ -3610,14 +4795,14 @@
             <a:pPr lvl="0"/>
             <a:r>
               <a:rPr/>
-              <a:t>Impact: -$10,140 (95% CI: [-$10,930, -$9,350])</a:t>
+              <a:t>Impact: -1,014 (95% CI: [-1,093, -935])</a:t>
             </a:r>
           </a:p>
           <a:p>
             <a:pPr lvl="0"/>
             <a:r>
               <a:rPr/>
-              <a:t>Exceeds threshold of $10,000 reduction</a:t>
+              <a:t>Exceeds threshold of 1,000 AED reduction</a:t>
             </a:r>
           </a:p>
           <a:p>
@@ -3771,7 +4956,7 @@
 </p:sld>
 </file>
 
-<file path=ppt/slides/slide12.xml><?xml version="1.0" encoding="utf-8"?>
+<file path=ppt/slides/slide13.xml><?xml version="1.0" encoding="utf-8"?>
 <p:sld xmlns:a="http://schemas.openxmlformats.org/drawingml/2006/main" xmlns:r="http://schemas.openxmlformats.org/officeDocument/2006/relationships" xmlns:p="http://schemas.openxmlformats.org/presentationml/2006/main">
   <p:cSld>
     <p:spTree>
@@ -4732,7 +5917,1072 @@
 </p:sld>
 </file>
 
-<file path=ppt/slides/slide13.xml><?xml version="1.0" encoding="utf-8"?>
+<file path=ppt/slides/slide14.xml><?xml version="1.0" encoding="utf-8"?>
+<p:sld xmlns:a="http://schemas.openxmlformats.org/drawingml/2006/main" xmlns:r="http://schemas.openxmlformats.org/officeDocument/2006/relationships" xmlns:p="http://schemas.openxmlformats.org/presentationml/2006/main">
+  <p:cSld>
+    <p:spTree>
+      <p:nvGrpSpPr>
+        <p:cNvPr id="1" name=""/>
+        <p:cNvGrpSpPr/>
+        <p:nvPr/>
+      </p:nvGrpSpPr>
+      <p:grpSpPr>
+        <a:xfrm>
+          <a:off x="0" y="0"/>
+          <a:ext cx="0" cy="0"/>
+          <a:chOff x="0" y="0"/>
+          <a:chExt cx="0" cy="0"/>
+        </a:xfrm>
+      </p:grpSpPr>
+      <p:sp>
+        <p:nvSpPr>
+          <p:cNvPr id="2" name="Title 1"/>
+          <p:cNvSpPr>
+            <a:spLocks noGrp="1"/>
+          </p:cNvSpPr>
+          <p:nvPr>
+            <p:ph type="title"/>
+          </p:nvPr>
+        </p:nvSpPr>
+        <p:spPr/>
+        <p:txBody>
+          <a:bodyPr/>
+          <a:lstStyle/>
+          <a:p>
+            <a:pPr lvl="0" indent="0" marL="0">
+              <a:buNone/>
+            </a:pPr>
+            <a:r>
+              <a:rPr/>
+              <a:t>Types of Randomization</a:t>
+            </a:r>
+          </a:p>
+        </p:txBody>
+      </p:sp>
+      <p:sp>
+        <p:nvSpPr>
+          <p:cNvPr id="3" name="Content Placeholder 2"/>
+          <p:cNvSpPr>
+            <a:spLocks noGrp="1"/>
+          </p:cNvSpPr>
+          <p:nvPr>
+            <p:ph idx="1"/>
+          </p:nvPr>
+        </p:nvSpPr>
+        <p:spPr/>
+        <p:txBody>
+          <a:bodyPr/>
+          <a:lstStyle/>
+          <a:p>
+            <a:pPr lvl="0" indent="0" marL="0">
+              <a:buNone/>
+            </a:pPr>
+            <a:r>
+              <a:rPr/>
+              <a:t>Different types of randomization can help address some of the ethical and practical challenges.</a:t>
+            </a:r>
+          </a:p>
+          <a:p>
+            <a:pPr lvl="0" indent="-342900" marL="342900">
+              <a:buAutoNum type="arabicPeriod"/>
+            </a:pPr>
+            <a:r>
+              <a:rPr b="1"/>
+              <a:t>Lottery</a:t>
+            </a:r>
+          </a:p>
+          <a:p>
+            <a:pPr lvl="1"/>
+            <a:r>
+              <a:rPr/>
+              <a:t>Use random number generator to select eligible units to receive treatment.</a:t>
+            </a:r>
+          </a:p>
+          <a:p>
+            <a:pPr lvl="1"/>
+            <a:r>
+              <a:rPr/>
+              <a:t>Useful when there are insufficient resources to meet demand and is logistically simple.</a:t>
+            </a:r>
+          </a:p>
+          <a:p>
+            <a:pPr lvl="1"/>
+            <a:r>
+              <a:rPr/>
+              <a:t>Some eligible units do not receive treatment (control).</a:t>
+            </a:r>
+          </a:p>
+          <a:p>
+            <a:pPr lvl="0" indent="-342900" marL="342900">
+              <a:buAutoNum type="arabicPeriod"/>
+            </a:pPr>
+            <a:r>
+              <a:rPr b="1"/>
+              <a:t>Multiple Treatments</a:t>
+            </a:r>
+          </a:p>
+          <a:p>
+            <a:pPr lvl="1"/>
+            <a:r>
+              <a:rPr/>
+              <a:t>Randomly assign units to different treatment arms.</a:t>
+            </a:r>
+          </a:p>
+          <a:p>
+            <a:pPr lvl="1"/>
+            <a:r>
+              <a:rPr/>
+              <a:t>Useful when we are interested in the comparative effectiveness of different intervention approaches or methods of service delivery.</a:t>
+            </a:r>
+          </a:p>
+          <a:p>
+            <a:pPr lvl="1"/>
+            <a:r>
+              <a:rPr/>
+              <a:t>Complex to implement and requires even larger sample.</a:t>
+            </a:r>
+          </a:p>
+          <a:p>
+            <a:pPr lvl="0" indent="-342900" marL="342900">
+              <a:buAutoNum type="arabicPeriod"/>
+            </a:pPr>
+            <a:r>
+              <a:rPr b="1"/>
+              <a:t>Phase-in</a:t>
+            </a:r>
+          </a:p>
+          <a:p>
+            <a:pPr lvl="1"/>
+            <a:r>
+              <a:rPr/>
+              <a:t>Randomly assign units to receive treatment at different times.</a:t>
+            </a:r>
+          </a:p>
+          <a:p>
+            <a:pPr lvl="1"/>
+            <a:r>
+              <a:rPr/>
+              <a:t>Useful when we want all eligible units to receive treatment eventually, and can help us understand impact of program over time.</a:t>
+            </a:r>
+          </a:p>
+          <a:p>
+            <a:pPr lvl="1"/>
+            <a:r>
+              <a:rPr/>
+              <a:t>Susceptible to anticipation bias.</a:t>
+            </a:r>
+          </a:p>
+          <a:p>
+            <a:pPr lvl="0" indent="-342900" marL="342900">
+              <a:buAutoNum type="arabicPeriod"/>
+            </a:pPr>
+            <a:r>
+              <a:rPr b="1"/>
+              <a:t>Encouragement</a:t>
+            </a:r>
+          </a:p>
+          <a:p>
+            <a:pPr lvl="1"/>
+            <a:r>
+              <a:rPr/>
+              <a:t>Treatment is randomly encouraged rather than assigned.</a:t>
+            </a:r>
+          </a:p>
+          <a:p>
+            <a:pPr lvl="1"/>
+            <a:r>
+              <a:rPr/>
+              <a:t>Useful when we want all units to have the option to receive treatment, and can help us understand if encouragement mechanisms improve outcomes.</a:t>
+            </a:r>
+          </a:p>
+          <a:p>
+            <a:pPr lvl="1"/>
+            <a:r>
+              <a:rPr/>
+              <a:t>Requires larger sample and assesses impact only for those that respond to encouragement.</a:t>
+            </a:r>
+          </a:p>
+          <a:p>
+            <a:pPr lvl="1"/>
+            <a:r>
+              <a:rPr/>
+              <a:t>Instrumental variables, covered in the next session, is an example of this</a:t>
+            </a:r>
+          </a:p>
+        </p:txBody>
+      </p:sp>
+    </p:spTree>
+  </p:cSld>
+  <p:timing>
+    <p:tnLst>
+      <p:par>
+        <p:cTn id="1" dur="indefinite" restart="never" nodeType="tmRoot">
+          <p:childTnLst>
+            <p:seq concurrent="1" nextAc="seek">
+              <p:cTn id="2" dur="indefinite" nodeType="mainSeq">
+                <p:childTnLst>
+                  <p:par>
+                    <p:cTn id="3" fill="hold">
+                      <p:stCondLst>
+                        <p:cond delay="indefinite"/>
+                      </p:stCondLst>
+                      <p:childTnLst>
+                        <p:par>
+                          <p:cTn id="4" fill="hold">
+                            <p:stCondLst>
+                              <p:cond delay="0"/>
+                            </p:stCondLst>
+                            <p:childTnLst>
+                              <p:par>
+                                <p:cTn id="5" presetID="1" presetClass="entr" presetSubtype="0" fill="hold" grpId="0" nodeType="clickEffect">
+                                  <p:stCondLst>
+                                    <p:cond delay="0"/>
+                                  </p:stCondLst>
+                                  <p:childTnLst>
+                                    <p:set>
+                                      <p:cBhvr>
+                                        <p:cTn id="6" dur="1" fill="hold">
+                                          <p:stCondLst>
+                                            <p:cond delay="0"/>
+                                          </p:stCondLst>
+                                        </p:cTn>
+                                        <p:tgtEl>
+                                          <p:spTgt spid="3">
+                                            <p:txEl>
+                                              <p:pRg st="1" end="1"/>
+                                            </p:txEl>
+                                          </p:spTgt>
+                                        </p:tgtEl>
+                                        <p:attrNameLst>
+                                          <p:attrName>style.visibility</p:attrName>
+                                        </p:attrNameLst>
+                                      </p:cBhvr>
+                                      <p:to>
+                                        <p:strVal val="visible"/>
+                                      </p:to>
+                                    </p:set>
+                                  </p:childTnLst>
+                                </p:cTn>
+                              </p:par>
+                            </p:childTnLst>
+                          </p:cTn>
+                        </p:par>
+                      </p:childTnLst>
+                    </p:cTn>
+                  </p:par>
+                  <p:par>
+                    <p:cTn id="7" fill="hold">
+                      <p:stCondLst>
+                        <p:cond delay="indefinite"/>
+                      </p:stCondLst>
+                      <p:childTnLst>
+                        <p:par>
+                          <p:cTn id="8" fill="hold">
+                            <p:stCondLst>
+                              <p:cond delay="0"/>
+                            </p:stCondLst>
+                            <p:childTnLst>
+                              <p:par>
+                                <p:cTn id="9" presetID="1" presetClass="entr" presetSubtype="0" fill="hold" grpId="0" nodeType="clickEffect">
+                                  <p:stCondLst>
+                                    <p:cond delay="0"/>
+                                  </p:stCondLst>
+                                  <p:childTnLst>
+                                    <p:set>
+                                      <p:cBhvr>
+                                        <p:cTn id="10" dur="1" fill="hold">
+                                          <p:stCondLst>
+                                            <p:cond delay="0"/>
+                                          </p:stCondLst>
+                                        </p:cTn>
+                                        <p:tgtEl>
+                                          <p:spTgt spid="3">
+                                            <p:txEl>
+                                              <p:pRg st="2" end="2"/>
+                                            </p:txEl>
+                                          </p:spTgt>
+                                        </p:tgtEl>
+                                        <p:attrNameLst>
+                                          <p:attrName>style.visibility</p:attrName>
+                                        </p:attrNameLst>
+                                      </p:cBhvr>
+                                      <p:to>
+                                        <p:strVal val="visible"/>
+                                      </p:to>
+                                    </p:set>
+                                  </p:childTnLst>
+                                </p:cTn>
+                              </p:par>
+                            </p:childTnLst>
+                          </p:cTn>
+                        </p:par>
+                      </p:childTnLst>
+                    </p:cTn>
+                  </p:par>
+                  <p:par>
+                    <p:cTn id="11" fill="hold">
+                      <p:stCondLst>
+                        <p:cond delay="indefinite"/>
+                      </p:stCondLst>
+                      <p:childTnLst>
+                        <p:par>
+                          <p:cTn id="12" fill="hold">
+                            <p:stCondLst>
+                              <p:cond delay="0"/>
+                            </p:stCondLst>
+                            <p:childTnLst>
+                              <p:par>
+                                <p:cTn id="13" presetID="1" presetClass="entr" presetSubtype="0" fill="hold" grpId="0" nodeType="clickEffect">
+                                  <p:stCondLst>
+                                    <p:cond delay="0"/>
+                                  </p:stCondLst>
+                                  <p:childTnLst>
+                                    <p:set>
+                                      <p:cBhvr>
+                                        <p:cTn id="14" dur="1" fill="hold">
+                                          <p:stCondLst>
+                                            <p:cond delay="0"/>
+                                          </p:stCondLst>
+                                        </p:cTn>
+                                        <p:tgtEl>
+                                          <p:spTgt spid="3">
+                                            <p:txEl>
+                                              <p:pRg st="3" end="3"/>
+                                            </p:txEl>
+                                          </p:spTgt>
+                                        </p:tgtEl>
+                                        <p:attrNameLst>
+                                          <p:attrName>style.visibility</p:attrName>
+                                        </p:attrNameLst>
+                                      </p:cBhvr>
+                                      <p:to>
+                                        <p:strVal val="visible"/>
+                                      </p:to>
+                                    </p:set>
+                                  </p:childTnLst>
+                                </p:cTn>
+                              </p:par>
+                            </p:childTnLst>
+                          </p:cTn>
+                        </p:par>
+                      </p:childTnLst>
+                    </p:cTn>
+                  </p:par>
+                  <p:par>
+                    <p:cTn id="15" fill="hold">
+                      <p:stCondLst>
+                        <p:cond delay="indefinite"/>
+                      </p:stCondLst>
+                      <p:childTnLst>
+                        <p:par>
+                          <p:cTn id="16" fill="hold">
+                            <p:stCondLst>
+                              <p:cond delay="0"/>
+                            </p:stCondLst>
+                            <p:childTnLst>
+                              <p:par>
+                                <p:cTn id="17" presetID="1" presetClass="entr" presetSubtype="0" fill="hold" grpId="0" nodeType="clickEffect">
+                                  <p:stCondLst>
+                                    <p:cond delay="0"/>
+                                  </p:stCondLst>
+                                  <p:childTnLst>
+                                    <p:set>
+                                      <p:cBhvr>
+                                        <p:cTn id="18" dur="1" fill="hold">
+                                          <p:stCondLst>
+                                            <p:cond delay="0"/>
+                                          </p:stCondLst>
+                                        </p:cTn>
+                                        <p:tgtEl>
+                                          <p:spTgt spid="3">
+                                            <p:txEl>
+                                              <p:pRg st="4" end="4"/>
+                                            </p:txEl>
+                                          </p:spTgt>
+                                        </p:tgtEl>
+                                        <p:attrNameLst>
+                                          <p:attrName>style.visibility</p:attrName>
+                                        </p:attrNameLst>
+                                      </p:cBhvr>
+                                      <p:to>
+                                        <p:strVal val="visible"/>
+                                      </p:to>
+                                    </p:set>
+                                  </p:childTnLst>
+                                </p:cTn>
+                              </p:par>
+                            </p:childTnLst>
+                          </p:cTn>
+                        </p:par>
+                      </p:childTnLst>
+                    </p:cTn>
+                  </p:par>
+                  <p:par>
+                    <p:cTn id="19" fill="hold">
+                      <p:stCondLst>
+                        <p:cond delay="indefinite"/>
+                      </p:stCondLst>
+                      <p:childTnLst>
+                        <p:par>
+                          <p:cTn id="20" fill="hold">
+                            <p:stCondLst>
+                              <p:cond delay="0"/>
+                            </p:stCondLst>
+                            <p:childTnLst>
+                              <p:par>
+                                <p:cTn id="21" presetID="1" presetClass="entr" presetSubtype="0" fill="hold" grpId="0" nodeType="clickEffect">
+                                  <p:stCondLst>
+                                    <p:cond delay="0"/>
+                                  </p:stCondLst>
+                                  <p:childTnLst>
+                                    <p:set>
+                                      <p:cBhvr>
+                                        <p:cTn id="22" dur="1" fill="hold">
+                                          <p:stCondLst>
+                                            <p:cond delay="0"/>
+                                          </p:stCondLst>
+                                        </p:cTn>
+                                        <p:tgtEl>
+                                          <p:spTgt spid="3">
+                                            <p:txEl>
+                                              <p:pRg st="5" end="5"/>
+                                            </p:txEl>
+                                          </p:spTgt>
+                                        </p:tgtEl>
+                                        <p:attrNameLst>
+                                          <p:attrName>style.visibility</p:attrName>
+                                        </p:attrNameLst>
+                                      </p:cBhvr>
+                                      <p:to>
+                                        <p:strVal val="visible"/>
+                                      </p:to>
+                                    </p:set>
+                                  </p:childTnLst>
+                                </p:cTn>
+                              </p:par>
+                            </p:childTnLst>
+                          </p:cTn>
+                        </p:par>
+                      </p:childTnLst>
+                    </p:cTn>
+                  </p:par>
+                  <p:par>
+                    <p:cTn id="23" fill="hold">
+                      <p:stCondLst>
+                        <p:cond delay="indefinite"/>
+                      </p:stCondLst>
+                      <p:childTnLst>
+                        <p:par>
+                          <p:cTn id="24" fill="hold">
+                            <p:stCondLst>
+                              <p:cond delay="0"/>
+                            </p:stCondLst>
+                            <p:childTnLst>
+                              <p:par>
+                                <p:cTn id="25" presetID="1" presetClass="entr" presetSubtype="0" fill="hold" grpId="0" nodeType="clickEffect">
+                                  <p:stCondLst>
+                                    <p:cond delay="0"/>
+                                  </p:stCondLst>
+                                  <p:childTnLst>
+                                    <p:set>
+                                      <p:cBhvr>
+                                        <p:cTn id="26" dur="1" fill="hold">
+                                          <p:stCondLst>
+                                            <p:cond delay="0"/>
+                                          </p:stCondLst>
+                                        </p:cTn>
+                                        <p:tgtEl>
+                                          <p:spTgt spid="3">
+                                            <p:txEl>
+                                              <p:pRg st="6" end="6"/>
+                                            </p:txEl>
+                                          </p:spTgt>
+                                        </p:tgtEl>
+                                        <p:attrNameLst>
+                                          <p:attrName>style.visibility</p:attrName>
+                                        </p:attrNameLst>
+                                      </p:cBhvr>
+                                      <p:to>
+                                        <p:strVal val="visible"/>
+                                      </p:to>
+                                    </p:set>
+                                  </p:childTnLst>
+                                </p:cTn>
+                              </p:par>
+                            </p:childTnLst>
+                          </p:cTn>
+                        </p:par>
+                      </p:childTnLst>
+                    </p:cTn>
+                  </p:par>
+                  <p:par>
+                    <p:cTn id="27" fill="hold">
+                      <p:stCondLst>
+                        <p:cond delay="indefinite"/>
+                      </p:stCondLst>
+                      <p:childTnLst>
+                        <p:par>
+                          <p:cTn id="28" fill="hold">
+                            <p:stCondLst>
+                              <p:cond delay="0"/>
+                            </p:stCondLst>
+                            <p:childTnLst>
+                              <p:par>
+                                <p:cTn id="29" presetID="1" presetClass="entr" presetSubtype="0" fill="hold" grpId="0" nodeType="clickEffect">
+                                  <p:stCondLst>
+                                    <p:cond delay="0"/>
+                                  </p:stCondLst>
+                                  <p:childTnLst>
+                                    <p:set>
+                                      <p:cBhvr>
+                                        <p:cTn id="30" dur="1" fill="hold">
+                                          <p:stCondLst>
+                                            <p:cond delay="0"/>
+                                          </p:stCondLst>
+                                        </p:cTn>
+                                        <p:tgtEl>
+                                          <p:spTgt spid="3">
+                                            <p:txEl>
+                                              <p:pRg st="7" end="7"/>
+                                            </p:txEl>
+                                          </p:spTgt>
+                                        </p:tgtEl>
+                                        <p:attrNameLst>
+                                          <p:attrName>style.visibility</p:attrName>
+                                        </p:attrNameLst>
+                                      </p:cBhvr>
+                                      <p:to>
+                                        <p:strVal val="visible"/>
+                                      </p:to>
+                                    </p:set>
+                                  </p:childTnLst>
+                                </p:cTn>
+                              </p:par>
+                            </p:childTnLst>
+                          </p:cTn>
+                        </p:par>
+                      </p:childTnLst>
+                    </p:cTn>
+                  </p:par>
+                  <p:par>
+                    <p:cTn id="31" fill="hold">
+                      <p:stCondLst>
+                        <p:cond delay="indefinite"/>
+                      </p:stCondLst>
+                      <p:childTnLst>
+                        <p:par>
+                          <p:cTn id="32" fill="hold">
+                            <p:stCondLst>
+                              <p:cond delay="0"/>
+                            </p:stCondLst>
+                            <p:childTnLst>
+                              <p:par>
+                                <p:cTn id="33" presetID="1" presetClass="entr" presetSubtype="0" fill="hold" grpId="0" nodeType="clickEffect">
+                                  <p:stCondLst>
+                                    <p:cond delay="0"/>
+                                  </p:stCondLst>
+                                  <p:childTnLst>
+                                    <p:set>
+                                      <p:cBhvr>
+                                        <p:cTn id="34" dur="1" fill="hold">
+                                          <p:stCondLst>
+                                            <p:cond delay="0"/>
+                                          </p:stCondLst>
+                                        </p:cTn>
+                                        <p:tgtEl>
+                                          <p:spTgt spid="3">
+                                            <p:txEl>
+                                              <p:pRg st="8" end="8"/>
+                                            </p:txEl>
+                                          </p:spTgt>
+                                        </p:tgtEl>
+                                        <p:attrNameLst>
+                                          <p:attrName>style.visibility</p:attrName>
+                                        </p:attrNameLst>
+                                      </p:cBhvr>
+                                      <p:to>
+                                        <p:strVal val="visible"/>
+                                      </p:to>
+                                    </p:set>
+                                  </p:childTnLst>
+                                </p:cTn>
+                              </p:par>
+                            </p:childTnLst>
+                          </p:cTn>
+                        </p:par>
+                      </p:childTnLst>
+                    </p:cTn>
+                  </p:par>
+                  <p:par>
+                    <p:cTn id="35" fill="hold">
+                      <p:stCondLst>
+                        <p:cond delay="indefinite"/>
+                      </p:stCondLst>
+                      <p:childTnLst>
+                        <p:par>
+                          <p:cTn id="36" fill="hold">
+                            <p:stCondLst>
+                              <p:cond delay="0"/>
+                            </p:stCondLst>
+                            <p:childTnLst>
+                              <p:par>
+                                <p:cTn id="37" presetID="1" presetClass="entr" presetSubtype="0" fill="hold" grpId="0" nodeType="clickEffect">
+                                  <p:stCondLst>
+                                    <p:cond delay="0"/>
+                                  </p:stCondLst>
+                                  <p:childTnLst>
+                                    <p:set>
+                                      <p:cBhvr>
+                                        <p:cTn id="38" dur="1" fill="hold">
+                                          <p:stCondLst>
+                                            <p:cond delay="0"/>
+                                          </p:stCondLst>
+                                        </p:cTn>
+                                        <p:tgtEl>
+                                          <p:spTgt spid="3">
+                                            <p:txEl>
+                                              <p:pRg st="9" end="9"/>
+                                            </p:txEl>
+                                          </p:spTgt>
+                                        </p:tgtEl>
+                                        <p:attrNameLst>
+                                          <p:attrName>style.visibility</p:attrName>
+                                        </p:attrNameLst>
+                                      </p:cBhvr>
+                                      <p:to>
+                                        <p:strVal val="visible"/>
+                                      </p:to>
+                                    </p:set>
+                                  </p:childTnLst>
+                                </p:cTn>
+                              </p:par>
+                            </p:childTnLst>
+                          </p:cTn>
+                        </p:par>
+                      </p:childTnLst>
+                    </p:cTn>
+                  </p:par>
+                  <p:par>
+                    <p:cTn id="39" fill="hold">
+                      <p:stCondLst>
+                        <p:cond delay="indefinite"/>
+                      </p:stCondLst>
+                      <p:childTnLst>
+                        <p:par>
+                          <p:cTn id="40" fill="hold">
+                            <p:stCondLst>
+                              <p:cond delay="0"/>
+                            </p:stCondLst>
+                            <p:childTnLst>
+                              <p:par>
+                                <p:cTn id="41" presetID="1" presetClass="entr" presetSubtype="0" fill="hold" grpId="0" nodeType="clickEffect">
+                                  <p:stCondLst>
+                                    <p:cond delay="0"/>
+                                  </p:stCondLst>
+                                  <p:childTnLst>
+                                    <p:set>
+                                      <p:cBhvr>
+                                        <p:cTn id="42" dur="1" fill="hold">
+                                          <p:stCondLst>
+                                            <p:cond delay="0"/>
+                                          </p:stCondLst>
+                                        </p:cTn>
+                                        <p:tgtEl>
+                                          <p:spTgt spid="3">
+                                            <p:txEl>
+                                              <p:pRg st="10" end="10"/>
+                                            </p:txEl>
+                                          </p:spTgt>
+                                        </p:tgtEl>
+                                        <p:attrNameLst>
+                                          <p:attrName>style.visibility</p:attrName>
+                                        </p:attrNameLst>
+                                      </p:cBhvr>
+                                      <p:to>
+                                        <p:strVal val="visible"/>
+                                      </p:to>
+                                    </p:set>
+                                  </p:childTnLst>
+                                </p:cTn>
+                              </p:par>
+                            </p:childTnLst>
+                          </p:cTn>
+                        </p:par>
+                      </p:childTnLst>
+                    </p:cTn>
+                  </p:par>
+                  <p:par>
+                    <p:cTn id="43" fill="hold">
+                      <p:stCondLst>
+                        <p:cond delay="indefinite"/>
+                      </p:stCondLst>
+                      <p:childTnLst>
+                        <p:par>
+                          <p:cTn id="44" fill="hold">
+                            <p:stCondLst>
+                              <p:cond delay="0"/>
+                            </p:stCondLst>
+                            <p:childTnLst>
+                              <p:par>
+                                <p:cTn id="45" presetID="1" presetClass="entr" presetSubtype="0" fill="hold" grpId="0" nodeType="clickEffect">
+                                  <p:stCondLst>
+                                    <p:cond delay="0"/>
+                                  </p:stCondLst>
+                                  <p:childTnLst>
+                                    <p:set>
+                                      <p:cBhvr>
+                                        <p:cTn id="46" dur="1" fill="hold">
+                                          <p:stCondLst>
+                                            <p:cond delay="0"/>
+                                          </p:stCondLst>
+                                        </p:cTn>
+                                        <p:tgtEl>
+                                          <p:spTgt spid="3">
+                                            <p:txEl>
+                                              <p:pRg st="11" end="11"/>
+                                            </p:txEl>
+                                          </p:spTgt>
+                                        </p:tgtEl>
+                                        <p:attrNameLst>
+                                          <p:attrName>style.visibility</p:attrName>
+                                        </p:attrNameLst>
+                                      </p:cBhvr>
+                                      <p:to>
+                                        <p:strVal val="visible"/>
+                                      </p:to>
+                                    </p:set>
+                                  </p:childTnLst>
+                                </p:cTn>
+                              </p:par>
+                            </p:childTnLst>
+                          </p:cTn>
+                        </p:par>
+                      </p:childTnLst>
+                    </p:cTn>
+                  </p:par>
+                  <p:par>
+                    <p:cTn id="47" fill="hold">
+                      <p:stCondLst>
+                        <p:cond delay="indefinite"/>
+                      </p:stCondLst>
+                      <p:childTnLst>
+                        <p:par>
+                          <p:cTn id="48" fill="hold">
+                            <p:stCondLst>
+                              <p:cond delay="0"/>
+                            </p:stCondLst>
+                            <p:childTnLst>
+                              <p:par>
+                                <p:cTn id="49" presetID="1" presetClass="entr" presetSubtype="0" fill="hold" grpId="0" nodeType="clickEffect">
+                                  <p:stCondLst>
+                                    <p:cond delay="0"/>
+                                  </p:stCondLst>
+                                  <p:childTnLst>
+                                    <p:set>
+                                      <p:cBhvr>
+                                        <p:cTn id="50" dur="1" fill="hold">
+                                          <p:stCondLst>
+                                            <p:cond delay="0"/>
+                                          </p:stCondLst>
+                                        </p:cTn>
+                                        <p:tgtEl>
+                                          <p:spTgt spid="3">
+                                            <p:txEl>
+                                              <p:pRg st="12" end="12"/>
+                                            </p:txEl>
+                                          </p:spTgt>
+                                        </p:tgtEl>
+                                        <p:attrNameLst>
+                                          <p:attrName>style.visibility</p:attrName>
+                                        </p:attrNameLst>
+                                      </p:cBhvr>
+                                      <p:to>
+                                        <p:strVal val="visible"/>
+                                      </p:to>
+                                    </p:set>
+                                  </p:childTnLst>
+                                </p:cTn>
+                              </p:par>
+                            </p:childTnLst>
+                          </p:cTn>
+                        </p:par>
+                      </p:childTnLst>
+                    </p:cTn>
+                  </p:par>
+                  <p:par>
+                    <p:cTn id="51" fill="hold">
+                      <p:stCondLst>
+                        <p:cond delay="indefinite"/>
+                      </p:stCondLst>
+                      <p:childTnLst>
+                        <p:par>
+                          <p:cTn id="52" fill="hold">
+                            <p:stCondLst>
+                              <p:cond delay="0"/>
+                            </p:stCondLst>
+                            <p:childTnLst>
+                              <p:par>
+                                <p:cTn id="53" presetID="1" presetClass="entr" presetSubtype="0" fill="hold" grpId="0" nodeType="clickEffect">
+                                  <p:stCondLst>
+                                    <p:cond delay="0"/>
+                                  </p:stCondLst>
+                                  <p:childTnLst>
+                                    <p:set>
+                                      <p:cBhvr>
+                                        <p:cTn id="54" dur="1" fill="hold">
+                                          <p:stCondLst>
+                                            <p:cond delay="0"/>
+                                          </p:stCondLst>
+                                        </p:cTn>
+                                        <p:tgtEl>
+                                          <p:spTgt spid="3">
+                                            <p:txEl>
+                                              <p:pRg st="13" end="13"/>
+                                            </p:txEl>
+                                          </p:spTgt>
+                                        </p:tgtEl>
+                                        <p:attrNameLst>
+                                          <p:attrName>style.visibility</p:attrName>
+                                        </p:attrNameLst>
+                                      </p:cBhvr>
+                                      <p:to>
+                                        <p:strVal val="visible"/>
+                                      </p:to>
+                                    </p:set>
+                                  </p:childTnLst>
+                                </p:cTn>
+                              </p:par>
+                            </p:childTnLst>
+                          </p:cTn>
+                        </p:par>
+                      </p:childTnLst>
+                    </p:cTn>
+                  </p:par>
+                  <p:par>
+                    <p:cTn id="55" fill="hold">
+                      <p:stCondLst>
+                        <p:cond delay="indefinite"/>
+                      </p:stCondLst>
+                      <p:childTnLst>
+                        <p:par>
+                          <p:cTn id="56" fill="hold">
+                            <p:stCondLst>
+                              <p:cond delay="0"/>
+                            </p:stCondLst>
+                            <p:childTnLst>
+                              <p:par>
+                                <p:cTn id="57" presetID="1" presetClass="entr" presetSubtype="0" fill="hold" grpId="0" nodeType="clickEffect">
+                                  <p:stCondLst>
+                                    <p:cond delay="0"/>
+                                  </p:stCondLst>
+                                  <p:childTnLst>
+                                    <p:set>
+                                      <p:cBhvr>
+                                        <p:cTn id="58" dur="1" fill="hold">
+                                          <p:stCondLst>
+                                            <p:cond delay="0"/>
+                                          </p:stCondLst>
+                                        </p:cTn>
+                                        <p:tgtEl>
+                                          <p:spTgt spid="3">
+                                            <p:txEl>
+                                              <p:pRg st="14" end="14"/>
+                                            </p:txEl>
+                                          </p:spTgt>
+                                        </p:tgtEl>
+                                        <p:attrNameLst>
+                                          <p:attrName>style.visibility</p:attrName>
+                                        </p:attrNameLst>
+                                      </p:cBhvr>
+                                      <p:to>
+                                        <p:strVal val="visible"/>
+                                      </p:to>
+                                    </p:set>
+                                  </p:childTnLst>
+                                </p:cTn>
+                              </p:par>
+                            </p:childTnLst>
+                          </p:cTn>
+                        </p:par>
+                      </p:childTnLst>
+                    </p:cTn>
+                  </p:par>
+                  <p:par>
+                    <p:cTn id="59" fill="hold">
+                      <p:stCondLst>
+                        <p:cond delay="indefinite"/>
+                      </p:stCondLst>
+                      <p:childTnLst>
+                        <p:par>
+                          <p:cTn id="60" fill="hold">
+                            <p:stCondLst>
+                              <p:cond delay="0"/>
+                            </p:stCondLst>
+                            <p:childTnLst>
+                              <p:par>
+                                <p:cTn id="61" presetID="1" presetClass="entr" presetSubtype="0" fill="hold" grpId="0" nodeType="clickEffect">
+                                  <p:stCondLst>
+                                    <p:cond delay="0"/>
+                                  </p:stCondLst>
+                                  <p:childTnLst>
+                                    <p:set>
+                                      <p:cBhvr>
+                                        <p:cTn id="62" dur="1" fill="hold">
+                                          <p:stCondLst>
+                                            <p:cond delay="0"/>
+                                          </p:stCondLst>
+                                        </p:cTn>
+                                        <p:tgtEl>
+                                          <p:spTgt spid="3">
+                                            <p:txEl>
+                                              <p:pRg st="15" end="15"/>
+                                            </p:txEl>
+                                          </p:spTgt>
+                                        </p:tgtEl>
+                                        <p:attrNameLst>
+                                          <p:attrName>style.visibility</p:attrName>
+                                        </p:attrNameLst>
+                                      </p:cBhvr>
+                                      <p:to>
+                                        <p:strVal val="visible"/>
+                                      </p:to>
+                                    </p:set>
+                                  </p:childTnLst>
+                                </p:cTn>
+                              </p:par>
+                            </p:childTnLst>
+                          </p:cTn>
+                        </p:par>
+                      </p:childTnLst>
+                    </p:cTn>
+                  </p:par>
+                  <p:par>
+                    <p:cTn id="63" fill="hold">
+                      <p:stCondLst>
+                        <p:cond delay="indefinite"/>
+                      </p:stCondLst>
+                      <p:childTnLst>
+                        <p:par>
+                          <p:cTn id="64" fill="hold">
+                            <p:stCondLst>
+                              <p:cond delay="0"/>
+                            </p:stCondLst>
+                            <p:childTnLst>
+                              <p:par>
+                                <p:cTn id="65" presetID="1" presetClass="entr" presetSubtype="0" fill="hold" grpId="0" nodeType="clickEffect">
+                                  <p:stCondLst>
+                                    <p:cond delay="0"/>
+                                  </p:stCondLst>
+                                  <p:childTnLst>
+                                    <p:set>
+                                      <p:cBhvr>
+                                        <p:cTn id="66" dur="1" fill="hold">
+                                          <p:stCondLst>
+                                            <p:cond delay="0"/>
+                                          </p:stCondLst>
+                                        </p:cTn>
+                                        <p:tgtEl>
+                                          <p:spTgt spid="3">
+                                            <p:txEl>
+                                              <p:pRg st="16" end="16"/>
+                                            </p:txEl>
+                                          </p:spTgt>
+                                        </p:tgtEl>
+                                        <p:attrNameLst>
+                                          <p:attrName>style.visibility</p:attrName>
+                                        </p:attrNameLst>
+                                      </p:cBhvr>
+                                      <p:to>
+                                        <p:strVal val="visible"/>
+                                      </p:to>
+                                    </p:set>
+                                  </p:childTnLst>
+                                </p:cTn>
+                              </p:par>
+                            </p:childTnLst>
+                          </p:cTn>
+                        </p:par>
+                      </p:childTnLst>
+                    </p:cTn>
+                  </p:par>
+                  <p:par>
+                    <p:cTn id="67" fill="hold">
+                      <p:stCondLst>
+                        <p:cond delay="indefinite"/>
+                      </p:stCondLst>
+                      <p:childTnLst>
+                        <p:par>
+                          <p:cTn id="68" fill="hold">
+                            <p:stCondLst>
+                              <p:cond delay="0"/>
+                            </p:stCondLst>
+                            <p:childTnLst>
+                              <p:par>
+                                <p:cTn id="69" presetID="1" presetClass="entr" presetSubtype="0" fill="hold" grpId="0" nodeType="clickEffect">
+                                  <p:stCondLst>
+                                    <p:cond delay="0"/>
+                                  </p:stCondLst>
+                                  <p:childTnLst>
+                                    <p:set>
+                                      <p:cBhvr>
+                                        <p:cTn id="70" dur="1" fill="hold">
+                                          <p:stCondLst>
+                                            <p:cond delay="0"/>
+                                          </p:stCondLst>
+                                        </p:cTn>
+                                        <p:tgtEl>
+                                          <p:spTgt spid="3">
+                                            <p:txEl>
+                                              <p:pRg st="17" end="17"/>
+                                            </p:txEl>
+                                          </p:spTgt>
+                                        </p:tgtEl>
+                                        <p:attrNameLst>
+                                          <p:attrName>style.visibility</p:attrName>
+                                        </p:attrNameLst>
+                                      </p:cBhvr>
+                                      <p:to>
+                                        <p:strVal val="visible"/>
+                                      </p:to>
+                                    </p:set>
+                                  </p:childTnLst>
+                                </p:cTn>
+                              </p:par>
+                            </p:childTnLst>
+                          </p:cTn>
+                        </p:par>
+                      </p:childTnLst>
+                    </p:cTn>
+                  </p:par>
+                </p:childTnLst>
+              </p:cTn>
+              <p:prevCondLst>
+                <p:cond evt="onPrev" delay="0">
+                  <p:tgtEl>
+                    <p:sldTgt/>
+                  </p:tgtEl>
+                </p:cond>
+              </p:prevCondLst>
+              <p:nextCondLst>
+                <p:cond evt="onNext" delay="0">
+                  <p:tgtEl>
+                    <p:sldTgt/>
+                  </p:tgtEl>
+                </p:cond>
+              </p:nextCondLst>
+            </p:seq>
+          </p:childTnLst>
+        </p:cTn>
+      </p:par>
+    </p:tnLst>
+    <p:bldLst>
+      <p:bldP spid="3" grpId="0" uiExpand="1" build="p"/>
+    </p:bldLst>
+  </p:timing>
+</p:sld>
+</file>
+
+<file path=ppt/slides/slide15.xml><?xml version="1.0" encoding="utf-8"?>
 <p:sld xmlns:a="http://schemas.openxmlformats.org/drawingml/2006/main" xmlns:r="http://schemas.openxmlformats.org/officeDocument/2006/relationships" xmlns:p="http://schemas.openxmlformats.org/presentationml/2006/main">
   <p:cSld>
     <p:spTree>
@@ -5085,7 +7335,7 @@
 </p:sld>
 </file>
 
-<file path=ppt/slides/slide14.xml><?xml version="1.0" encoding="utf-8"?>
+<file path=ppt/slides/slide16.xml><?xml version="1.0" encoding="utf-8"?>
 <p:sld xmlns:a="http://schemas.openxmlformats.org/drawingml/2006/main" xmlns:r="http://schemas.openxmlformats.org/officeDocument/2006/relationships" xmlns:p="http://schemas.openxmlformats.org/presentationml/2006/main">
   <p:cSld>
     <p:spTree>
@@ -5174,7 +7424,7 @@
             </a:pPr>
             <a:r>
               <a:rPr/>
-              <a:t>The Programm reduces waste expenditures by $10,140, exceeding the threshold</a:t>
+              <a:t>The program reduces waste expenditures by 1,014 AED, exceeding the threshold</a:t>
             </a:r>
           </a:p>
           <a:p>
@@ -5471,7 +7721,7 @@
 </p:sld>
 </file>
 
-<file path=ppt/slides/slide15.xml><?xml version="1.0" encoding="utf-8"?>
+<file path=ppt/slides/slide17.xml><?xml version="1.0" encoding="utf-8"?>
 <p:sld xmlns:a="http://schemas.openxmlformats.org/drawingml/2006/main" xmlns:r="http://schemas.openxmlformats.org/officeDocument/2006/relationships" xmlns:p="http://schemas.openxmlformats.org/presentationml/2006/main">
   <p:cSld>
     <p:spTree>
@@ -5645,6 +7895,17 @@
             <a:r>
               <a:rPr/>
               <a:t>: Randomization creates a valid counterfactual</a:t>
+            </a:r>
+          </a:p>
+          <a:p>
+            <a:pPr lvl="0"/>
+            <a:r>
+              <a:rPr b="1"/>
+              <a:t>Types</a:t>
+            </a:r>
+            <a:r>
+              <a:rPr/>
+              <a:t>: Encouragement, lottery, phase-in, etc.</a:t>
             </a:r>
           </a:p>
         </p:txBody>
@@ -5885,6 +8146,55 @@
                       </p:childTnLst>
                     </p:cTn>
                   </p:par>
+                  <p:par>
+                    <p:cTn id="19" fill="hold">
+                      <p:stCondLst>
+                        <p:cond delay="indefinite"/>
+                      </p:stCondLst>
+                      <p:childTnLst>
+                        <p:par>
+                          <p:cTn id="20" fill="hold">
+                            <p:stCondLst>
+                              <p:cond delay="0"/>
+                            </p:stCondLst>
+                            <p:childTnLst>
+                              <p:par>
+                                <p:cTn id="21" presetID="1" presetClass="entr" presetSubtype="0" fill="hold" grpId="0" nodeType="clickEffect">
+                                  <p:stCondLst>
+                                    <p:cond delay="0"/>
+                                  </p:stCondLst>
+                                  <p:childTnLst>
+                                    <p:set>
+                                      <p:cBhvr>
+                                        <p:cTn id="22" dur="1" fill="hold">
+                                          <p:stCondLst>
+                                            <p:cond delay="0"/>
+                                          </p:stCondLst>
+                                        </p:cTn>
+                                        <p:tgtEl>
+                                          <p:spTgt spid="3">
+                                            <p:txEl>
+                                              <p:pRg st="4" end="4"/>
+                                            </p:txEl>
+                                          </p:spTgt>
+                                        </p:tgtEl>
+                                        <p:attrNameLst>
+                                          <p:attrName>style.visibility</p:attrName>
+                                        </p:attrNameLst>
+                                      </p:cBhvr>
+                                      <p:to>
+                                        <p:strVal val="visible"/>
+                                      </p:to>
+                                    </p:set>
+                                  </p:childTnLst>
+                                </p:cTn>
+                              </p:par>
+                            </p:childTnLst>
+                          </p:cTn>
+                        </p:par>
+                      </p:childTnLst>
+                    </p:cTn>
+                  </p:par>
                 </p:childTnLst>
               </p:cTn>
               <p:prevCondLst>
@@ -5914,6 +8224,428 @@
 </file>
 
 <file path=ppt/slides/slide3.xml><?xml version="1.0" encoding="utf-8"?>
+<p:sld xmlns:a="http://schemas.openxmlformats.org/drawingml/2006/main" xmlns:r="http://schemas.openxmlformats.org/officeDocument/2006/relationships" xmlns:p="http://schemas.openxmlformats.org/presentationml/2006/main">
+  <p:cSld>
+    <p:spTree>
+      <p:nvGrpSpPr>
+        <p:cNvPr id="1" name=""/>
+        <p:cNvGrpSpPr/>
+        <p:nvPr/>
+      </p:nvGrpSpPr>
+      <p:grpSpPr>
+        <a:xfrm>
+          <a:off x="0" y="0"/>
+          <a:ext cx="0" cy="0"/>
+          <a:chOff x="0" y="0"/>
+          <a:chExt cx="0" cy="0"/>
+        </a:xfrm>
+      </p:grpSpPr>
+      <p:sp>
+        <p:nvSpPr>
+          <p:cNvPr id="2" name="Title 1"/>
+          <p:cNvSpPr>
+            <a:spLocks noGrp="1"/>
+          </p:cNvSpPr>
+          <p:nvPr>
+            <p:ph type="title"/>
+          </p:nvPr>
+        </p:nvSpPr>
+        <p:spPr/>
+        <p:txBody>
+          <a:bodyPr/>
+          <a:lstStyle/>
+          <a:p>
+            <a:pPr lvl="0" indent="0" marL="0">
+              <a:buNone/>
+            </a:pPr>
+            <a:r>
+              <a:rPr/>
+              <a:t>Why Does Randomization Work? How Does it Create a Valid Counterfactual?</a:t>
+            </a:r>
+          </a:p>
+        </p:txBody>
+      </p:sp>
+      <p:sp>
+        <p:nvSpPr>
+          <p:cNvPr id="3" name="Content Placeholder 2"/>
+          <p:cNvSpPr>
+            <a:spLocks noGrp="1"/>
+          </p:cNvSpPr>
+          <p:nvPr>
+            <p:ph idx="1"/>
+          </p:nvPr>
+        </p:nvSpPr>
+        <p:spPr/>
+        <p:txBody>
+          <a:bodyPr/>
+          <a:lstStyle/>
+          <a:p>
+            <a:pPr lvl="0" indent="0" marL="0">
+              <a:buNone/>
+            </a:pPr>
+            <a:r>
+              <a:rPr/>
+              <a:t>Let’s think through an example.</a:t>
+            </a:r>
+          </a:p>
+          <a:p>
+            <a:pPr lvl="0"/>
+            <a:r>
+              <a:rPr/>
+              <a:t>If we randomly choose two people from this room, they will likely have very different characteristics (observable ones such as age, sex, education, and unobservable ones such as innate abilities, motivation, ideas, etc.). </a:t>
+            </a:r>
+            <a:r>
+              <a:rPr b="1"/>
+              <a:t>They may not have anything in common at all. They would not make good counterfactuals for each other.</a:t>
+            </a:r>
+          </a:p>
+          <a:p>
+            <a:pPr lvl="0"/>
+            <a:r>
+              <a:rPr/>
+              <a:t>However, something different happens when we randomly choose large groups of people. If we were to randomly choose two groups of 1,000 people from across the country, with every person having an equal chance of being chosen, these groups will, </a:t>
+            </a:r>
+            <a:r>
+              <a:rPr i="1"/>
+              <a:t>on average</a:t>
+            </a:r>
+            <a:r>
+              <a:rPr/>
+              <a:t>, have statistically equivalent characteristics. If you remember from statistics class, </a:t>
+            </a:r>
+            <a:r>
+              <a:rPr b="1"/>
+              <a:t>a random sample represents the population from which it is drawn.</a:t>
+            </a:r>
+            <a:r>
+              <a:rPr/>
+              <a:t> Therefore, two large random samples will have statistically equivalent characteristics that represent the population from which they were drawn. We would expect these groups to have:</a:t>
+            </a:r>
+          </a:p>
+          <a:p>
+            <a:pPr lvl="1"/>
+            <a:r>
+              <a:rPr/>
+              <a:t>Approximately the same average age, sex composition, average level of educational attainment, same average income</a:t>
+            </a:r>
+          </a:p>
+          <a:p>
+            <a:pPr lvl="1"/>
+            <a:r>
+              <a:rPr/>
+              <a:t>And they will be approximately equal in characteristics we can’t directly observe or measure: approximately the same ability, the same motivation, etc.</a:t>
+            </a:r>
+          </a:p>
+          <a:p>
+            <a:pPr lvl="0"/>
+            <a:r>
+              <a:rPr/>
+              <a:t>Any slight differences will be statistically insignificant</a:t>
+            </a:r>
+          </a:p>
+          <a:p>
+            <a:pPr lvl="0" indent="0" marL="0">
+              <a:buNone/>
+            </a:pPr>
+            <a:r>
+              <a:rPr b="1"/>
+              <a:t>In short:</a:t>
+            </a:r>
+            <a:r>
+              <a:rPr/>
+              <a:t> - </a:t>
+            </a:r>
+            <a:r>
+              <a:rPr b="1"/>
+              <a:t>If groups are big enough and random assignment is used, the groups will be equivalent on average, even on characteristics we cannot observe.</a:t>
+            </a:r>
+          </a:p>
+        </p:txBody>
+      </p:sp>
+    </p:spTree>
+  </p:cSld>
+  <p:timing>
+    <p:tnLst>
+      <p:par>
+        <p:cTn id="1" dur="indefinite" restart="never" nodeType="tmRoot">
+          <p:childTnLst>
+            <p:seq concurrent="1" nextAc="seek">
+              <p:cTn id="2" dur="indefinite" nodeType="mainSeq">
+                <p:childTnLst>
+                  <p:par>
+                    <p:cTn id="3" fill="hold">
+                      <p:stCondLst>
+                        <p:cond delay="indefinite"/>
+                      </p:stCondLst>
+                      <p:childTnLst>
+                        <p:par>
+                          <p:cTn id="4" fill="hold">
+                            <p:stCondLst>
+                              <p:cond delay="0"/>
+                            </p:stCondLst>
+                            <p:childTnLst>
+                              <p:par>
+                                <p:cTn id="5" presetID="1" presetClass="entr" presetSubtype="0" fill="hold" grpId="0" nodeType="clickEffect">
+                                  <p:stCondLst>
+                                    <p:cond delay="0"/>
+                                  </p:stCondLst>
+                                  <p:childTnLst>
+                                    <p:set>
+                                      <p:cBhvr>
+                                        <p:cTn id="6" dur="1" fill="hold">
+                                          <p:stCondLst>
+                                            <p:cond delay="0"/>
+                                          </p:stCondLst>
+                                        </p:cTn>
+                                        <p:tgtEl>
+                                          <p:spTgt spid="3">
+                                            <p:txEl>
+                                              <p:pRg st="1" end="1"/>
+                                            </p:txEl>
+                                          </p:spTgt>
+                                        </p:tgtEl>
+                                        <p:attrNameLst>
+                                          <p:attrName>style.visibility</p:attrName>
+                                        </p:attrNameLst>
+                                      </p:cBhvr>
+                                      <p:to>
+                                        <p:strVal val="visible"/>
+                                      </p:to>
+                                    </p:set>
+                                  </p:childTnLst>
+                                </p:cTn>
+                              </p:par>
+                            </p:childTnLst>
+                          </p:cTn>
+                        </p:par>
+                      </p:childTnLst>
+                    </p:cTn>
+                  </p:par>
+                  <p:par>
+                    <p:cTn id="7" fill="hold">
+                      <p:stCondLst>
+                        <p:cond delay="indefinite"/>
+                      </p:stCondLst>
+                      <p:childTnLst>
+                        <p:par>
+                          <p:cTn id="8" fill="hold">
+                            <p:stCondLst>
+                              <p:cond delay="0"/>
+                            </p:stCondLst>
+                            <p:childTnLst>
+                              <p:par>
+                                <p:cTn id="9" presetID="1" presetClass="entr" presetSubtype="0" fill="hold" grpId="0" nodeType="clickEffect">
+                                  <p:stCondLst>
+                                    <p:cond delay="0"/>
+                                  </p:stCondLst>
+                                  <p:childTnLst>
+                                    <p:set>
+                                      <p:cBhvr>
+                                        <p:cTn id="10" dur="1" fill="hold">
+                                          <p:stCondLst>
+                                            <p:cond delay="0"/>
+                                          </p:stCondLst>
+                                        </p:cTn>
+                                        <p:tgtEl>
+                                          <p:spTgt spid="3">
+                                            <p:txEl>
+                                              <p:pRg st="2" end="2"/>
+                                            </p:txEl>
+                                          </p:spTgt>
+                                        </p:tgtEl>
+                                        <p:attrNameLst>
+                                          <p:attrName>style.visibility</p:attrName>
+                                        </p:attrNameLst>
+                                      </p:cBhvr>
+                                      <p:to>
+                                        <p:strVal val="visible"/>
+                                      </p:to>
+                                    </p:set>
+                                  </p:childTnLst>
+                                </p:cTn>
+                              </p:par>
+                            </p:childTnLst>
+                          </p:cTn>
+                        </p:par>
+                      </p:childTnLst>
+                    </p:cTn>
+                  </p:par>
+                  <p:par>
+                    <p:cTn id="11" fill="hold">
+                      <p:stCondLst>
+                        <p:cond delay="indefinite"/>
+                      </p:stCondLst>
+                      <p:childTnLst>
+                        <p:par>
+                          <p:cTn id="12" fill="hold">
+                            <p:stCondLst>
+                              <p:cond delay="0"/>
+                            </p:stCondLst>
+                            <p:childTnLst>
+                              <p:par>
+                                <p:cTn id="13" presetID="1" presetClass="entr" presetSubtype="0" fill="hold" grpId="0" nodeType="clickEffect">
+                                  <p:stCondLst>
+                                    <p:cond delay="0"/>
+                                  </p:stCondLst>
+                                  <p:childTnLst>
+                                    <p:set>
+                                      <p:cBhvr>
+                                        <p:cTn id="14" dur="1" fill="hold">
+                                          <p:stCondLst>
+                                            <p:cond delay="0"/>
+                                          </p:stCondLst>
+                                        </p:cTn>
+                                        <p:tgtEl>
+                                          <p:spTgt spid="3">
+                                            <p:txEl>
+                                              <p:pRg st="3" end="3"/>
+                                            </p:txEl>
+                                          </p:spTgt>
+                                        </p:tgtEl>
+                                        <p:attrNameLst>
+                                          <p:attrName>style.visibility</p:attrName>
+                                        </p:attrNameLst>
+                                      </p:cBhvr>
+                                      <p:to>
+                                        <p:strVal val="visible"/>
+                                      </p:to>
+                                    </p:set>
+                                  </p:childTnLst>
+                                </p:cTn>
+                              </p:par>
+                            </p:childTnLst>
+                          </p:cTn>
+                        </p:par>
+                      </p:childTnLst>
+                    </p:cTn>
+                  </p:par>
+                  <p:par>
+                    <p:cTn id="15" fill="hold">
+                      <p:stCondLst>
+                        <p:cond delay="indefinite"/>
+                      </p:stCondLst>
+                      <p:childTnLst>
+                        <p:par>
+                          <p:cTn id="16" fill="hold">
+                            <p:stCondLst>
+                              <p:cond delay="0"/>
+                            </p:stCondLst>
+                            <p:childTnLst>
+                              <p:par>
+                                <p:cTn id="17" presetID="1" presetClass="entr" presetSubtype="0" fill="hold" grpId="0" nodeType="clickEffect">
+                                  <p:stCondLst>
+                                    <p:cond delay="0"/>
+                                  </p:stCondLst>
+                                  <p:childTnLst>
+                                    <p:set>
+                                      <p:cBhvr>
+                                        <p:cTn id="18" dur="1" fill="hold">
+                                          <p:stCondLst>
+                                            <p:cond delay="0"/>
+                                          </p:stCondLst>
+                                        </p:cTn>
+                                        <p:tgtEl>
+                                          <p:spTgt spid="3">
+                                            <p:txEl>
+                                              <p:pRg st="4" end="4"/>
+                                            </p:txEl>
+                                          </p:spTgt>
+                                        </p:tgtEl>
+                                        <p:attrNameLst>
+                                          <p:attrName>style.visibility</p:attrName>
+                                        </p:attrNameLst>
+                                      </p:cBhvr>
+                                      <p:to>
+                                        <p:strVal val="visible"/>
+                                      </p:to>
+                                    </p:set>
+                                  </p:childTnLst>
+                                </p:cTn>
+                              </p:par>
+                            </p:childTnLst>
+                          </p:cTn>
+                        </p:par>
+                      </p:childTnLst>
+                    </p:cTn>
+                  </p:par>
+                  <p:par>
+                    <p:cTn id="19" fill="hold">
+                      <p:stCondLst>
+                        <p:cond delay="indefinite"/>
+                      </p:stCondLst>
+                      <p:childTnLst>
+                        <p:par>
+                          <p:cTn id="20" fill="hold">
+                            <p:stCondLst>
+                              <p:cond delay="0"/>
+                            </p:stCondLst>
+                            <p:childTnLst>
+                              <p:par>
+                                <p:cTn id="21" presetID="1" presetClass="entr" presetSubtype="0" fill="hold" grpId="0" nodeType="clickEffect">
+                                  <p:stCondLst>
+                                    <p:cond delay="0"/>
+                                  </p:stCondLst>
+                                  <p:childTnLst>
+                                    <p:set>
+                                      <p:cBhvr>
+                                        <p:cTn id="22" dur="1" fill="hold">
+                                          <p:stCondLst>
+                                            <p:cond delay="0"/>
+                                          </p:stCondLst>
+                                        </p:cTn>
+                                        <p:tgtEl>
+                                          <p:spTgt spid="3">
+                                            <p:txEl>
+                                              <p:pRg st="5" end="5"/>
+                                            </p:txEl>
+                                          </p:spTgt>
+                                        </p:tgtEl>
+                                        <p:attrNameLst>
+                                          <p:attrName>style.visibility</p:attrName>
+                                        </p:attrNameLst>
+                                      </p:cBhvr>
+                                      <p:to>
+                                        <p:strVal val="visible"/>
+                                      </p:to>
+                                    </p:set>
+                                  </p:childTnLst>
+                                </p:cTn>
+                              </p:par>
+                            </p:childTnLst>
+                          </p:cTn>
+                        </p:par>
+                      </p:childTnLst>
+                    </p:cTn>
+                  </p:par>
+                </p:childTnLst>
+              </p:cTn>
+              <p:prevCondLst>
+                <p:cond evt="onPrev" delay="0">
+                  <p:tgtEl>
+                    <p:sldTgt/>
+                  </p:tgtEl>
+                </p:cond>
+              </p:prevCondLst>
+              <p:nextCondLst>
+                <p:cond evt="onNext" delay="0">
+                  <p:tgtEl>
+                    <p:sldTgt/>
+                  </p:tgtEl>
+                </p:cond>
+              </p:nextCondLst>
+            </p:seq>
+          </p:childTnLst>
+        </p:cTn>
+      </p:par>
+    </p:tnLst>
+    <p:bldLst>
+      <p:bldP spid="3" grpId="0" uiExpand="1" build="p"/>
+    </p:bldLst>
+  </p:timing>
+</p:sld>
+</file>
+
+<file path=ppt/slides/slide4.xml><?xml version="1.0" encoding="utf-8"?>
 <p:sld xmlns:a="http://schemas.openxmlformats.org/drawingml/2006/main" xmlns:r="http://schemas.openxmlformats.org/officeDocument/2006/relationships" xmlns:p="http://schemas.openxmlformats.org/presentationml/2006/main">
   <p:cSld>
     <p:spTree>
@@ -6357,7 +9089,7 @@
 </p:sld>
 </file>
 
-<file path=ppt/slides/slide4.xml><?xml version="1.0" encoding="utf-8"?>
+<file path=ppt/slides/slide5.xml><?xml version="1.0" encoding="utf-8"?>
 <p:sld xmlns:a="http://schemas.openxmlformats.org/drawingml/2006/main" xmlns:r="http://schemas.openxmlformats.org/officeDocument/2006/relationships" xmlns:p="http://schemas.openxmlformats.org/presentationml/2006/main">
   <p:cSld>
     <p:spTree>
@@ -6677,7 +9409,7 @@
 </p:sld>
 </file>
 
-<file path=ppt/slides/slide5.xml><?xml version="1.0" encoding="utf-8"?>
+<file path=ppt/slides/slide6.xml><?xml version="1.0" encoding="utf-8"?>
 <p:sld xmlns:a="http://schemas.openxmlformats.org/drawingml/2006/main" xmlns:r="http://schemas.openxmlformats.org/officeDocument/2006/relationships" xmlns:p="http://schemas.openxmlformats.org/presentationml/2006/main">
   <p:cSld>
     <p:spTree>
@@ -6768,7 +9500,7 @@
         </p:nvGraphicFramePr>
         <p:xfrm>
           <a:off x="457200" y="1625600"/>
-          <a:ext cx="4038600" cy="2959100"/>
+          <a:ext cx="4038600" cy="2451100"/>
         </p:xfrm>
         <a:graphic>
           <a:graphicData uri="http://schemas.openxmlformats.org/drawingml/2006/table">
@@ -6793,7 +9525,7 @@
                       </a:pPr>
                       <a:r>
                         <a:rPr/>
-                        <a:t>name</a:t>
+                        <a:t>Variable</a:t>
                       </a:r>
                     </a:p>
                   </a:txBody>
@@ -6804,12 +9536,12 @@
                     <a:bodyPr/>
                     <a:lstStyle/>
                     <a:p>
-                      <a:pPr lvl="0" indent="0" marL="0" algn="r">
+                      <a:pPr lvl="0" indent="0" marL="0" algn="ctr">
                         <a:buNone/>
                       </a:pPr>
                       <a:r>
                         <a:rPr/>
-                        <a:t>estimate</a:t>
+                        <a:t>Diff Treat/Control</a:t>
                       </a:r>
                     </a:p>
                   </a:txBody>
@@ -6820,12 +9552,12 @@
                     <a:bodyPr/>
                     <a:lstStyle/>
                     <a:p>
-                      <a:pPr lvl="0" indent="0" marL="0" algn="r">
+                      <a:pPr lvl="0" indent="0" marL="0" algn="ctr">
                         <a:buNone/>
                       </a:pPr>
                       <a:r>
                         <a:rPr/>
-                        <a:t>std.error</a:t>
+                        <a:t>Std. Error</a:t>
                       </a:r>
                     </a:p>
                   </a:txBody>
@@ -6836,12 +9568,12 @@
                     <a:bodyPr/>
                     <a:lstStyle/>
                     <a:p>
-                      <a:pPr lvl="0" indent="0" marL="0" algn="r">
+                      <a:pPr lvl="0" indent="0" marL="0" algn="ctr">
                         <a:buNone/>
                       </a:pPr>
                       <a:r>
                         <a:rPr/>
-                        <a:t>p.value</a:t>
+                        <a:t>P-value</a:t>
                       </a:r>
                     </a:p>
                   </a:txBody>
@@ -6859,7 +9591,7 @@
                       </a:pPr>
                       <a:r>
                         <a:rPr/>
-                        <a:t>advanced_filtration</a:t>
+                        <a:t>Advanced Filtration</a:t>
                       </a:r>
                     </a:p>
                   </a:txBody>
@@ -6869,7 +9601,193 @@
                     <a:bodyPr/>
                     <a:lstStyle/>
                     <a:p>
-                      <a:pPr lvl="0" indent="0" marL="0" algn="r">
+                      <a:pPr lvl="0" indent="0" marL="0" algn="ctr">
+                        <a:buNone/>
+                      </a:pPr>
+                      <a:r>
+                        <a:rPr/>
+                        <a:t>-0.01</a:t>
+                      </a:r>
+                    </a:p>
+                  </a:txBody>
+                </a:tc>
+                <a:tc>
+                  <a:txBody>
+                    <a:bodyPr/>
+                    <a:lstStyle/>
+                    <a:p>
+                      <a:pPr lvl="0" indent="0" marL="0" algn="ctr">
+                        <a:buNone/>
+                      </a:pPr>
+                      <a:r>
+                        <a:rPr/>
+                        <a:t>0.01</a:t>
+                      </a:r>
+                    </a:p>
+                  </a:txBody>
+                </a:tc>
+                <a:tc>
+                  <a:txBody>
+                    <a:bodyPr/>
+                    <a:lstStyle/>
+                    <a:p>
+                      <a:pPr lvl="0" indent="0" marL="0" algn="ctr">
+                        <a:buNone/>
+                      </a:pPr>
+                      <a:r>
+                        <a:rPr/>
+                        <a:t>0.28</a:t>
+                      </a:r>
+                    </a:p>
+                  </a:txBody>
+                </a:tc>
+              </a:tr>
+              <a:tr h="0">
+                <a:tc>
+                  <a:txBody>
+                    <a:bodyPr/>
+                    <a:lstStyle/>
+                    <a:p>
+                      <a:pPr lvl="0" indent="0" marL="0" algn="l">
+                        <a:buNone/>
+                      </a:pPr>
+                      <a:r>
+                        <a:rPr/>
+                        <a:t>Deputy Age</a:t>
+                      </a:r>
+                    </a:p>
+                  </a:txBody>
+                </a:tc>
+                <a:tc>
+                  <a:txBody>
+                    <a:bodyPr/>
+                    <a:lstStyle/>
+                    <a:p>
+                      <a:pPr lvl="0" indent="0" marL="0" algn="ctr">
+                        <a:buNone/>
+                      </a:pPr>
+                      <a:r>
+                        <a:rPr/>
+                        <a:t>-0.04</a:t>
+                      </a:r>
+                    </a:p>
+                  </a:txBody>
+                </a:tc>
+                <a:tc>
+                  <a:txBody>
+                    <a:bodyPr/>
+                    <a:lstStyle/>
+                    <a:p>
+                      <a:pPr lvl="0" indent="0" marL="0" algn="ctr">
+                        <a:buNone/>
+                      </a:pPr>
+                      <a:r>
+                        <a:rPr/>
+                        <a:t>0.31</a:t>
+                      </a:r>
+                    </a:p>
+                  </a:txBody>
+                </a:tc>
+                <a:tc>
+                  <a:txBody>
+                    <a:bodyPr/>
+                    <a:lstStyle/>
+                    <a:p>
+                      <a:pPr lvl="0" indent="0" marL="0" algn="ctr">
+                        <a:buNone/>
+                      </a:pPr>
+                      <a:r>
+                        <a:rPr/>
+                        <a:t>0.90</a:t>
+                      </a:r>
+                    </a:p>
+                  </a:txBody>
+                </a:tc>
+              </a:tr>
+              <a:tr h="0">
+                <a:tc>
+                  <a:txBody>
+                    <a:bodyPr/>
+                    <a:lstStyle/>
+                    <a:p>
+                      <a:pPr lvl="0" indent="0" marL="0" algn="l">
+                        <a:buNone/>
+                      </a:pPr>
+                      <a:r>
+                        <a:rPr/>
+                        <a:t>Manager Age</a:t>
+                      </a:r>
+                    </a:p>
+                  </a:txBody>
+                </a:tc>
+                <a:tc>
+                  <a:txBody>
+                    <a:bodyPr/>
+                    <a:lstStyle/>
+                    <a:p>
+                      <a:pPr lvl="0" indent="0" marL="0" algn="ctr">
+                        <a:buNone/>
+                      </a:pPr>
+                      <a:r>
+                        <a:rPr/>
+                        <a:t>-0.64</a:t>
+                      </a:r>
+                    </a:p>
+                  </a:txBody>
+                </a:tc>
+                <a:tc>
+                  <a:txBody>
+                    <a:bodyPr/>
+                    <a:lstStyle/>
+                    <a:p>
+                      <a:pPr lvl="0" indent="0" marL="0" algn="ctr">
+                        <a:buNone/>
+                      </a:pPr>
+                      <a:r>
+                        <a:rPr/>
+                        <a:t>0.38</a:t>
+                      </a:r>
+                    </a:p>
+                  </a:txBody>
+                </a:tc>
+                <a:tc>
+                  <a:txBody>
+                    <a:bodyPr/>
+                    <a:lstStyle/>
+                    <a:p>
+                      <a:pPr lvl="0" indent="0" marL="0" algn="ctr">
+                        <a:buNone/>
+                      </a:pPr>
+                      <a:r>
+                        <a:rPr/>
+                        <a:t>0.09</a:t>
+                      </a:r>
+                    </a:p>
+                  </a:txBody>
+                </a:tc>
+              </a:tr>
+              <a:tr h="0">
+                <a:tc>
+                  <a:txBody>
+                    <a:bodyPr/>
+                    <a:lstStyle/>
+                    <a:p>
+                      <a:pPr lvl="0" indent="0" marL="0" algn="l">
+                        <a:buNone/>
+                      </a:pPr>
+                      <a:r>
+                        <a:rPr/>
+                        <a:t>Deputy Education</a:t>
+                      </a:r>
+                    </a:p>
+                  </a:txBody>
+                </a:tc>
+                <a:tc>
+                  <a:txBody>
+                    <a:bodyPr/>
+                    <a:lstStyle/>
+                    <a:p>
+                      <a:pPr lvl="0" indent="0" marL="0" algn="ctr">
                         <a:buNone/>
                       </a:pPr>
                       <a:r>
@@ -6884,7 +9802,193 @@
                     <a:bodyPr/>
                     <a:lstStyle/>
                     <a:p>
-                      <a:pPr lvl="0" indent="0" marL="0" algn="r">
+                      <a:pPr lvl="0" indent="0" marL="0" algn="ctr">
+                        <a:buNone/>
+                      </a:pPr>
+                      <a:r>
+                        <a:rPr/>
+                        <a:t>0.07</a:t>
+                      </a:r>
+                    </a:p>
+                  </a:txBody>
+                </a:tc>
+                <a:tc>
+                  <a:txBody>
+                    <a:bodyPr/>
+                    <a:lstStyle/>
+                    <a:p>
+                      <a:pPr lvl="0" indent="0" marL="0" algn="ctr">
+                        <a:buNone/>
+                      </a:pPr>
+                      <a:r>
+                        <a:rPr/>
+                        <a:t>0.67</a:t>
+                      </a:r>
+                    </a:p>
+                  </a:txBody>
+                </a:tc>
+              </a:tr>
+              <a:tr h="0">
+                <a:tc>
+                  <a:txBody>
+                    <a:bodyPr/>
+                    <a:lstStyle/>
+                    <a:p>
+                      <a:pPr lvl="0" indent="0" marL="0" algn="l">
+                        <a:buNone/>
+                      </a:pPr>
+                      <a:r>
+                        <a:rPr/>
+                        <a:t>Manager Education</a:t>
+                      </a:r>
+                    </a:p>
+                  </a:txBody>
+                </a:tc>
+                <a:tc>
+                  <a:txBody>
+                    <a:bodyPr/>
+                    <a:lstStyle/>
+                    <a:p>
+                      <a:pPr lvl="0" indent="0" marL="0" algn="ctr">
+                        <a:buNone/>
+                      </a:pPr>
+                      <a:r>
+                        <a:rPr/>
+                        <a:t>0.16</a:t>
+                      </a:r>
+                    </a:p>
+                  </a:txBody>
+                </a:tc>
+                <a:tc>
+                  <a:txBody>
+                    <a:bodyPr/>
+                    <a:lstStyle/>
+                    <a:p>
+                      <a:pPr lvl="0" indent="0" marL="0" algn="ctr">
+                        <a:buNone/>
+                      </a:pPr>
+                      <a:r>
+                        <a:rPr/>
+                        <a:t>0.07</a:t>
+                      </a:r>
+                    </a:p>
+                  </a:txBody>
+                </a:tc>
+                <a:tc>
+                  <a:txBody>
+                    <a:bodyPr/>
+                    <a:lstStyle/>
+                    <a:p>
+                      <a:pPr lvl="0" indent="0" marL="0" algn="ctr">
+                        <a:buNone/>
+                      </a:pPr>
+                      <a:r>
+                        <a:rPr/>
+                        <a:t>0.02</a:t>
+                      </a:r>
+                    </a:p>
+                  </a:txBody>
+                </a:tc>
+              </a:tr>
+              <a:tr h="0">
+                <a:tc>
+                  <a:txBody>
+                    <a:bodyPr/>
+                    <a:lstStyle/>
+                    <a:p>
+                      <a:pPr lvl="0" indent="0" marL="0" algn="l">
+                        <a:buNone/>
+                      </a:pPr>
+                      <a:r>
+                        <a:rPr/>
+                        <a:t>Business Area</a:t>
+                      </a:r>
+                    </a:p>
+                  </a:txBody>
+                </a:tc>
+                <a:tc>
+                  <a:txBody>
+                    <a:bodyPr/>
+                    <a:lstStyle/>
+                    <a:p>
+                      <a:pPr lvl="0" indent="0" marL="0" algn="ctr">
+                        <a:buNone/>
+                      </a:pPr>
+                      <a:r>
+                        <a:rPr/>
+                        <a:t>-0.04</a:t>
+                      </a:r>
+                    </a:p>
+                  </a:txBody>
+                </a:tc>
+                <a:tc>
+                  <a:txBody>
+                    <a:bodyPr/>
+                    <a:lstStyle/>
+                    <a:p>
+                      <a:pPr lvl="0" indent="0" marL="0" algn="ctr">
+                        <a:buNone/>
+                      </a:pPr>
+                      <a:r>
+                        <a:rPr/>
+                        <a:t>0.07</a:t>
+                      </a:r>
+                    </a:p>
+                  </a:txBody>
+                </a:tc>
+                <a:tc>
+                  <a:txBody>
+                    <a:bodyPr/>
+                    <a:lstStyle/>
+                    <a:p>
+                      <a:pPr lvl="0" indent="0" marL="0" algn="ctr">
+                        <a:buNone/>
+                      </a:pPr>
+                      <a:r>
+                        <a:rPr/>
+                        <a:t>0.57</a:t>
+                      </a:r>
+                    </a:p>
+                  </a:txBody>
+                </a:tc>
+              </a:tr>
+              <a:tr h="0">
+                <a:tc>
+                  <a:txBody>
+                    <a:bodyPr/>
+                    <a:lstStyle/>
+                    <a:p>
+                      <a:pPr lvl="0" indent="0" marL="0" algn="l">
+                        <a:buNone/>
+                      </a:pPr>
+                      <a:r>
+                        <a:rPr/>
+                        <a:t>Female Manager</a:t>
+                      </a:r>
+                    </a:p>
+                  </a:txBody>
+                </a:tc>
+                <a:tc>
+                  <a:txBody>
+                    <a:bodyPr/>
+                    <a:lstStyle/>
+                    <a:p>
+                      <a:pPr lvl="0" indent="0" marL="0" algn="ctr">
+                        <a:buNone/>
+                      </a:pPr>
+                      <a:r>
+                        <a:rPr/>
+                        <a:t>0.00</a:t>
+                      </a:r>
+                    </a:p>
+                  </a:txBody>
+                </a:tc>
+                <a:tc>
+                  <a:txBody>
+                    <a:bodyPr/>
+                    <a:lstStyle/>
+                    <a:p>
+                      <a:pPr lvl="0" indent="0" marL="0" algn="ctr">
                         <a:buNone/>
                       </a:pPr>
                       <a:r>
@@ -6899,12 +10003,12 @@
                     <a:bodyPr/>
                     <a:lstStyle/>
                     <a:p>
-                      <a:pPr lvl="0" indent="0" marL="0" algn="r">
+                      <a:pPr lvl="0" indent="0" marL="0" algn="ctr">
                         <a:buNone/>
                       </a:pPr>
                       <a:r>
                         <a:rPr/>
-                        <a:t>0.00</a:t>
+                        <a:t>0.56</a:t>
                       </a:r>
                     </a:p>
                   </a:txBody>
@@ -6921,7 +10025,7 @@
                       </a:pPr>
                       <a:r>
                         <a:rPr/>
-                        <a:t>age_deputy</a:t>
+                        <a:t>Foreign Owned</a:t>
                       </a:r>
                     </a:p>
                   </a:txBody>
@@ -6931,12 +10035,12 @@
                     <a:bodyPr/>
                     <a:lstStyle/>
                     <a:p>
-                      <a:pPr lvl="0" indent="0" marL="0" algn="r">
+                      <a:pPr lvl="0" indent="0" marL="0" algn="ctr">
                         <a:buNone/>
                       </a:pPr>
                       <a:r>
                         <a:rPr/>
-                        <a:t>-0.51</a:t>
+                        <a:t>0.01</a:t>
                       </a:r>
                     </a:p>
                   </a:txBody>
@@ -6946,7 +10050,146 @@
                     <a:bodyPr/>
                     <a:lstStyle/>
                     <a:p>
-                      <a:pPr lvl="0" indent="0" marL="0" algn="r">
+                      <a:pPr lvl="0" indent="0" marL="0" algn="ctr">
+                        <a:buNone/>
+                      </a:pPr>
+                      <a:r>
+                        <a:rPr/>
+                        <a:t>0.01</a:t>
+                      </a:r>
+                    </a:p>
+                  </a:txBody>
+                </a:tc>
+                <a:tc>
+                  <a:txBody>
+                    <a:bodyPr/>
+                    <a:lstStyle/>
+                    <a:p>
+                      <a:pPr lvl="0" indent="0" marL="0" algn="ctr">
+                        <a:buNone/>
+                      </a:pPr>
+                      <a:r>
+                        <a:rPr/>
+                        <a:t>0.49</a:t>
+                      </a:r>
+                    </a:p>
+                  </a:txBody>
+                </a:tc>
+              </a:tr>
+              <a:tr h="0">
+                <a:tc>
+                  <a:txBody>
+                    <a:bodyPr/>
+                    <a:lstStyle/>
+                    <a:p>
+                      <a:pPr lvl="0" indent="0" marL="0" algn="l">
+                        <a:buNone/>
+                      </a:pPr>
+                      <a:r>
+                        <a:rPr/>
+                        <a:t>Distance from Nearest Recycling Center</a:t>
+                      </a:r>
+                    </a:p>
+                  </a:txBody>
+                </a:tc>
+                <a:tc>
+                  <a:txBody>
+                    <a:bodyPr/>
+                    <a:lstStyle/>
+                    <a:p>
+                      <a:pPr lvl="0" indent="0" marL="0" algn="ctr">
+                        <a:buNone/>
+                      </a:pPr>
+                      <a:r>
+                        <a:rPr/>
+                        <a:t>2.91</a:t>
+                      </a:r>
+                    </a:p>
+                  </a:txBody>
+                </a:tc>
+                <a:tc>
+                  <a:txBody>
+                    <a:bodyPr/>
+                    <a:lstStyle/>
+                    <a:p>
+                      <a:pPr lvl="0" indent="0" marL="0" algn="ctr">
+                        <a:buNone/>
+                      </a:pPr>
+                      <a:r>
+                        <a:rPr/>
+                        <a:t>1.13</a:t>
+                      </a:r>
+                    </a:p>
+                  </a:txBody>
+                </a:tc>
+                <a:tc>
+                  <a:txBody>
+                    <a:bodyPr/>
+                    <a:lstStyle/>
+                    <a:p>
+                      <a:pPr lvl="0" indent="0" marL="0" algn="ctr">
+                        <a:buNone/>
+                      </a:pPr>
+                      <a:r>
+                        <a:rPr/>
+                        <a:t>0.01</a:t>
+                      </a:r>
+                    </a:p>
+                  </a:txBody>
+                </a:tc>
+              </a:tr>
+              <a:tr h="0">
+                <a:tc>
+                  <a:txBody>
+                    <a:bodyPr/>
+                    <a:lstStyle/>
+                    <a:p>
+                      <a:pPr lvl="0" indent="0" marL="0" algn="l">
+                        <a:buNone/>
+                      </a:pPr>
+                      <a:r>
+                        <a:rPr/>
+                        <a:t>Staff Size</a:t>
+                      </a:r>
+                    </a:p>
+                  </a:txBody>
+                </a:tc>
+                <a:tc>
+                  <a:txBody>
+                    <a:bodyPr/>
+                    <a:lstStyle/>
+                    <a:p>
+                      <a:pPr lvl="0" indent="0" marL="0" algn="ctr">
+                        <a:buNone/>
+                      </a:pPr>
+                      <a:r>
+                        <a:rPr/>
+                        <a:t>0.06</a:t>
+                      </a:r>
+                    </a:p>
+                  </a:txBody>
+                </a:tc>
+                <a:tc>
+                  <a:txBody>
+                    <a:bodyPr/>
+                    <a:lstStyle/>
+                    <a:p>
+                      <a:pPr lvl="0" indent="0" marL="0" algn="ctr">
+                        <a:buNone/>
+                      </a:pPr>
+                      <a:r>
+                        <a:rPr/>
+                        <a:t>0.05</a:t>
+                      </a:r>
+                    </a:p>
+                  </a:txBody>
+                </a:tc>
+                <a:tc>
+                  <a:txBody>
+                    <a:bodyPr/>
+                    <a:lstStyle/>
+                    <a:p>
+                      <a:pPr lvl="0" indent="0" marL="0" algn="ctr">
                         <a:buNone/>
                       </a:pPr>
                       <a:r>
@@ -6956,21 +10199,6 @@
                     </a:p>
                   </a:txBody>
                 </a:tc>
-                <a:tc>
-                  <a:txBody>
-                    <a:bodyPr/>
-                    <a:lstStyle/>
-                    <a:p>
-                      <a:pPr lvl="0" indent="0" marL="0" algn="r">
-                        <a:buNone/>
-                      </a:pPr>
-                      <a:r>
-                        <a:rPr/>
-                        <a:t>0.05</a:t>
-                      </a:r>
-                    </a:p>
-                  </a:txBody>
-                </a:tc>
               </a:tr>
               <a:tr h="0">
                 <a:tc>
@@ -6983,7 +10211,7 @@
                       </a:pPr>
                       <a:r>
                         <a:rPr/>
-                        <a:t>age_manager</a:t>
+                        <a:t>Water Treatment System</a:t>
                       </a:r>
                     </a:p>
                   </a:txBody>
@@ -6993,12 +10221,12 @@
                     <a:bodyPr/>
                     <a:lstStyle/>
                     <a:p>
-                      <a:pPr lvl="0" indent="0" marL="0" algn="r">
+                      <a:pPr lvl="0" indent="0" marL="0" algn="ctr">
                         <a:buNone/>
                       </a:pPr>
                       <a:r>
                         <a:rPr/>
-                        <a:t>-0.74</a:t>
+                        <a:t>0.01</a:t>
                       </a:r>
                     </a:p>
                   </a:txBody>
@@ -7008,12 +10236,12 @@
                     <a:bodyPr/>
                     <a:lstStyle/>
                     <a:p>
-                      <a:pPr lvl="0" indent="0" marL="0" algn="r">
+                      <a:pPr lvl="0" indent="0" marL="0" algn="ctr">
                         <a:buNone/>
                       </a:pPr>
                       <a:r>
                         <a:rPr/>
-                        <a:t>0.31</a:t>
+                        <a:t>0.01</a:t>
                       </a:r>
                     </a:p>
                   </a:txBody>
@@ -7023,131 +10251,7 @@
                     <a:bodyPr/>
                     <a:lstStyle/>
                     <a:p>
-                      <a:pPr lvl="0" indent="0" marL="0" algn="r">
-                        <a:buNone/>
-                      </a:pPr>
-                      <a:r>
-                        <a:rPr/>
-                        <a:t>0.02</a:t>
-                      </a:r>
-                    </a:p>
-                  </a:txBody>
-                </a:tc>
-              </a:tr>
-              <a:tr h="0">
-                <a:tc>
-                  <a:txBody>
-                    <a:bodyPr/>
-                    <a:lstStyle/>
-                    <a:p>
-                      <a:pPr lvl="0" indent="0" marL="0" algn="l">
-                        <a:buNone/>
-                      </a:pPr>
-                      <a:r>
-                        <a:rPr/>
-                        <a:t>educ_deputy</a:t>
-                      </a:r>
-                    </a:p>
-                  </a:txBody>
-                </a:tc>
-                <a:tc>
-                  <a:txBody>
-                    <a:bodyPr/>
-                    <a:lstStyle/>
-                    <a:p>
-                      <a:pPr lvl="0" indent="0" marL="0" algn="r">
-                        <a:buNone/>
-                      </a:pPr>
-                      <a:r>
-                        <a:rPr/>
-                        <a:t>0.00</a:t>
-                      </a:r>
-                    </a:p>
-                  </a:txBody>
-                </a:tc>
-                <a:tc>
-                  <a:txBody>
-                    <a:bodyPr/>
-                    <a:lstStyle/>
-                    <a:p>
-                      <a:pPr lvl="0" indent="0" marL="0" algn="r">
-                        <a:buNone/>
-                      </a:pPr>
-                      <a:r>
-                        <a:rPr/>
-                        <a:t>0.05</a:t>
-                      </a:r>
-                    </a:p>
-                  </a:txBody>
-                </a:tc>
-                <a:tc>
-                  <a:txBody>
-                    <a:bodyPr/>
-                    <a:lstStyle/>
-                    <a:p>
-                      <a:pPr lvl="0" indent="0" marL="0" algn="r">
-                        <a:buNone/>
-                      </a:pPr>
-                      <a:r>
-                        <a:rPr/>
-                        <a:t>1.00</a:t>
-                      </a:r>
-                    </a:p>
-                  </a:txBody>
-                </a:tc>
-              </a:tr>
-              <a:tr h="0">
-                <a:tc>
-                  <a:txBody>
-                    <a:bodyPr/>
-                    <a:lstStyle/>
-                    <a:p>
-                      <a:pPr lvl="0" indent="0" marL="0" algn="l">
-                        <a:buNone/>
-                      </a:pPr>
-                      <a:r>
-                        <a:rPr/>
-                        <a:t>educ_manager</a:t>
-                      </a:r>
-                    </a:p>
-                  </a:txBody>
-                </a:tc>
-                <a:tc>
-                  <a:txBody>
-                    <a:bodyPr/>
-                    <a:lstStyle/>
-                    <a:p>
-                      <a:pPr lvl="0" indent="0" marL="0" algn="r">
-                        <a:buNone/>
-                      </a:pPr>
-                      <a:r>
-                        <a:rPr/>
-                        <a:t>0.06</a:t>
-                      </a:r>
-                    </a:p>
-                  </a:txBody>
-                </a:tc>
-                <a:tc>
-                  <a:txBody>
-                    <a:bodyPr/>
-                    <a:lstStyle/>
-                    <a:p>
-                      <a:pPr lvl="0" indent="0" marL="0" algn="r">
-                        <a:buNone/>
-                      </a:pPr>
-                      <a:r>
-                        <a:rPr/>
-                        <a:t>0.06</a:t>
-                      </a:r>
-                    </a:p>
-                  </a:txBody>
-                </a:tc>
-                <a:tc>
-                  <a:txBody>
-                    <a:bodyPr/>
-                    <a:lstStyle/>
-                    <a:p>
-                      <a:pPr lvl="0" indent="0" marL="0" algn="r">
+                      <a:pPr lvl="0" indent="0" marL="0" algn="ctr">
                         <a:buNone/>
                       </a:pPr>
                       <a:r>
@@ -7158,382 +10262,40 @@
                   </a:txBody>
                 </a:tc>
               </a:tr>
-              <a:tr h="0">
-                <a:tc>
-                  <a:txBody>
-                    <a:bodyPr/>
-                    <a:lstStyle/>
-                    <a:p>
-                      <a:pPr lvl="0" indent="0" marL="0" algn="l">
-                        <a:buNone/>
-                      </a:pPr>
-                      <a:r>
-                        <a:rPr/>
-                        <a:t>facility_area</a:t>
-                      </a:r>
-                    </a:p>
-                  </a:txBody>
-                </a:tc>
-                <a:tc>
-                  <a:txBody>
-                    <a:bodyPr/>
-                    <a:lstStyle/>
-                    <a:p>
-                      <a:pPr lvl="0" indent="0" marL="0" algn="r">
-                        <a:buNone/>
-                      </a:pPr>
-                      <a:r>
-                        <a:rPr/>
-                        <a:t>-0.07</a:t>
-                      </a:r>
-                    </a:p>
-                  </a:txBody>
-                </a:tc>
-                <a:tc>
-                  <a:txBody>
-                    <a:bodyPr/>
-                    <a:lstStyle/>
-                    <a:p>
-                      <a:pPr lvl="0" indent="0" marL="0" algn="r">
-                        <a:buNone/>
-                      </a:pPr>
-                      <a:r>
-                        <a:rPr/>
-                        <a:t>0.06</a:t>
-                      </a:r>
-                    </a:p>
-                  </a:txBody>
-                </a:tc>
-                <a:tc>
-                  <a:txBody>
-                    <a:bodyPr/>
-                    <a:lstStyle/>
-                    <a:p>
-                      <a:pPr lvl="0" indent="0" marL="0" algn="r">
-                        <a:buNone/>
-                      </a:pPr>
-                      <a:r>
-                        <a:rPr/>
-                        <a:t>0.30</a:t>
-                      </a:r>
-                    </a:p>
-                  </a:txBody>
-                </a:tc>
-              </a:tr>
-              <a:tr h="0">
-                <a:tc>
-                  <a:txBody>
-                    <a:bodyPr/>
-                    <a:lstStyle/>
-                    <a:p>
-                      <a:pPr lvl="0" indent="0" marL="0" algn="l">
-                        <a:buNone/>
-                      </a:pPr>
-                      <a:r>
-                        <a:rPr/>
-                        <a:t>female_manager</a:t>
-                      </a:r>
-                    </a:p>
-                  </a:txBody>
-                </a:tc>
-                <a:tc>
-                  <a:txBody>
-                    <a:bodyPr/>
-                    <a:lstStyle/>
-                    <a:p>
-                      <a:pPr lvl="0" indent="0" marL="0" algn="r">
-                        <a:buNone/>
-                      </a:pPr>
-                      <a:r>
-                        <a:rPr/>
-                        <a:t>0.00</a:t>
-                      </a:r>
-                    </a:p>
-                  </a:txBody>
-                </a:tc>
-                <a:tc>
-                  <a:txBody>
-                    <a:bodyPr/>
-                    <a:lstStyle/>
-                    <a:p>
-                      <a:pPr lvl="0" indent="0" marL="0" algn="r">
-                        <a:buNone/>
-                      </a:pPr>
-                      <a:r>
-                        <a:rPr/>
-                        <a:t>0.01</a:t>
-                      </a:r>
-                    </a:p>
-                  </a:txBody>
-                </a:tc>
-                <a:tc>
-                  <a:txBody>
-                    <a:bodyPr/>
-                    <a:lstStyle/>
-                    <a:p>
-                      <a:pPr lvl="0" indent="0" marL="0" algn="r">
-                        <a:buNone/>
-                      </a:pPr>
-                      <a:r>
-                        <a:rPr/>
-                        <a:t>0.49</a:t>
-                      </a:r>
-                    </a:p>
-                  </a:txBody>
-                </a:tc>
-              </a:tr>
-              <a:tr h="0">
-                <a:tc>
-                  <a:txBody>
-                    <a:bodyPr/>
-                    <a:lstStyle/>
-                    <a:p>
-                      <a:pPr lvl="0" indent="0" marL="0" algn="l">
-                        <a:buNone/>
-                      </a:pPr>
-                      <a:r>
-                        <a:rPr/>
-                        <a:t>foreign_owned</a:t>
-                      </a:r>
-                    </a:p>
-                  </a:txBody>
-                </a:tc>
-                <a:tc>
-                  <a:txBody>
-                    <a:bodyPr/>
-                    <a:lstStyle/>
-                    <a:p>
-                      <a:pPr lvl="0" indent="0" marL="0" algn="r">
-                        <a:buNone/>
-                      </a:pPr>
-                      <a:r>
-                        <a:rPr/>
-                        <a:t>0.02</a:t>
-                      </a:r>
-                    </a:p>
-                  </a:txBody>
-                </a:tc>
-                <a:tc>
-                  <a:txBody>
-                    <a:bodyPr/>
-                    <a:lstStyle/>
-                    <a:p>
-                      <a:pPr lvl="0" indent="0" marL="0" algn="r">
-                        <a:buNone/>
-                      </a:pPr>
-                      <a:r>
-                        <a:rPr/>
-                        <a:t>0.01</a:t>
-                      </a:r>
-                    </a:p>
-                  </a:txBody>
-                </a:tc>
-                <a:tc>
-                  <a:txBody>
-                    <a:bodyPr/>
-                    <a:lstStyle/>
-                    <a:p>
-                      <a:pPr lvl="0" indent="0" marL="0" algn="r">
-                        <a:buNone/>
-                      </a:pPr>
-                      <a:r>
-                        <a:rPr/>
-                        <a:t>0.01</a:t>
-                      </a:r>
-                    </a:p>
-                  </a:txBody>
-                </a:tc>
-              </a:tr>
-              <a:tr h="0">
-                <a:tc>
-                  <a:txBody>
-                    <a:bodyPr/>
-                    <a:lstStyle/>
-                    <a:p>
-                      <a:pPr lvl="0" indent="0" marL="0" algn="l">
-                        <a:buNone/>
-                      </a:pPr>
-                      <a:r>
-                        <a:rPr/>
-                        <a:t>recycling_center_distance</a:t>
-                      </a:r>
-                    </a:p>
-                  </a:txBody>
-                </a:tc>
-                <a:tc>
-                  <a:txBody>
-                    <a:bodyPr/>
-                    <a:lstStyle/>
-                    <a:p>
-                      <a:pPr lvl="0" indent="0" marL="0" algn="r">
-                        <a:buNone/>
-                      </a:pPr>
-                      <a:r>
-                        <a:rPr/>
-                        <a:t>3.31</a:t>
-                      </a:r>
-                    </a:p>
-                  </a:txBody>
-                </a:tc>
-                <a:tc>
-                  <a:txBody>
-                    <a:bodyPr/>
-                    <a:lstStyle/>
-                    <a:p>
-                      <a:pPr lvl="0" indent="0" marL="0" algn="r">
-                        <a:buNone/>
-                      </a:pPr>
-                      <a:r>
-                        <a:rPr/>
-                        <a:t>0.84</a:t>
-                      </a:r>
-                    </a:p>
-                  </a:txBody>
-                </a:tc>
-                <a:tc>
-                  <a:txBody>
-                    <a:bodyPr/>
-                    <a:lstStyle/>
-                    <a:p>
-                      <a:pPr lvl="0" indent="0" marL="0" algn="r">
-                        <a:buNone/>
-                      </a:pPr>
-                      <a:r>
-                        <a:rPr/>
-                        <a:t>0.00</a:t>
-                      </a:r>
-                    </a:p>
-                  </a:txBody>
-                </a:tc>
-              </a:tr>
-              <a:tr h="0">
-                <a:tc>
-                  <a:txBody>
-                    <a:bodyPr/>
-                    <a:lstStyle/>
-                    <a:p>
-                      <a:pPr lvl="0" indent="0" marL="0" algn="l">
-                        <a:buNone/>
-                      </a:pPr>
-                      <a:r>
-                        <a:rPr/>
-                        <a:t>staff_size</a:t>
-                      </a:r>
-                    </a:p>
-                  </a:txBody>
-                </a:tc>
-                <a:tc>
-                  <a:txBody>
-                    <a:bodyPr/>
-                    <a:lstStyle/>
-                    <a:p>
-                      <a:pPr lvl="0" indent="0" marL="0" algn="r">
-                        <a:buNone/>
-                      </a:pPr>
-                      <a:r>
-                        <a:rPr/>
-                        <a:t>0.00</a:t>
-                      </a:r>
-                    </a:p>
-                  </a:txBody>
-                </a:tc>
-                <a:tc>
-                  <a:txBody>
-                    <a:bodyPr/>
-                    <a:lstStyle/>
-                    <a:p>
-                      <a:pPr lvl="0" indent="0" marL="0" algn="r">
-                        <a:buNone/>
-                      </a:pPr>
-                      <a:r>
-                        <a:rPr/>
-                        <a:t>0.04</a:t>
-                      </a:r>
-                    </a:p>
-                  </a:txBody>
-                </a:tc>
-                <a:tc>
-                  <a:txBody>
-                    <a:bodyPr/>
-                    <a:lstStyle/>
-                    <a:p>
-                      <a:pPr lvl="0" indent="0" marL="0" algn="r">
-                        <a:buNone/>
-                      </a:pPr>
-                      <a:r>
-                        <a:rPr/>
-                        <a:t>0.97</a:t>
-                      </a:r>
-                    </a:p>
-                  </a:txBody>
-                </a:tc>
-              </a:tr>
-              <a:tr h="0">
-                <a:tc>
-                  <a:txBody>
-                    <a:bodyPr/>
-                    <a:lstStyle/>
-                    <a:p>
-                      <a:pPr lvl="0" indent="0" marL="0" algn="l">
-                        <a:buNone/>
-                      </a:pPr>
-                      <a:r>
-                        <a:rPr/>
-                        <a:t>water_treatment_system</a:t>
-                      </a:r>
-                    </a:p>
-                  </a:txBody>
-                </a:tc>
-                <a:tc>
-                  <a:txBody>
-                    <a:bodyPr/>
-                    <a:lstStyle/>
-                    <a:p>
-                      <a:pPr lvl="0" indent="0" marL="0" algn="r">
-                        <a:buNone/>
-                      </a:pPr>
-                      <a:r>
-                        <a:rPr/>
-                        <a:t>0.00</a:t>
-                      </a:r>
-                    </a:p>
-                  </a:txBody>
-                </a:tc>
-                <a:tc>
-                  <a:txBody>
-                    <a:bodyPr/>
-                    <a:lstStyle/>
-                    <a:p>
-                      <a:pPr lvl="0" indent="0" marL="0" algn="r">
-                        <a:buNone/>
-                      </a:pPr>
-                      <a:r>
-                        <a:rPr/>
-                        <a:t>0.01</a:t>
-                      </a:r>
-                    </a:p>
-                  </a:txBody>
-                </a:tc>
-                <a:tc>
-                  <a:txBody>
-                    <a:bodyPr/>
-                    <a:lstStyle/>
-                    <a:p>
-                      <a:pPr lvl="0" indent="0" marL="0" algn="r">
-                        <a:buNone/>
-                      </a:pPr>
-                      <a:r>
-                        <a:rPr/>
-                        <a:t>0.76</a:t>
-                      </a:r>
-                    </a:p>
-                  </a:txBody>
-                </a:tc>
-              </a:tr>
             </a:tbl>
           </a:graphicData>
         </a:graphic>
       </p:graphicFrame>
+      <p:sp>
+        <p:nvSpPr>
+          <p:cNvPr id="1" name="TextBox 3"/>
+          <p:cNvSpPr txBox="1"/>
+          <p:nvPr/>
+        </p:nvSpPr>
+        <p:spPr>
+          <a:xfrm>
+            <a:off x="457200" y="4076700"/>
+            <a:ext cx="4038600" cy="508000"/>
+          </a:xfrm>
+          <a:prstGeom prst="rect">
+            <a:avLst/>
+          </a:prstGeom>
+          <a:noFill/>
+        </p:spPr>
+        <p:txBody>
+          <a:bodyPr/>
+          <a:lstStyle/>
+          <a:p>
+            <a:pPr lvl="0" indent="0" marL="0" algn="ctr">
+              <a:buNone/>
+            </a:pPr>
+            <a:r>
+              <a:rPr/>
+              <a:t>**Diff in Treat and Control Baseline Characteristics**</a:t>
+            </a:r>
+          </a:p>
+        </p:txBody>
+      </p:sp>
       <p:sp>
         <p:nvSpPr>
           <p:cNvPr id="5" name="Text Placeholder 4"/>
@@ -7566,6 +10328,76 @@
             <a:r>
               <a:rPr>
                 <a:solidFill>
+                  <a:srgbClr val="5E5E5E"/>
+                </a:solidFill>
+                <a:latin typeface="Courier"/>
+              </a:rPr>
+              <a:t># Step 1: Filter to only keep baseline (pre-intervention) observations</a:t>
+            </a:r>
+            <a:br/>
+            <a:r>
+              <a:rPr>
+                <a:solidFill>
+                  <a:srgbClr val="5E5E5E"/>
+                </a:solidFill>
+                <a:latin typeface="Courier"/>
+              </a:rPr>
+              <a:t># Step 2: Select relevant baseline variables to test for balance</a:t>
+            </a:r>
+            <a:br/>
+            <a:r>
+              <a:rPr>
+                <a:solidFill>
+                  <a:srgbClr val="5E5E5E"/>
+                </a:solidFill>
+                <a:latin typeface="Courier"/>
+              </a:rPr>
+              <a:t># Step 3: Reshape data to long format using pivot_longer() so that we have one row per variable per industry, keeping treatment assignment</a:t>
+            </a:r>
+            <a:br/>
+            <a:r>
+              <a:rPr>
+                <a:solidFill>
+                  <a:srgbClr val="5E5E5E"/>
+                </a:solidFill>
+                <a:latin typeface="Courier"/>
+              </a:rPr>
+              <a:t># Step 4: Group by each baseline variable</a:t>
+            </a:r>
+            <a:br/>
+            <a:r>
+              <a:rPr>
+                <a:solidFill>
+                  <a:srgbClr val="5E5E5E"/>
+                </a:solidFill>
+                <a:latin typeface="Courier"/>
+              </a:rPr>
+              <a:t># Step 5: For each variable, run a simple regression of the baseline variable on treat assignment</a:t>
+            </a:r>
+            <a:br/>
+            <a:r>
+              <a:rPr>
+                <a:solidFill>
+                  <a:srgbClr val="5E5E5E"/>
+                </a:solidFill>
+                <a:latin typeface="Courier"/>
+              </a:rPr>
+              <a:t># Step 6: Only keep the coefficient for 'treatment_zone' since we are interested in differences between treatment and control</a:t>
+            </a:r>
+            <a:br/>
+            <a:r>
+              <a:rPr>
+                <a:solidFill>
+                  <a:srgbClr val="5E5E5E"/>
+                </a:solidFill>
+                <a:latin typeface="Courier"/>
+              </a:rPr>
+              <a:t># Step 7: Select key results to display (variable name, estimated difference, standard error, and p-value)</a:t>
+            </a:r>
+            <a:br/>
+            <a:r>
+              <a:rPr>
+                <a:solidFill>
                   <a:srgbClr val="003B4F"/>
                 </a:solidFill>
                 <a:latin typeface="Courier"/>
@@ -7653,6 +10485,15 @@
                 <a:latin typeface="Courier"/>
               </a:rPr>
               <a:t>%&gt;%</a:t>
+            </a:r>
+            <a:r>
+              <a:rPr>
+                <a:solidFill>
+                  <a:srgbClr val="003B4F"/>
+                </a:solidFill>
+                <a:latin typeface="Courier"/>
+              </a:rPr>
+              <a:t> </a:t>
             </a:r>
             <a:br/>
             <a:r>
@@ -8248,947 +11089,6 @@
 </p:sld>
 </file>
 
-<file path=ppt/slides/slide6.xml><?xml version="1.0" encoding="utf-8"?>
-<p:sld xmlns:a="http://schemas.openxmlformats.org/drawingml/2006/main" xmlns:r="http://schemas.openxmlformats.org/officeDocument/2006/relationships" xmlns:p="http://schemas.openxmlformats.org/presentationml/2006/main">
-  <p:cSld>
-    <p:spTree>
-      <p:nvGrpSpPr>
-        <p:cNvPr id="1" name=""/>
-        <p:cNvGrpSpPr/>
-        <p:nvPr/>
-      </p:nvGrpSpPr>
-      <p:grpSpPr>
-        <a:xfrm>
-          <a:off x="0" y="0"/>
-          <a:ext cx="0" cy="0"/>
-          <a:chOff x="0" y="0"/>
-          <a:chExt cx="0" cy="0"/>
-        </a:xfrm>
-      </p:grpSpPr>
-      <p:sp>
-        <p:nvSpPr>
-          <p:cNvPr id="2" name="Title 1"/>
-          <p:cNvSpPr>
-            <a:spLocks noGrp="1"/>
-          </p:cNvSpPr>
-          <p:nvPr>
-            <p:ph type="title"/>
-          </p:nvPr>
-        </p:nvSpPr>
-        <p:spPr/>
-        <p:txBody>
-          <a:bodyPr/>
-          <a:lstStyle/>
-          <a:p>
-            <a:pPr lvl="0" indent="0" marL="0">
-              <a:buNone/>
-            </a:pPr>
-            <a:r>
-              <a:rPr/>
-              <a:t>Estimating Program Impact: Simple Comparison of Means</a:t>
-            </a:r>
-          </a:p>
-        </p:txBody>
-      </p:sp>
-      <p:sp>
-        <p:nvSpPr>
-          <p:cNvPr id="3" name="Content Placeholder 2"/>
-          <p:cNvSpPr>
-            <a:spLocks noGrp="1"/>
-          </p:cNvSpPr>
-          <p:nvPr>
-            <p:ph idx="1" sz="half"/>
-          </p:nvPr>
-        </p:nvSpPr>
-        <p:spPr/>
-        <p:txBody>
-          <a:bodyPr/>
-          <a:lstStyle/>
-          <a:p>
-            <a:pPr lvl="0" indent="0">
-              <a:buNone/>
-            </a:pPr>
-            <a:r>
-              <a:rPr>
-                <a:solidFill>
-                  <a:srgbClr val="5E5E5E"/>
-                </a:solidFill>
-                <a:latin typeface="Courier"/>
-              </a:rPr>
-              <a:t># Compare waste expenditures in treatment and control industries at follow-up</a:t>
-            </a:r>
-            <a:br/>
-            <a:r>
-              <a:rPr>
-                <a:solidFill>
-                  <a:srgbClr val="003B4F"/>
-                </a:solidFill>
-                <a:latin typeface="Courier"/>
-              </a:rPr>
-              <a:t>out_round0 &lt;- </a:t>
-            </a:r>
-            <a:r>
-              <a:rPr>
-                <a:solidFill>
-                  <a:srgbClr val="4758AB"/>
-                </a:solidFill>
-                <a:latin typeface="Courier"/>
-              </a:rPr>
-              <a:t>lm_robust</a:t>
-            </a:r>
-            <a:r>
-              <a:rPr>
-                <a:solidFill>
-                  <a:srgbClr val="003B4F"/>
-                </a:solidFill>
-                <a:latin typeface="Courier"/>
-              </a:rPr>
-              <a:t>(waste_management_costs </a:t>
-            </a:r>
-            <a:r>
-              <a:rPr>
-                <a:solidFill>
-                  <a:srgbClr val="5E5E5E"/>
-                </a:solidFill>
-                <a:latin typeface="Courier"/>
-              </a:rPr>
-              <a:t>~</a:t>
-            </a:r>
-            <a:r>
-              <a:rPr>
-                <a:solidFill>
-                  <a:srgbClr val="003B4F"/>
-                </a:solidFill>
-                <a:latin typeface="Courier"/>
-              </a:rPr>
-              <a:t> treatment_zone,</a:t>
-            </a:r>
-            <a:br/>
-            <a:r>
-              <a:rPr>
-                <a:solidFill>
-                  <a:srgbClr val="003B4F"/>
-                </a:solidFill>
-                <a:latin typeface="Courier"/>
-              </a:rPr>
-              <a:t>                        </a:t>
-            </a:r>
-            <a:r>
-              <a:rPr>
-                <a:solidFill>
-                  <a:srgbClr val="657422"/>
-                </a:solidFill>
-                <a:latin typeface="Courier"/>
-              </a:rPr>
-              <a:t>data =</a:t>
-            </a:r>
-            <a:r>
-              <a:rPr>
-                <a:solidFill>
-                  <a:srgbClr val="003B4F"/>
-                </a:solidFill>
-                <a:latin typeface="Courier"/>
-              </a:rPr>
-              <a:t> df </a:t>
-            </a:r>
-            <a:r>
-              <a:rPr>
-                <a:solidFill>
-                  <a:srgbClr val="5E5E5E"/>
-                </a:solidFill>
-                <a:latin typeface="Courier"/>
-              </a:rPr>
-              <a:t>%&gt;%</a:t>
-            </a:r>
-            <a:r>
-              <a:rPr>
-                <a:solidFill>
-                  <a:srgbClr val="003B4F"/>
-                </a:solidFill>
-                <a:latin typeface="Courier"/>
-              </a:rPr>
-              <a:t> </a:t>
-            </a:r>
-            <a:r>
-              <a:rPr>
-                <a:solidFill>
-                  <a:srgbClr val="4758AB"/>
-                </a:solidFill>
-                <a:latin typeface="Courier"/>
-              </a:rPr>
-              <a:t>filter</a:t>
-            </a:r>
-            <a:r>
-              <a:rPr>
-                <a:solidFill>
-                  <a:srgbClr val="003B4F"/>
-                </a:solidFill>
-                <a:latin typeface="Courier"/>
-              </a:rPr>
-              <a:t>(round </a:t>
-            </a:r>
-            <a:r>
-              <a:rPr>
-                <a:solidFill>
-                  <a:srgbClr val="5E5E5E"/>
-                </a:solidFill>
-                <a:latin typeface="Courier"/>
-              </a:rPr>
-              <a:t>==</a:t>
-            </a:r>
-            <a:r>
-              <a:rPr>
-                <a:solidFill>
-                  <a:srgbClr val="003B4F"/>
-                </a:solidFill>
-                <a:latin typeface="Courier"/>
-              </a:rPr>
-              <a:t> </a:t>
-            </a:r>
-            <a:r>
-              <a:rPr>
-                <a:solidFill>
-                  <a:srgbClr val="AD0000"/>
-                </a:solidFill>
-                <a:latin typeface="Courier"/>
-              </a:rPr>
-              <a:t>0</a:t>
-            </a:r>
-            <a:r>
-              <a:rPr>
-                <a:solidFill>
-                  <a:srgbClr val="003B4F"/>
-                </a:solidFill>
-                <a:latin typeface="Courier"/>
-              </a:rPr>
-              <a:t> </a:t>
-            </a:r>
-            <a:r>
-              <a:rPr>
-                <a:solidFill>
-                  <a:srgbClr val="5E5E5E"/>
-                </a:solidFill>
-                <a:latin typeface="Courier"/>
-              </a:rPr>
-              <a:t>&amp;</a:t>
-            </a:r>
-            <a:r>
-              <a:rPr>
-                <a:solidFill>
-                  <a:srgbClr val="003B4F"/>
-                </a:solidFill>
-                <a:latin typeface="Courier"/>
-              </a:rPr>
-              <a:t> eligible </a:t>
-            </a:r>
-            <a:r>
-              <a:rPr>
-                <a:solidFill>
-                  <a:srgbClr val="5E5E5E"/>
-                </a:solidFill>
-                <a:latin typeface="Courier"/>
-              </a:rPr>
-              <a:t>==</a:t>
-            </a:r>
-            <a:r>
-              <a:rPr>
-                <a:solidFill>
-                  <a:srgbClr val="AD0000"/>
-                </a:solidFill>
-                <a:latin typeface="Courier"/>
-              </a:rPr>
-              <a:t>1</a:t>
-            </a:r>
-            <a:r>
-              <a:rPr>
-                <a:solidFill>
-                  <a:srgbClr val="003B4F"/>
-                </a:solidFill>
-                <a:latin typeface="Courier"/>
-              </a:rPr>
-              <a:t>),</a:t>
-            </a:r>
-            <a:br/>
-            <a:r>
-              <a:rPr>
-                <a:solidFill>
-                  <a:srgbClr val="003B4F"/>
-                </a:solidFill>
-                <a:latin typeface="Courier"/>
-              </a:rPr>
-              <a:t>                        </a:t>
-            </a:r>
-            <a:r>
-              <a:rPr>
-                <a:solidFill>
-                  <a:srgbClr val="657422"/>
-                </a:solidFill>
-                <a:latin typeface="Courier"/>
-              </a:rPr>
-              <a:t>clusters =</a:t>
-            </a:r>
-            <a:r>
-              <a:rPr>
-                <a:solidFill>
-                  <a:srgbClr val="003B4F"/>
-                </a:solidFill>
-                <a:latin typeface="Courier"/>
-              </a:rPr>
-              <a:t> zone_identifier)</a:t>
-            </a:r>
-            <a:br/>
-            <a:br/>
-            <a:r>
-              <a:rPr>
-                <a:solidFill>
-                  <a:srgbClr val="003B4F"/>
-                </a:solidFill>
-                <a:latin typeface="Courier"/>
-              </a:rPr>
-              <a:t>out_round1 &lt;- </a:t>
-            </a:r>
-            <a:r>
-              <a:rPr>
-                <a:solidFill>
-                  <a:srgbClr val="4758AB"/>
-                </a:solidFill>
-                <a:latin typeface="Courier"/>
-              </a:rPr>
-              <a:t>lm_robust</a:t>
-            </a:r>
-            <a:r>
-              <a:rPr>
-                <a:solidFill>
-                  <a:srgbClr val="003B4F"/>
-                </a:solidFill>
-                <a:latin typeface="Courier"/>
-              </a:rPr>
-              <a:t>(waste_management_costs </a:t>
-            </a:r>
-            <a:r>
-              <a:rPr>
-                <a:solidFill>
-                  <a:srgbClr val="5E5E5E"/>
-                </a:solidFill>
-                <a:latin typeface="Courier"/>
-              </a:rPr>
-              <a:t>~</a:t>
-            </a:r>
-            <a:r>
-              <a:rPr>
-                <a:solidFill>
-                  <a:srgbClr val="003B4F"/>
-                </a:solidFill>
-                <a:latin typeface="Courier"/>
-              </a:rPr>
-              <a:t> treatment_zone,</a:t>
-            </a:r>
-            <a:br/>
-            <a:r>
-              <a:rPr>
-                <a:solidFill>
-                  <a:srgbClr val="003B4F"/>
-                </a:solidFill>
-                <a:latin typeface="Courier"/>
-              </a:rPr>
-              <a:t>                        </a:t>
-            </a:r>
-            <a:r>
-              <a:rPr>
-                <a:solidFill>
-                  <a:srgbClr val="657422"/>
-                </a:solidFill>
-                <a:latin typeface="Courier"/>
-              </a:rPr>
-              <a:t>data =</a:t>
-            </a:r>
-            <a:r>
-              <a:rPr>
-                <a:solidFill>
-                  <a:srgbClr val="003B4F"/>
-                </a:solidFill>
-                <a:latin typeface="Courier"/>
-              </a:rPr>
-              <a:t> df </a:t>
-            </a:r>
-            <a:r>
-              <a:rPr>
-                <a:solidFill>
-                  <a:srgbClr val="5E5E5E"/>
-                </a:solidFill>
-                <a:latin typeface="Courier"/>
-              </a:rPr>
-              <a:t>%&gt;%</a:t>
-            </a:r>
-            <a:r>
-              <a:rPr>
-                <a:solidFill>
-                  <a:srgbClr val="003B4F"/>
-                </a:solidFill>
-                <a:latin typeface="Courier"/>
-              </a:rPr>
-              <a:t> </a:t>
-            </a:r>
-            <a:r>
-              <a:rPr>
-                <a:solidFill>
-                  <a:srgbClr val="4758AB"/>
-                </a:solidFill>
-                <a:latin typeface="Courier"/>
-              </a:rPr>
-              <a:t>filter</a:t>
-            </a:r>
-            <a:r>
-              <a:rPr>
-                <a:solidFill>
-                  <a:srgbClr val="003B4F"/>
-                </a:solidFill>
-                <a:latin typeface="Courier"/>
-              </a:rPr>
-              <a:t>(round </a:t>
-            </a:r>
-            <a:r>
-              <a:rPr>
-                <a:solidFill>
-                  <a:srgbClr val="5E5E5E"/>
-                </a:solidFill>
-                <a:latin typeface="Courier"/>
-              </a:rPr>
-              <a:t>==</a:t>
-            </a:r>
-            <a:r>
-              <a:rPr>
-                <a:solidFill>
-                  <a:srgbClr val="003B4F"/>
-                </a:solidFill>
-                <a:latin typeface="Courier"/>
-              </a:rPr>
-              <a:t> </a:t>
-            </a:r>
-            <a:r>
-              <a:rPr>
-                <a:solidFill>
-                  <a:srgbClr val="AD0000"/>
-                </a:solidFill>
-                <a:latin typeface="Courier"/>
-              </a:rPr>
-              <a:t>1</a:t>
-            </a:r>
-            <a:r>
-              <a:rPr>
-                <a:solidFill>
-                  <a:srgbClr val="003B4F"/>
-                </a:solidFill>
-                <a:latin typeface="Courier"/>
-              </a:rPr>
-              <a:t> </a:t>
-            </a:r>
-            <a:r>
-              <a:rPr>
-                <a:solidFill>
-                  <a:srgbClr val="5E5E5E"/>
-                </a:solidFill>
-                <a:latin typeface="Courier"/>
-              </a:rPr>
-              <a:t>&amp;</a:t>
-            </a:r>
-            <a:r>
-              <a:rPr>
-                <a:solidFill>
-                  <a:srgbClr val="003B4F"/>
-                </a:solidFill>
-                <a:latin typeface="Courier"/>
-              </a:rPr>
-              <a:t> eligible </a:t>
-            </a:r>
-            <a:r>
-              <a:rPr>
-                <a:solidFill>
-                  <a:srgbClr val="5E5E5E"/>
-                </a:solidFill>
-                <a:latin typeface="Courier"/>
-              </a:rPr>
-              <a:t>==</a:t>
-            </a:r>
-            <a:r>
-              <a:rPr>
-                <a:solidFill>
-                  <a:srgbClr val="AD0000"/>
-                </a:solidFill>
-                <a:latin typeface="Courier"/>
-              </a:rPr>
-              <a:t>1</a:t>
-            </a:r>
-            <a:r>
-              <a:rPr>
-                <a:solidFill>
-                  <a:srgbClr val="003B4F"/>
-                </a:solidFill>
-                <a:latin typeface="Courier"/>
-              </a:rPr>
-              <a:t>),</a:t>
-            </a:r>
-            <a:br/>
-            <a:r>
-              <a:rPr>
-                <a:solidFill>
-                  <a:srgbClr val="003B4F"/>
-                </a:solidFill>
-                <a:latin typeface="Courier"/>
-              </a:rPr>
-              <a:t>                        </a:t>
-            </a:r>
-            <a:r>
-              <a:rPr>
-                <a:solidFill>
-                  <a:srgbClr val="657422"/>
-                </a:solidFill>
-                <a:latin typeface="Courier"/>
-              </a:rPr>
-              <a:t>clusters =</a:t>
-            </a:r>
-            <a:r>
-              <a:rPr>
-                <a:solidFill>
-                  <a:srgbClr val="003B4F"/>
-                </a:solidFill>
-                <a:latin typeface="Courier"/>
-              </a:rPr>
-              <a:t> zone_identifier)</a:t>
-            </a:r>
-          </a:p>
-        </p:txBody>
-      </p:sp>
-      <p:graphicFrame>
-        <p:nvGraphicFramePr>
-          <p:cNvPr id="6" name="Content Placeholder 5"/>
-          <p:cNvGraphicFramePr>
-            <a:graphicFrameLocks noGrp="1"/>
-          </p:cNvGraphicFramePr>
-          <p:nvPr>
-            <p:ph idx="1"/>
-          </p:nvPr>
-        </p:nvGraphicFramePr>
-        <p:xfrm>
-          <a:off x="4648200" y="1193800"/>
-          <a:ext cx="4038600" cy="3390900"/>
-        </p:xfrm>
-        <a:graphic>
-          <a:graphicData uri="http://schemas.openxmlformats.org/drawingml/2006/table">
-            <a:tbl>
-              <a:tblPr firstRow="1" bandRow="1">
-                <a:tableStyleId>{5C22544A-7EE6-4342-B048-85BDC9FD1C3A}</a:tableStyleId>
-              </a:tblPr>
-              <a:tblGrid>
-                <a:gridCol w="1346200"/>
-                <a:gridCol w="1346200"/>
-                <a:gridCol w="1346200"/>
-              </a:tblGrid>
-              <a:tr h="0">
-                <a:tc>
-                  <a:txBody>
-                    <a:bodyPr/>
-                    <a:lstStyle/>
-                    <a:p>
-                      <a:endParaRPr/>
-                    </a:p>
-                  </a:txBody>
-                  <a:tcPr/>
-                </a:tc>
-                <a:tc>
-                  <a:txBody>
-                    <a:bodyPr/>
-                    <a:lstStyle/>
-                    <a:p>
-                      <a:pPr lvl="0" indent="0" marL="0" algn="ctr">
-                        <a:buNone/>
-                      </a:pPr>
-                      <a:r>
-                        <a:rPr/>
-                        <a:t>Round 0</a:t>
-                      </a:r>
-                    </a:p>
-                  </a:txBody>
-                  <a:tcPr/>
-                </a:tc>
-                <a:tc>
-                  <a:txBody>
-                    <a:bodyPr/>
-                    <a:lstStyle/>
-                    <a:p>
-                      <a:pPr lvl="0" indent="0" marL="0" algn="ctr">
-                        <a:buNone/>
-                      </a:pPr>
-                      <a:r>
-                        <a:rPr/>
-                        <a:t>Round 1</a:t>
-                      </a:r>
-                    </a:p>
-                  </a:txBody>
-                  <a:tcPr/>
-                </a:tc>
-              </a:tr>
-              <a:tr h="0">
-                <a:tc>
-                  <a:txBody>
-                    <a:bodyPr/>
-                    <a:lstStyle/>
-                    <a:p>
-                      <a:pPr lvl="0" indent="0" marL="0" algn="l">
-                        <a:buNone/>
-                      </a:pPr>
-                      <a:r>
-                        <a:rPr/>
-                        <a:t>(Intercept)</a:t>
-                      </a:r>
-                    </a:p>
-                  </a:txBody>
-                </a:tc>
-                <a:tc>
-                  <a:txBody>
-                    <a:bodyPr/>
-                    <a:lstStyle/>
-                    <a:p>
-                      <a:pPr lvl="0" indent="0" marL="0" algn="ctr">
-                        <a:buNone/>
-                      </a:pPr>
-                      <a:r>
-                        <a:rPr/>
-                        <a:t>14573.847***</a:t>
-                      </a:r>
-                    </a:p>
-                  </a:txBody>
-                </a:tc>
-                <a:tc>
-                  <a:txBody>
-                    <a:bodyPr/>
-                    <a:lstStyle/>
-                    <a:p>
-                      <a:pPr lvl="0" indent="0" marL="0" algn="ctr">
-                        <a:buNone/>
-                      </a:pPr>
-                      <a:r>
-                        <a:rPr/>
-                        <a:t>17980.550***</a:t>
-                      </a:r>
-                    </a:p>
-                  </a:txBody>
-                </a:tc>
-              </a:tr>
-              <a:tr h="0">
-                <a:tc>
-                  <a:txBody>
-                    <a:bodyPr/>
-                    <a:lstStyle/>
-                    <a:p>
-                      <a:endParaRPr/>
-                    </a:p>
-                  </a:txBody>
-                </a:tc>
-                <a:tc>
-                  <a:txBody>
-                    <a:bodyPr/>
-                    <a:lstStyle/>
-                    <a:p>
-                      <a:pPr lvl="0" indent="0" marL="0" algn="ctr">
-                        <a:buNone/>
-                      </a:pPr>
-                      <a:r>
-                        <a:rPr/>
-                        <a:t>(157.259)</a:t>
-                      </a:r>
-                    </a:p>
-                  </a:txBody>
-                </a:tc>
-                <a:tc>
-                  <a:txBody>
-                    <a:bodyPr/>
-                    <a:lstStyle/>
-                    <a:p>
-                      <a:pPr lvl="0" indent="0" marL="0" algn="ctr">
-                        <a:buNone/>
-                      </a:pPr>
-                      <a:r>
-                        <a:rPr/>
-                        <a:t>(309.123)</a:t>
-                      </a:r>
-                    </a:p>
-                  </a:txBody>
-                </a:tc>
-              </a:tr>
-              <a:tr h="0">
-                <a:tc>
-                  <a:txBody>
-                    <a:bodyPr/>
-                    <a:lstStyle/>
-                    <a:p>
-                      <a:pPr lvl="0" indent="0" marL="0" algn="l">
-                        <a:buNone/>
-                      </a:pPr>
-                      <a:r>
-                        <a:rPr/>
-                        <a:t>treatment_zone</a:t>
-                      </a:r>
-                    </a:p>
-                  </a:txBody>
-                </a:tc>
-                <a:tc>
-                  <a:txBody>
-                    <a:bodyPr/>
-                    <a:lstStyle/>
-                    <a:p>
-                      <a:pPr lvl="0" indent="0" marL="0" algn="ctr">
-                        <a:buNone/>
-                      </a:pPr>
-                      <a:r>
-                        <a:rPr/>
-                        <a:t>−84.153</a:t>
-                      </a:r>
-                    </a:p>
-                  </a:txBody>
-                </a:tc>
-                <a:tc>
-                  <a:txBody>
-                    <a:bodyPr/>
-                    <a:lstStyle/>
-                    <a:p>
-                      <a:pPr lvl="0" indent="0" marL="0" algn="ctr">
-                        <a:buNone/>
-                      </a:pPr>
-                      <a:r>
-                        <a:rPr/>
-                        <a:t>−10140.371***</a:t>
-                      </a:r>
-                    </a:p>
-                  </a:txBody>
-                </a:tc>
-              </a:tr>
-              <a:tr h="0">
-                <a:tc>
-                  <a:txBody>
-                    <a:bodyPr/>
-                    <a:lstStyle/>
-                    <a:p>
-                      <a:endParaRPr/>
-                    </a:p>
-                  </a:txBody>
-                </a:tc>
-                <a:tc>
-                  <a:txBody>
-                    <a:bodyPr/>
-                    <a:lstStyle/>
-                    <a:p>
-                      <a:pPr lvl="0" indent="0" marL="0" algn="ctr">
-                        <a:buNone/>
-                      </a:pPr>
-                      <a:r>
-                        <a:rPr/>
-                        <a:t>(214.558)</a:t>
-                      </a:r>
-                    </a:p>
-                  </a:txBody>
-                </a:tc>
-                <a:tc>
-                  <a:txBody>
-                    <a:bodyPr/>
-                    <a:lstStyle/>
-                    <a:p>
-                      <a:pPr lvl="0" indent="0" marL="0" algn="ctr">
-                        <a:buNone/>
-                      </a:pPr>
-                      <a:r>
-                        <a:rPr/>
-                        <a:t>(398.899)</a:t>
-                      </a:r>
-                    </a:p>
-                  </a:txBody>
-                </a:tc>
-              </a:tr>
-              <a:tr h="0">
-                <a:tc>
-                  <a:txBody>
-                    <a:bodyPr/>
-                    <a:lstStyle/>
-                    <a:p>
-                      <a:pPr lvl="0" indent="0" marL="0" algn="l">
-                        <a:buNone/>
-                      </a:pPr>
-                      <a:r>
-                        <a:rPr/>
-                        <a:t>Num.Obs.</a:t>
-                      </a:r>
-                    </a:p>
-                  </a:txBody>
-                </a:tc>
-                <a:tc>
-                  <a:txBody>
-                    <a:bodyPr/>
-                    <a:lstStyle/>
-                    <a:p>
-                      <a:pPr lvl="0" indent="0" marL="0" algn="ctr">
-                        <a:buNone/>
-                      </a:pPr>
-                      <a:r>
-                        <a:rPr/>
-                        <a:t>5628</a:t>
-                      </a:r>
-                    </a:p>
-                  </a:txBody>
-                </a:tc>
-                <a:tc>
-                  <a:txBody>
-                    <a:bodyPr/>
-                    <a:lstStyle/>
-                    <a:p>
-                      <a:pPr lvl="0" indent="0" marL="0" algn="ctr">
-                        <a:buNone/>
-                      </a:pPr>
-                      <a:r>
-                        <a:rPr/>
-                        <a:t>5629</a:t>
-                      </a:r>
-                    </a:p>
-                  </a:txBody>
-                </a:tc>
-              </a:tr>
-              <a:tr h="0">
-                <a:tc>
-                  <a:txBody>
-                    <a:bodyPr/>
-                    <a:lstStyle/>
-                    <a:p>
-                      <a:pPr lvl="0" indent="0" marL="0" algn="l">
-                        <a:buNone/>
-                      </a:pPr>
-                      <a:r>
-                        <a:rPr/>
-                        <a:t>R2</a:t>
-                      </a:r>
-                    </a:p>
-                  </a:txBody>
-                </a:tc>
-                <a:tc>
-                  <a:txBody>
-                    <a:bodyPr/>
-                    <a:lstStyle/>
-                    <a:p>
-                      <a:pPr lvl="0" indent="0" marL="0" algn="ctr">
-                        <a:buNone/>
-                      </a:pPr>
-                      <a:r>
-                        <a:rPr/>
-                        <a:t>0.000</a:t>
-                      </a:r>
-                    </a:p>
-                  </a:txBody>
-                </a:tc>
-                <a:tc>
-                  <a:txBody>
-                    <a:bodyPr/>
-                    <a:lstStyle/>
-                    <a:p>
-                      <a:pPr lvl="0" indent="0" marL="0" algn="ctr">
-                        <a:buNone/>
-                      </a:pPr>
-                      <a:r>
-                        <a:rPr/>
-                        <a:t>0.300</a:t>
-                      </a:r>
-                    </a:p>
-                  </a:txBody>
-                </a:tc>
-              </a:tr>
-              <a:tr h="0">
-                <a:tc>
-                  <a:txBody>
-                    <a:bodyPr/>
-                    <a:lstStyle/>
-                    <a:p>
-                      <a:pPr lvl="0" indent="0" marL="0" algn="l">
-                        <a:buNone/>
-                      </a:pPr>
-                      <a:r>
-                        <a:rPr/>
-                        <a:t>R2 Adj.</a:t>
-                      </a:r>
-                    </a:p>
-                  </a:txBody>
-                </a:tc>
-                <a:tc>
-                  <a:txBody>
-                    <a:bodyPr/>
-                    <a:lstStyle/>
-                    <a:p>
-                      <a:pPr lvl="0" indent="0" marL="0" algn="ctr">
-                        <a:buNone/>
-                      </a:pPr>
-                      <a:r>
-                        <a:rPr/>
-                        <a:t>0.000</a:t>
-                      </a:r>
-                    </a:p>
-                  </a:txBody>
-                </a:tc>
-                <a:tc>
-                  <a:txBody>
-                    <a:bodyPr/>
-                    <a:lstStyle/>
-                    <a:p>
-                      <a:pPr lvl="0" indent="0" marL="0" algn="ctr">
-                        <a:buNone/>
-                      </a:pPr>
-                      <a:r>
-                        <a:rPr/>
-                        <a:t>0.300</a:t>
-                      </a:r>
-                    </a:p>
-                  </a:txBody>
-                </a:tc>
-              </a:tr>
-              <a:tr h="0">
-                <a:tc>
-                  <a:txBody>
-                    <a:bodyPr/>
-                    <a:lstStyle/>
-                    <a:p>
-                      <a:pPr lvl="0" indent="0" marL="0" algn="l">
-                        <a:buNone/>
-                      </a:pPr>
-                      <a:r>
-                        <a:rPr/>
-                        <a:t> + p &lt; 0.1, * p &lt; 0.05, ** p &lt; 0.01, *** p &lt; 0.001</a:t>
-                      </a:r>
-                    </a:p>
-                  </a:txBody>
-                </a:tc>
-                <a:tc>
-                  <a:txBody>
-                    <a:bodyPr/>
-                    <a:lstStyle/>
-                    <a:p>
-                      <a:endParaRPr/>
-                    </a:p>
-                  </a:txBody>
-                </a:tc>
-                <a:tc>
-                  <a:txBody>
-                    <a:bodyPr/>
-                    <a:lstStyle/>
-                    <a:p>
-                      <a:endParaRPr/>
-                    </a:p>
-                  </a:txBody>
-                </a:tc>
-              </a:tr>
-            </a:tbl>
-          </a:graphicData>
-        </a:graphic>
-      </p:graphicFrame>
-    </p:spTree>
-  </p:cSld>
-</p:sld>
-</file>
-
 <file path=ppt/slides/slide7.xml><?xml version="1.0" encoding="utf-8"?>
 <p:sld xmlns:a="http://schemas.openxmlformats.org/drawingml/2006/main" xmlns:r="http://schemas.openxmlformats.org/officeDocument/2006/relationships" xmlns:p="http://schemas.openxmlformats.org/presentationml/2006/main">
   <p:cSld>
@@ -9226,19 +11126,19 @@
             </a:pPr>
             <a:r>
               <a:rPr/>
-              <a:t>Using Regression Analysis</a:t>
+              <a:t>Estimating Program Impact: Simple Comparison of Means</a:t>
             </a:r>
           </a:p>
         </p:txBody>
       </p:sp>
       <p:sp>
         <p:nvSpPr>
-          <p:cNvPr id="3" name="Text Placeholder 2"/>
+          <p:cNvPr id="3" name="Content Placeholder 2"/>
           <p:cNvSpPr>
             <a:spLocks noGrp="1"/>
           </p:cNvSpPr>
           <p:nvPr>
-            <p:ph idx="1" type="body"/>
+            <p:ph idx="1" sz="half"/>
           </p:nvPr>
         </p:nvSpPr>
         <p:spPr/>
@@ -9256,17 +11156,27 @@
                 </a:solidFill>
                 <a:latin typeface="Courier"/>
               </a:rPr>
-              <a:t># Compare waste expenditures in T and C industries at follow-up</a:t>
+              <a:t># Compare waste expenditures in treatment and control industries at follow-up</a:t>
             </a:r>
             <a:br/>
             <a:r>
               <a:rPr>
                 <a:solidFill>
+                  <a:srgbClr val="5E5E5E"/>
+                </a:solidFill>
+                <a:latin typeface="Courier"/>
+              </a:rPr>
+              <a:t># Regression at baseline: are waste expenditures different between treatment and control groups before intervention?</a:t>
+            </a:r>
+            <a:br/>
+            <a:r>
+              <a:rPr>
+                <a:solidFill>
                   <a:srgbClr val="003B4F"/>
                 </a:solidFill>
                 <a:latin typeface="Courier"/>
               </a:rPr>
-              <a:t>out_round2 &lt;- </a:t>
+              <a:t>out_round0 &lt;- </a:t>
             </a:r>
             <a:r>
               <a:rPr>
@@ -9302,7 +11212,35 @@
                 </a:solidFill>
                 <a:latin typeface="Courier"/>
               </a:rPr>
-              <a:t> treatment_zone </a:t>
+              <a:t> treatment_zone,</a:t>
+            </a:r>
+            <a:br/>
+            <a:r>
+              <a:rPr>
+                <a:solidFill>
+                  <a:srgbClr val="003B4F"/>
+                </a:solidFill>
+                <a:latin typeface="Courier"/>
+              </a:rPr>
+              <a:t>                        </a:t>
+            </a:r>
+            <a:r>
+              <a:rPr>
+                <a:solidFill>
+                  <a:srgbClr val="657422"/>
+                </a:solidFill>
+                <a:latin typeface="Courier"/>
+              </a:rPr>
+              <a:t>data =</a:t>
+            </a:r>
+            <a:r>
+              <a:rPr>
+                <a:solidFill>
+                  <a:srgbClr val="003B4F"/>
+                </a:solidFill>
+                <a:latin typeface="Courier"/>
+              </a:rPr>
+              <a:t> df </a:t>
             </a:r>
             <a:r>
               <a:rPr>
@@ -9311,7 +11249,115 @@
                 </a:solidFill>
                 <a:latin typeface="Courier"/>
               </a:rPr>
-              <a:t>+</a:t>
+              <a:t>%&gt;%</a:t>
+            </a:r>
+            <a:r>
+              <a:rPr>
+                <a:solidFill>
+                  <a:srgbClr val="003B4F"/>
+                </a:solidFill>
+                <a:latin typeface="Courier"/>
+              </a:rPr>
+              <a:t> </a:t>
+            </a:r>
+            <a:r>
+              <a:rPr>
+                <a:solidFill>
+                  <a:srgbClr val="4758AB"/>
+                </a:solidFill>
+                <a:latin typeface="Courier"/>
+              </a:rPr>
+              <a:t>filter</a:t>
+            </a:r>
+            <a:r>
+              <a:rPr>
+                <a:solidFill>
+                  <a:srgbClr val="003B4F"/>
+                </a:solidFill>
+                <a:latin typeface="Courier"/>
+              </a:rPr>
+              <a:t>(round </a:t>
+            </a:r>
+            <a:r>
+              <a:rPr>
+                <a:solidFill>
+                  <a:srgbClr val="5E5E5E"/>
+                </a:solidFill>
+                <a:latin typeface="Courier"/>
+              </a:rPr>
+              <a:t>==</a:t>
+            </a:r>
+            <a:r>
+              <a:rPr>
+                <a:solidFill>
+                  <a:srgbClr val="003B4F"/>
+                </a:solidFill>
+                <a:latin typeface="Courier"/>
+              </a:rPr>
+              <a:t> </a:t>
+            </a:r>
+            <a:r>
+              <a:rPr>
+                <a:solidFill>
+                  <a:srgbClr val="AD0000"/>
+                </a:solidFill>
+                <a:latin typeface="Courier"/>
+              </a:rPr>
+              <a:t>0</a:t>
+            </a:r>
+            <a:r>
+              <a:rPr>
+                <a:solidFill>
+                  <a:srgbClr val="003B4F"/>
+                </a:solidFill>
+                <a:latin typeface="Courier"/>
+              </a:rPr>
+              <a:t> </a:t>
+            </a:r>
+            <a:r>
+              <a:rPr>
+                <a:solidFill>
+                  <a:srgbClr val="5E5E5E"/>
+                </a:solidFill>
+                <a:latin typeface="Courier"/>
+              </a:rPr>
+              <a:t>&amp;</a:t>
+            </a:r>
+            <a:r>
+              <a:rPr>
+                <a:solidFill>
+                  <a:srgbClr val="003B4F"/>
+                </a:solidFill>
+                <a:latin typeface="Courier"/>
+              </a:rPr>
+              <a:t> eligible </a:t>
+            </a:r>
+            <a:r>
+              <a:rPr>
+                <a:solidFill>
+                  <a:srgbClr val="5E5E5E"/>
+                </a:solidFill>
+                <a:latin typeface="Courier"/>
+              </a:rPr>
+              <a:t>==</a:t>
+            </a:r>
+            <a:r>
+              <a:rPr>
+                <a:solidFill>
+                  <a:srgbClr val="AD0000"/>
+                </a:solidFill>
+                <a:latin typeface="Courier"/>
+              </a:rPr>
+              <a:t>1</a:t>
+            </a:r>
+            <a:r>
+              <a:rPr>
+                <a:solidFill>
+                  <a:srgbClr val="003B4F"/>
+                </a:solidFill>
+                <a:latin typeface="Courier"/>
+              </a:rPr>
+              <a:t>),</a:t>
             </a:r>
             <a:br/>
             <a:r>
@@ -9321,8 +11367,28 @@
                 </a:solidFill>
                 <a:latin typeface="Courier"/>
               </a:rPr>
-              <a:t>                    age_manager </a:t>
-            </a:r>
+              <a:t>                        </a:t>
+            </a:r>
+            <a:r>
+              <a:rPr>
+                <a:solidFill>
+                  <a:srgbClr val="657422"/>
+                </a:solidFill>
+                <a:latin typeface="Courier"/>
+              </a:rPr>
+              <a:t>clusters =</a:t>
+            </a:r>
+            <a:r>
+              <a:rPr>
+                <a:solidFill>
+                  <a:srgbClr val="003B4F"/>
+                </a:solidFill>
+                <a:latin typeface="Courier"/>
+              </a:rPr>
+              <a:t> zone_identifier)</a:t>
+            </a:r>
+            <a:br/>
+            <a:br/>
             <a:r>
               <a:rPr>
                 <a:solidFill>
@@ -9330,8 +11396,9 @@
                 </a:solidFill>
                 <a:latin typeface="Courier"/>
               </a:rPr>
-              <a:t>+</a:t>
-            </a:r>
+              <a:t># Regression at follow-up: are waste expenditures different between treatment and control groups after intervention?</a:t>
+            </a:r>
+            <a:br/>
             <a:r>
               <a:rPr>
                 <a:solidFill>
@@ -9339,7 +11406,25 @@
                 </a:solidFill>
                 <a:latin typeface="Courier"/>
               </a:rPr>
-              <a:t> age_deputy </a:t>
+              <a:t>out_round1 &lt;- </a:t>
+            </a:r>
+            <a:r>
+              <a:rPr>
+                <a:solidFill>
+                  <a:srgbClr val="4758AB"/>
+                </a:solidFill>
+                <a:latin typeface="Courier"/>
+              </a:rPr>
+              <a:t>lm_robust</a:t>
+            </a:r>
+            <a:r>
+              <a:rPr>
+                <a:solidFill>
+                  <a:srgbClr val="003B4F"/>
+                </a:solidFill>
+                <a:latin typeface="Courier"/>
+              </a:rPr>
+              <a:t>(waste_management_costs </a:t>
             </a:r>
             <a:r>
               <a:rPr>
@@ -9348,7 +11433,16 @@
                 </a:solidFill>
                 <a:latin typeface="Courier"/>
               </a:rPr>
-              <a:t>+</a:t>
+              <a:t>~</a:t>
+            </a:r>
+            <a:r>
+              <a:rPr>
+                <a:solidFill>
+                  <a:srgbClr val="003B4F"/>
+                </a:solidFill>
+                <a:latin typeface="Courier"/>
+              </a:rPr>
+              <a:t> treatment_zone,</a:t>
             </a:r>
             <a:br/>
             <a:r>
@@ -9358,7 +11452,25 @@
                 </a:solidFill>
                 <a:latin typeface="Courier"/>
               </a:rPr>
-              <a:t>                    female_manager </a:t>
+              <a:t>                        </a:t>
+            </a:r>
+            <a:r>
+              <a:rPr>
+                <a:solidFill>
+                  <a:srgbClr val="657422"/>
+                </a:solidFill>
+                <a:latin typeface="Courier"/>
+              </a:rPr>
+              <a:t>data =</a:t>
+            </a:r>
+            <a:r>
+              <a:rPr>
+                <a:solidFill>
+                  <a:srgbClr val="003B4F"/>
+                </a:solidFill>
+                <a:latin typeface="Courier"/>
+              </a:rPr>
+              <a:t> df </a:t>
             </a:r>
             <a:r>
               <a:rPr>
@@ -9367,7 +11479,7 @@
                 </a:solidFill>
                 <a:latin typeface="Courier"/>
               </a:rPr>
-              <a:t>+</a:t>
+              <a:t>%&gt;%</a:t>
             </a:r>
             <a:r>
               <a:rPr>
@@ -9376,7 +11488,25 @@
                 </a:solidFill>
                 <a:latin typeface="Courier"/>
               </a:rPr>
-              <a:t> foreign_owned </a:t>
+              <a:t> </a:t>
+            </a:r>
+            <a:r>
+              <a:rPr>
+                <a:solidFill>
+                  <a:srgbClr val="4758AB"/>
+                </a:solidFill>
+                <a:latin typeface="Courier"/>
+              </a:rPr>
+              <a:t>filter</a:t>
+            </a:r>
+            <a:r>
+              <a:rPr>
+                <a:solidFill>
+                  <a:srgbClr val="003B4F"/>
+                </a:solidFill>
+                <a:latin typeface="Courier"/>
+              </a:rPr>
+              <a:t>(round </a:t>
             </a:r>
             <a:r>
               <a:rPr>
@@ -9385,7 +11515,7 @@
                 </a:solidFill>
                 <a:latin typeface="Courier"/>
               </a:rPr>
-              <a:t>+</a:t>
+              <a:t>==</a:t>
             </a:r>
             <a:r>
               <a:rPr>
@@ -9396,6 +11526,69 @@
               </a:rPr>
               <a:t> </a:t>
             </a:r>
+            <a:r>
+              <a:rPr>
+                <a:solidFill>
+                  <a:srgbClr val="AD0000"/>
+                </a:solidFill>
+                <a:latin typeface="Courier"/>
+              </a:rPr>
+              <a:t>1</a:t>
+            </a:r>
+            <a:r>
+              <a:rPr>
+                <a:solidFill>
+                  <a:srgbClr val="003B4F"/>
+                </a:solidFill>
+                <a:latin typeface="Courier"/>
+              </a:rPr>
+              <a:t> </a:t>
+            </a:r>
+            <a:r>
+              <a:rPr>
+                <a:solidFill>
+                  <a:srgbClr val="5E5E5E"/>
+                </a:solidFill>
+                <a:latin typeface="Courier"/>
+              </a:rPr>
+              <a:t>&amp;</a:t>
+            </a:r>
+            <a:r>
+              <a:rPr>
+                <a:solidFill>
+                  <a:srgbClr val="003B4F"/>
+                </a:solidFill>
+                <a:latin typeface="Courier"/>
+              </a:rPr>
+              <a:t> eligible </a:t>
+            </a:r>
+            <a:r>
+              <a:rPr>
+                <a:solidFill>
+                  <a:srgbClr val="5E5E5E"/>
+                </a:solidFill>
+                <a:latin typeface="Courier"/>
+              </a:rPr>
+              <a:t>==</a:t>
+            </a:r>
+            <a:r>
+              <a:rPr>
+                <a:solidFill>
+                  <a:srgbClr val="AD0000"/>
+                </a:solidFill>
+                <a:latin typeface="Courier"/>
+              </a:rPr>
+              <a:t>1</a:t>
+            </a:r>
+            <a:r>
+              <a:rPr>
+                <a:solidFill>
+                  <a:srgbClr val="003B4F"/>
+                </a:solidFill>
+                <a:latin typeface="Courier"/>
+              </a:rPr>
+              <a:t>),</a:t>
+            </a:r>
             <a:br/>
             <a:r>
               <a:rPr>
@@ -9404,218 +11597,7 @@
                 </a:solidFill>
                 <a:latin typeface="Courier"/>
               </a:rPr>
-              <a:t>                    staff_size </a:t>
-            </a:r>
-            <a:r>
-              <a:rPr>
-                <a:solidFill>
-                  <a:srgbClr val="5E5E5E"/>
-                </a:solidFill>
-                <a:latin typeface="Courier"/>
-              </a:rPr>
-              <a:t>+</a:t>
-            </a:r>
-            <a:br/>
-            <a:r>
-              <a:rPr>
-                <a:solidFill>
-                  <a:srgbClr val="003B4F"/>
-                </a:solidFill>
-                <a:latin typeface="Courier"/>
-              </a:rPr>
-              <a:t>                    advanced_filtration </a:t>
-            </a:r>
-            <a:r>
-              <a:rPr>
-                <a:solidFill>
-                  <a:srgbClr val="5E5E5E"/>
-                </a:solidFill>
-                <a:latin typeface="Courier"/>
-              </a:rPr>
-              <a:t>+</a:t>
-            </a:r>
-            <a:r>
-              <a:rPr>
-                <a:solidFill>
-                  <a:srgbClr val="003B4F"/>
-                </a:solidFill>
-                <a:latin typeface="Courier"/>
-              </a:rPr>
-              <a:t> facility_area </a:t>
-            </a:r>
-            <a:r>
-              <a:rPr>
-                <a:solidFill>
-                  <a:srgbClr val="5E5E5E"/>
-                </a:solidFill>
-                <a:latin typeface="Courier"/>
-              </a:rPr>
-              <a:t>+</a:t>
-            </a:r>
-            <a:br/>
-            <a:r>
-              <a:rPr>
-                <a:solidFill>
-                  <a:srgbClr val="003B4F"/>
-                </a:solidFill>
-                <a:latin typeface="Courier"/>
-              </a:rPr>
-              <a:t>                    recycling_center_distance,</a:t>
-            </a:r>
-            <a:br/>
-            <a:r>
-              <a:rPr>
-                <a:solidFill>
-                  <a:srgbClr val="003B4F"/>
-                </a:solidFill>
-                <a:latin typeface="Courier"/>
-              </a:rPr>
-              <a:t>                    </a:t>
-            </a:r>
-            <a:r>
-              <a:rPr>
-                <a:solidFill>
-                  <a:srgbClr val="657422"/>
-                </a:solidFill>
-                <a:latin typeface="Courier"/>
-              </a:rPr>
-              <a:t>data =</a:t>
-            </a:r>
-            <a:r>
-              <a:rPr>
-                <a:solidFill>
-                  <a:srgbClr val="003B4F"/>
-                </a:solidFill>
-                <a:latin typeface="Courier"/>
-              </a:rPr>
-              <a:t> df </a:t>
-            </a:r>
-            <a:r>
-              <a:rPr>
-                <a:solidFill>
-                  <a:srgbClr val="5E5E5E"/>
-                </a:solidFill>
-                <a:latin typeface="Courier"/>
-              </a:rPr>
-              <a:t>%&gt;%</a:t>
-            </a:r>
-            <a:r>
-              <a:rPr>
-                <a:solidFill>
-                  <a:srgbClr val="003B4F"/>
-                </a:solidFill>
-                <a:latin typeface="Courier"/>
-              </a:rPr>
-              <a:t> </a:t>
-            </a:r>
-            <a:r>
-              <a:rPr>
-                <a:solidFill>
-                  <a:srgbClr val="4758AB"/>
-                </a:solidFill>
-                <a:latin typeface="Courier"/>
-              </a:rPr>
-              <a:t>filter</a:t>
-            </a:r>
-            <a:r>
-              <a:rPr>
-                <a:solidFill>
-                  <a:srgbClr val="003B4F"/>
-                </a:solidFill>
-                <a:latin typeface="Courier"/>
-              </a:rPr>
-              <a:t>(round </a:t>
-            </a:r>
-            <a:r>
-              <a:rPr>
-                <a:solidFill>
-                  <a:srgbClr val="5E5E5E"/>
-                </a:solidFill>
-                <a:latin typeface="Courier"/>
-              </a:rPr>
-              <a:t>==</a:t>
-            </a:r>
-            <a:r>
-              <a:rPr>
-                <a:solidFill>
-                  <a:srgbClr val="003B4F"/>
-                </a:solidFill>
-                <a:latin typeface="Courier"/>
-              </a:rPr>
-              <a:t> </a:t>
-            </a:r>
-            <a:r>
-              <a:rPr>
-                <a:solidFill>
-                  <a:srgbClr val="AD0000"/>
-                </a:solidFill>
-                <a:latin typeface="Courier"/>
-              </a:rPr>
-              <a:t>1</a:t>
-            </a:r>
-            <a:r>
-              <a:rPr>
-                <a:solidFill>
-                  <a:srgbClr val="003B4F"/>
-                </a:solidFill>
-                <a:latin typeface="Courier"/>
-              </a:rPr>
-              <a:t> </a:t>
-            </a:r>
-            <a:r>
-              <a:rPr>
-                <a:solidFill>
-                  <a:srgbClr val="5E5E5E"/>
-                </a:solidFill>
-                <a:latin typeface="Courier"/>
-              </a:rPr>
-              <a:t>&amp;</a:t>
-            </a:r>
-            <a:r>
-              <a:rPr>
-                <a:solidFill>
-                  <a:srgbClr val="003B4F"/>
-                </a:solidFill>
-                <a:latin typeface="Courier"/>
-              </a:rPr>
-              <a:t> eligible </a:t>
-            </a:r>
-            <a:r>
-              <a:rPr>
-                <a:solidFill>
-                  <a:srgbClr val="5E5E5E"/>
-                </a:solidFill>
-                <a:latin typeface="Courier"/>
-              </a:rPr>
-              <a:t>==</a:t>
-            </a:r>
-            <a:r>
-              <a:rPr>
-                <a:solidFill>
-                  <a:srgbClr val="AD0000"/>
-                </a:solidFill>
-                <a:latin typeface="Courier"/>
-              </a:rPr>
-              <a:t>1</a:t>
-            </a:r>
-            <a:r>
-              <a:rPr>
-                <a:solidFill>
-                  <a:srgbClr val="003B4F"/>
-                </a:solidFill>
-                <a:latin typeface="Courier"/>
-              </a:rPr>
-              <a:t>),</a:t>
-            </a:r>
-            <a:br/>
-            <a:r>
-              <a:rPr>
-                <a:solidFill>
-                  <a:srgbClr val="003B4F"/>
-                </a:solidFill>
-                <a:latin typeface="Courier"/>
-              </a:rPr>
-              <a:t>                    </a:t>
+              <a:t>                        </a:t>
             </a:r>
             <a:r>
               <a:rPr>
@@ -9649,8 +11631,8 @@
           </p:nvPr>
         </p:nvGraphicFramePr>
         <p:xfrm>
-          <a:off x="4635500" y="1625600"/>
-          <a:ext cx="4038600" cy="2959100"/>
+          <a:off x="4648200" y="1193800"/>
+          <a:ext cx="4038600" cy="3390900"/>
         </p:xfrm>
         <a:graphic>
           <a:graphicData uri="http://schemas.openxmlformats.org/drawingml/2006/table">
@@ -9684,6 +11666,885 @@
                       </a:pPr>
                       <a:r>
                         <a:rPr/>
+                        <a:t>Round 0</a:t>
+                      </a:r>
+                    </a:p>
+                  </a:txBody>
+                  <a:tcPr/>
+                </a:tc>
+                <a:tc>
+                  <a:txBody>
+                    <a:bodyPr/>
+                    <a:lstStyle/>
+                    <a:p>
+                      <a:pPr lvl="0" indent="0" marL="0" algn="ctr">
+                        <a:buNone/>
+                      </a:pPr>
+                      <a:r>
+                        <a:rPr/>
+                        <a:t>Round 1</a:t>
+                      </a:r>
+                    </a:p>
+                  </a:txBody>
+                  <a:tcPr/>
+                </a:tc>
+              </a:tr>
+              <a:tr h="0">
+                <a:tc>
+                  <a:txBody>
+                    <a:bodyPr/>
+                    <a:lstStyle/>
+                    <a:p>
+                      <a:pPr lvl="0" indent="0" marL="0" algn="l">
+                        <a:buNone/>
+                      </a:pPr>
+                      <a:r>
+                        <a:rPr/>
+                        <a:t>(Intercept)</a:t>
+                      </a:r>
+                    </a:p>
+                  </a:txBody>
+                </a:tc>
+                <a:tc>
+                  <a:txBody>
+                    <a:bodyPr/>
+                    <a:lstStyle/>
+                    <a:p>
+                      <a:pPr lvl="0" indent="0" marL="0" algn="ctr">
+                        <a:buNone/>
+                      </a:pPr>
+                      <a:r>
+                        <a:rPr/>
+                        <a:t>1457.385***</a:t>
+                      </a:r>
+                    </a:p>
+                  </a:txBody>
+                </a:tc>
+                <a:tc>
+                  <a:txBody>
+                    <a:bodyPr/>
+                    <a:lstStyle/>
+                    <a:p>
+                      <a:pPr lvl="0" indent="0" marL="0" algn="ctr">
+                        <a:buNone/>
+                      </a:pPr>
+                      <a:r>
+                        <a:rPr/>
+                        <a:t>1798.055***</a:t>
+                      </a:r>
+                    </a:p>
+                  </a:txBody>
+                </a:tc>
+              </a:tr>
+              <a:tr h="0">
+                <a:tc>
+                  <a:txBody>
+                    <a:bodyPr/>
+                    <a:lstStyle/>
+                    <a:p>
+                      <a:endParaRPr/>
+                    </a:p>
+                  </a:txBody>
+                </a:tc>
+                <a:tc>
+                  <a:txBody>
+                    <a:bodyPr/>
+                    <a:lstStyle/>
+                    <a:p>
+                      <a:pPr lvl="0" indent="0" marL="0" algn="ctr">
+                        <a:buNone/>
+                      </a:pPr>
+                      <a:r>
+                        <a:rPr/>
+                        <a:t>(15.726)</a:t>
+                      </a:r>
+                    </a:p>
+                  </a:txBody>
+                </a:tc>
+                <a:tc>
+                  <a:txBody>
+                    <a:bodyPr/>
+                    <a:lstStyle/>
+                    <a:p>
+                      <a:pPr lvl="0" indent="0" marL="0" algn="ctr">
+                        <a:buNone/>
+                      </a:pPr>
+                      <a:r>
+                        <a:rPr/>
+                        <a:t>(30.912)</a:t>
+                      </a:r>
+                    </a:p>
+                  </a:txBody>
+                </a:tc>
+              </a:tr>
+              <a:tr h="0">
+                <a:tc>
+                  <a:txBody>
+                    <a:bodyPr/>
+                    <a:lstStyle/>
+                    <a:p>
+                      <a:pPr lvl="0" indent="0" marL="0" algn="l">
+                        <a:buNone/>
+                      </a:pPr>
+                      <a:r>
+                        <a:rPr/>
+                        <a:t>treatment_zone</a:t>
+                      </a:r>
+                    </a:p>
+                  </a:txBody>
+                </a:tc>
+                <a:tc>
+                  <a:txBody>
+                    <a:bodyPr/>
+                    <a:lstStyle/>
+                    <a:p>
+                      <a:pPr lvl="0" indent="0" marL="0" algn="ctr">
+                        <a:buNone/>
+                      </a:pPr>
+                      <a:r>
+                        <a:rPr/>
+                        <a:t>−8.415</a:t>
+                      </a:r>
+                    </a:p>
+                  </a:txBody>
+                </a:tc>
+                <a:tc>
+                  <a:txBody>
+                    <a:bodyPr/>
+                    <a:lstStyle/>
+                    <a:p>
+                      <a:pPr lvl="0" indent="0" marL="0" algn="ctr">
+                        <a:buNone/>
+                      </a:pPr>
+                      <a:r>
+                        <a:rPr/>
+                        <a:t>−1014.037***</a:t>
+                      </a:r>
+                    </a:p>
+                  </a:txBody>
+                </a:tc>
+              </a:tr>
+              <a:tr h="0">
+                <a:tc>
+                  <a:txBody>
+                    <a:bodyPr/>
+                    <a:lstStyle/>
+                    <a:p>
+                      <a:endParaRPr/>
+                    </a:p>
+                  </a:txBody>
+                </a:tc>
+                <a:tc>
+                  <a:txBody>
+                    <a:bodyPr/>
+                    <a:lstStyle/>
+                    <a:p>
+                      <a:pPr lvl="0" indent="0" marL="0" algn="ctr">
+                        <a:buNone/>
+                      </a:pPr>
+                      <a:r>
+                        <a:rPr/>
+                        <a:t>(21.456)</a:t>
+                      </a:r>
+                    </a:p>
+                  </a:txBody>
+                </a:tc>
+                <a:tc>
+                  <a:txBody>
+                    <a:bodyPr/>
+                    <a:lstStyle/>
+                    <a:p>
+                      <a:pPr lvl="0" indent="0" marL="0" algn="ctr">
+                        <a:buNone/>
+                      </a:pPr>
+                      <a:r>
+                        <a:rPr/>
+                        <a:t>(39.890)</a:t>
+                      </a:r>
+                    </a:p>
+                  </a:txBody>
+                </a:tc>
+              </a:tr>
+              <a:tr h="0">
+                <a:tc>
+                  <a:txBody>
+                    <a:bodyPr/>
+                    <a:lstStyle/>
+                    <a:p>
+                      <a:pPr lvl="0" indent="0" marL="0" algn="l">
+                        <a:buNone/>
+                      </a:pPr>
+                      <a:r>
+                        <a:rPr/>
+                        <a:t>Num.Obs.</a:t>
+                      </a:r>
+                    </a:p>
+                  </a:txBody>
+                </a:tc>
+                <a:tc>
+                  <a:txBody>
+                    <a:bodyPr/>
+                    <a:lstStyle/>
+                    <a:p>
+                      <a:pPr lvl="0" indent="0" marL="0" algn="ctr">
+                        <a:buNone/>
+                      </a:pPr>
+                      <a:r>
+                        <a:rPr/>
+                        <a:t>5628</a:t>
+                      </a:r>
+                    </a:p>
+                  </a:txBody>
+                </a:tc>
+                <a:tc>
+                  <a:txBody>
+                    <a:bodyPr/>
+                    <a:lstStyle/>
+                    <a:p>
+                      <a:pPr lvl="0" indent="0" marL="0" algn="ctr">
+                        <a:buNone/>
+                      </a:pPr>
+                      <a:r>
+                        <a:rPr/>
+                        <a:t>5629</a:t>
+                      </a:r>
+                    </a:p>
+                  </a:txBody>
+                </a:tc>
+              </a:tr>
+              <a:tr h="0">
+                <a:tc>
+                  <a:txBody>
+                    <a:bodyPr/>
+                    <a:lstStyle/>
+                    <a:p>
+                      <a:pPr lvl="0" indent="0" marL="0" algn="l">
+                        <a:buNone/>
+                      </a:pPr>
+                      <a:r>
+                        <a:rPr/>
+                        <a:t>R2</a:t>
+                      </a:r>
+                    </a:p>
+                  </a:txBody>
+                </a:tc>
+                <a:tc>
+                  <a:txBody>
+                    <a:bodyPr/>
+                    <a:lstStyle/>
+                    <a:p>
+                      <a:pPr lvl="0" indent="0" marL="0" algn="ctr">
+                        <a:buNone/>
+                      </a:pPr>
+                      <a:r>
+                        <a:rPr/>
+                        <a:t>0.000</a:t>
+                      </a:r>
+                    </a:p>
+                  </a:txBody>
+                </a:tc>
+                <a:tc>
+                  <a:txBody>
+                    <a:bodyPr/>
+                    <a:lstStyle/>
+                    <a:p>
+                      <a:pPr lvl="0" indent="0" marL="0" algn="ctr">
+                        <a:buNone/>
+                      </a:pPr>
+                      <a:r>
+                        <a:rPr/>
+                        <a:t>0.300</a:t>
+                      </a:r>
+                    </a:p>
+                  </a:txBody>
+                </a:tc>
+              </a:tr>
+              <a:tr h="0">
+                <a:tc>
+                  <a:txBody>
+                    <a:bodyPr/>
+                    <a:lstStyle/>
+                    <a:p>
+                      <a:pPr lvl="0" indent="0" marL="0" algn="l">
+                        <a:buNone/>
+                      </a:pPr>
+                      <a:r>
+                        <a:rPr/>
+                        <a:t>R2 Adj.</a:t>
+                      </a:r>
+                    </a:p>
+                  </a:txBody>
+                </a:tc>
+                <a:tc>
+                  <a:txBody>
+                    <a:bodyPr/>
+                    <a:lstStyle/>
+                    <a:p>
+                      <a:pPr lvl="0" indent="0" marL="0" algn="ctr">
+                        <a:buNone/>
+                      </a:pPr>
+                      <a:r>
+                        <a:rPr/>
+                        <a:t>−0.000</a:t>
+                      </a:r>
+                    </a:p>
+                  </a:txBody>
+                </a:tc>
+                <a:tc>
+                  <a:txBody>
+                    <a:bodyPr/>
+                    <a:lstStyle/>
+                    <a:p>
+                      <a:pPr lvl="0" indent="0" marL="0" algn="ctr">
+                        <a:buNone/>
+                      </a:pPr>
+                      <a:r>
+                        <a:rPr/>
+                        <a:t>0.300</a:t>
+                      </a:r>
+                    </a:p>
+                  </a:txBody>
+                </a:tc>
+              </a:tr>
+              <a:tr h="0">
+                <a:tc>
+                  <a:txBody>
+                    <a:bodyPr/>
+                    <a:lstStyle/>
+                    <a:p>
+                      <a:pPr lvl="0" indent="0" marL="0" algn="l">
+                        <a:buNone/>
+                      </a:pPr>
+                      <a:r>
+                        <a:rPr/>
+                        <a:t> + p &lt; 0.1, * p &lt; 0.05, ** p &lt; 0.01, *** p &lt; 0.001</a:t>
+                      </a:r>
+                    </a:p>
+                  </a:txBody>
+                </a:tc>
+                <a:tc>
+                  <a:txBody>
+                    <a:bodyPr/>
+                    <a:lstStyle/>
+                    <a:p>
+                      <a:endParaRPr/>
+                    </a:p>
+                  </a:txBody>
+                </a:tc>
+                <a:tc>
+                  <a:txBody>
+                    <a:bodyPr/>
+                    <a:lstStyle/>
+                    <a:p>
+                      <a:endParaRPr/>
+                    </a:p>
+                  </a:txBody>
+                </a:tc>
+              </a:tr>
+            </a:tbl>
+          </a:graphicData>
+        </a:graphic>
+      </p:graphicFrame>
+    </p:spTree>
+  </p:cSld>
+</p:sld>
+</file>
+
+<file path=ppt/slides/slide8.xml><?xml version="1.0" encoding="utf-8"?>
+<p:sld xmlns:a="http://schemas.openxmlformats.org/drawingml/2006/main" xmlns:r="http://schemas.openxmlformats.org/officeDocument/2006/relationships" xmlns:p="http://schemas.openxmlformats.org/presentationml/2006/main">
+  <p:cSld>
+    <p:spTree>
+      <p:nvGrpSpPr>
+        <p:cNvPr id="1" name=""/>
+        <p:cNvGrpSpPr/>
+        <p:nvPr/>
+      </p:nvGrpSpPr>
+      <p:grpSpPr>
+        <a:xfrm>
+          <a:off x="0" y="0"/>
+          <a:ext cx="0" cy="0"/>
+          <a:chOff x="0" y="0"/>
+          <a:chExt cx="0" cy="0"/>
+        </a:xfrm>
+      </p:grpSpPr>
+      <p:sp>
+        <p:nvSpPr>
+          <p:cNvPr id="2" name="Title 1"/>
+          <p:cNvSpPr>
+            <a:spLocks noGrp="1"/>
+          </p:cNvSpPr>
+          <p:nvPr>
+            <p:ph type="title"/>
+          </p:nvPr>
+        </p:nvSpPr>
+        <p:spPr/>
+        <p:txBody>
+          <a:bodyPr/>
+          <a:lstStyle/>
+          <a:p>
+            <a:pPr lvl="0" indent="0" marL="0">
+              <a:buNone/>
+            </a:pPr>
+            <a:r>
+              <a:rPr/>
+              <a:t>Using Regression Analysis</a:t>
+            </a:r>
+          </a:p>
+        </p:txBody>
+      </p:sp>
+      <p:sp>
+        <p:nvSpPr>
+          <p:cNvPr id="3" name="Content Placeholder 2"/>
+          <p:cNvSpPr>
+            <a:spLocks noGrp="1"/>
+          </p:cNvSpPr>
+          <p:nvPr>
+            <p:ph idx="1" sz="half"/>
+          </p:nvPr>
+        </p:nvSpPr>
+        <p:spPr/>
+        <p:txBody>
+          <a:bodyPr/>
+          <a:lstStyle/>
+          <a:p>
+            <a:pPr lvl="0" indent="0">
+              <a:buNone/>
+            </a:pPr>
+            <a:r>
+              <a:rPr>
+                <a:solidFill>
+                  <a:srgbClr val="5E5E5E"/>
+                </a:solidFill>
+                <a:latin typeface="Courier"/>
+              </a:rPr>
+              <a:t># Compare waste expenditures in T and C industries at follow-up with additional covariates</a:t>
+            </a:r>
+            <a:br/>
+            <a:r>
+              <a:rPr>
+                <a:solidFill>
+                  <a:srgbClr val="003B4F"/>
+                </a:solidFill>
+                <a:latin typeface="Courier"/>
+              </a:rPr>
+              <a:t>out_round2 &lt;- </a:t>
+            </a:r>
+            <a:r>
+              <a:rPr>
+                <a:solidFill>
+                  <a:srgbClr val="4758AB"/>
+                </a:solidFill>
+                <a:latin typeface="Courier"/>
+              </a:rPr>
+              <a:t>lm_robust</a:t>
+            </a:r>
+            <a:r>
+              <a:rPr>
+                <a:solidFill>
+                  <a:srgbClr val="003B4F"/>
+                </a:solidFill>
+                <a:latin typeface="Courier"/>
+              </a:rPr>
+              <a:t>(waste_management_costs </a:t>
+            </a:r>
+            <a:r>
+              <a:rPr>
+                <a:solidFill>
+                  <a:srgbClr val="5E5E5E"/>
+                </a:solidFill>
+                <a:latin typeface="Courier"/>
+              </a:rPr>
+              <a:t>~</a:t>
+            </a:r>
+            <a:r>
+              <a:rPr>
+                <a:solidFill>
+                  <a:srgbClr val="003B4F"/>
+                </a:solidFill>
+                <a:latin typeface="Courier"/>
+              </a:rPr>
+              <a:t> treatment_zone </a:t>
+            </a:r>
+            <a:r>
+              <a:rPr>
+                <a:solidFill>
+                  <a:srgbClr val="5E5E5E"/>
+                </a:solidFill>
+                <a:latin typeface="Courier"/>
+              </a:rPr>
+              <a:t>+</a:t>
+            </a:r>
+            <a:br/>
+            <a:r>
+              <a:rPr>
+                <a:solidFill>
+                  <a:srgbClr val="003B4F"/>
+                </a:solidFill>
+                <a:latin typeface="Courier"/>
+              </a:rPr>
+              <a:t>                    age_manager </a:t>
+            </a:r>
+            <a:r>
+              <a:rPr>
+                <a:solidFill>
+                  <a:srgbClr val="5E5E5E"/>
+                </a:solidFill>
+                <a:latin typeface="Courier"/>
+              </a:rPr>
+              <a:t>+</a:t>
+            </a:r>
+            <a:r>
+              <a:rPr>
+                <a:solidFill>
+                  <a:srgbClr val="003B4F"/>
+                </a:solidFill>
+                <a:latin typeface="Courier"/>
+              </a:rPr>
+              <a:t> age_deputy </a:t>
+            </a:r>
+            <a:r>
+              <a:rPr>
+                <a:solidFill>
+                  <a:srgbClr val="5E5E5E"/>
+                </a:solidFill>
+                <a:latin typeface="Courier"/>
+              </a:rPr>
+              <a:t>+</a:t>
+            </a:r>
+            <a:br/>
+            <a:r>
+              <a:rPr>
+                <a:solidFill>
+                  <a:srgbClr val="003B4F"/>
+                </a:solidFill>
+                <a:latin typeface="Courier"/>
+              </a:rPr>
+              <a:t>                    female_manager </a:t>
+            </a:r>
+            <a:r>
+              <a:rPr>
+                <a:solidFill>
+                  <a:srgbClr val="5E5E5E"/>
+                </a:solidFill>
+                <a:latin typeface="Courier"/>
+              </a:rPr>
+              <a:t>+</a:t>
+            </a:r>
+            <a:r>
+              <a:rPr>
+                <a:solidFill>
+                  <a:srgbClr val="003B4F"/>
+                </a:solidFill>
+                <a:latin typeface="Courier"/>
+              </a:rPr>
+              <a:t> foreign_owned </a:t>
+            </a:r>
+            <a:r>
+              <a:rPr>
+                <a:solidFill>
+                  <a:srgbClr val="5E5E5E"/>
+                </a:solidFill>
+                <a:latin typeface="Courier"/>
+              </a:rPr>
+              <a:t>+</a:t>
+            </a:r>
+            <a:r>
+              <a:rPr>
+                <a:solidFill>
+                  <a:srgbClr val="003B4F"/>
+                </a:solidFill>
+                <a:latin typeface="Courier"/>
+              </a:rPr>
+              <a:t> </a:t>
+            </a:r>
+            <a:br/>
+            <a:r>
+              <a:rPr>
+                <a:solidFill>
+                  <a:srgbClr val="003B4F"/>
+                </a:solidFill>
+                <a:latin typeface="Courier"/>
+              </a:rPr>
+              <a:t>                    staff_size </a:t>
+            </a:r>
+            <a:r>
+              <a:rPr>
+                <a:solidFill>
+                  <a:srgbClr val="5E5E5E"/>
+                </a:solidFill>
+                <a:latin typeface="Courier"/>
+              </a:rPr>
+              <a:t>+</a:t>
+            </a:r>
+            <a:br/>
+            <a:r>
+              <a:rPr>
+                <a:solidFill>
+                  <a:srgbClr val="003B4F"/>
+                </a:solidFill>
+                <a:latin typeface="Courier"/>
+              </a:rPr>
+              <a:t>                    advanced_filtration </a:t>
+            </a:r>
+            <a:r>
+              <a:rPr>
+                <a:solidFill>
+                  <a:srgbClr val="5E5E5E"/>
+                </a:solidFill>
+                <a:latin typeface="Courier"/>
+              </a:rPr>
+              <a:t>+</a:t>
+            </a:r>
+            <a:r>
+              <a:rPr>
+                <a:solidFill>
+                  <a:srgbClr val="003B4F"/>
+                </a:solidFill>
+                <a:latin typeface="Courier"/>
+              </a:rPr>
+              <a:t> facility_area </a:t>
+            </a:r>
+            <a:r>
+              <a:rPr>
+                <a:solidFill>
+                  <a:srgbClr val="5E5E5E"/>
+                </a:solidFill>
+                <a:latin typeface="Courier"/>
+              </a:rPr>
+              <a:t>+</a:t>
+            </a:r>
+            <a:br/>
+            <a:r>
+              <a:rPr>
+                <a:solidFill>
+                  <a:srgbClr val="003B4F"/>
+                </a:solidFill>
+                <a:latin typeface="Courier"/>
+              </a:rPr>
+              <a:t>                    recycling_center_distance,</a:t>
+            </a:r>
+            <a:br/>
+            <a:r>
+              <a:rPr>
+                <a:solidFill>
+                  <a:srgbClr val="003B4F"/>
+                </a:solidFill>
+                <a:latin typeface="Courier"/>
+              </a:rPr>
+              <a:t>                    </a:t>
+            </a:r>
+            <a:r>
+              <a:rPr>
+                <a:solidFill>
+                  <a:srgbClr val="657422"/>
+                </a:solidFill>
+                <a:latin typeface="Courier"/>
+              </a:rPr>
+              <a:t>data =</a:t>
+            </a:r>
+            <a:r>
+              <a:rPr>
+                <a:solidFill>
+                  <a:srgbClr val="003B4F"/>
+                </a:solidFill>
+                <a:latin typeface="Courier"/>
+              </a:rPr>
+              <a:t> df </a:t>
+            </a:r>
+            <a:r>
+              <a:rPr>
+                <a:solidFill>
+                  <a:srgbClr val="5E5E5E"/>
+                </a:solidFill>
+                <a:latin typeface="Courier"/>
+              </a:rPr>
+              <a:t>%&gt;%</a:t>
+            </a:r>
+            <a:r>
+              <a:rPr>
+                <a:solidFill>
+                  <a:srgbClr val="003B4F"/>
+                </a:solidFill>
+                <a:latin typeface="Courier"/>
+              </a:rPr>
+              <a:t> </a:t>
+            </a:r>
+            <a:r>
+              <a:rPr>
+                <a:solidFill>
+                  <a:srgbClr val="4758AB"/>
+                </a:solidFill>
+                <a:latin typeface="Courier"/>
+              </a:rPr>
+              <a:t>filter</a:t>
+            </a:r>
+            <a:r>
+              <a:rPr>
+                <a:solidFill>
+                  <a:srgbClr val="003B4F"/>
+                </a:solidFill>
+                <a:latin typeface="Courier"/>
+              </a:rPr>
+              <a:t>(round </a:t>
+            </a:r>
+            <a:r>
+              <a:rPr>
+                <a:solidFill>
+                  <a:srgbClr val="5E5E5E"/>
+                </a:solidFill>
+                <a:latin typeface="Courier"/>
+              </a:rPr>
+              <a:t>==</a:t>
+            </a:r>
+            <a:r>
+              <a:rPr>
+                <a:solidFill>
+                  <a:srgbClr val="003B4F"/>
+                </a:solidFill>
+                <a:latin typeface="Courier"/>
+              </a:rPr>
+              <a:t> </a:t>
+            </a:r>
+            <a:r>
+              <a:rPr>
+                <a:solidFill>
+                  <a:srgbClr val="AD0000"/>
+                </a:solidFill>
+                <a:latin typeface="Courier"/>
+              </a:rPr>
+              <a:t>1</a:t>
+            </a:r>
+            <a:r>
+              <a:rPr>
+                <a:solidFill>
+                  <a:srgbClr val="003B4F"/>
+                </a:solidFill>
+                <a:latin typeface="Courier"/>
+              </a:rPr>
+              <a:t> </a:t>
+            </a:r>
+            <a:r>
+              <a:rPr>
+                <a:solidFill>
+                  <a:srgbClr val="5E5E5E"/>
+                </a:solidFill>
+                <a:latin typeface="Courier"/>
+              </a:rPr>
+              <a:t>&amp;</a:t>
+            </a:r>
+            <a:r>
+              <a:rPr>
+                <a:solidFill>
+                  <a:srgbClr val="003B4F"/>
+                </a:solidFill>
+                <a:latin typeface="Courier"/>
+              </a:rPr>
+              <a:t> eligible </a:t>
+            </a:r>
+            <a:r>
+              <a:rPr>
+                <a:solidFill>
+                  <a:srgbClr val="5E5E5E"/>
+                </a:solidFill>
+                <a:latin typeface="Courier"/>
+              </a:rPr>
+              <a:t>==</a:t>
+            </a:r>
+            <a:r>
+              <a:rPr>
+                <a:solidFill>
+                  <a:srgbClr val="AD0000"/>
+                </a:solidFill>
+                <a:latin typeface="Courier"/>
+              </a:rPr>
+              <a:t>1</a:t>
+            </a:r>
+            <a:r>
+              <a:rPr>
+                <a:solidFill>
+                  <a:srgbClr val="003B4F"/>
+                </a:solidFill>
+                <a:latin typeface="Courier"/>
+              </a:rPr>
+              <a:t>),</a:t>
+            </a:r>
+            <a:br/>
+            <a:r>
+              <a:rPr>
+                <a:solidFill>
+                  <a:srgbClr val="003B4F"/>
+                </a:solidFill>
+                <a:latin typeface="Courier"/>
+              </a:rPr>
+              <a:t>                    </a:t>
+            </a:r>
+            <a:r>
+              <a:rPr>
+                <a:solidFill>
+                  <a:srgbClr val="657422"/>
+                </a:solidFill>
+                <a:latin typeface="Courier"/>
+              </a:rPr>
+              <a:t>clusters =</a:t>
+            </a:r>
+            <a:r>
+              <a:rPr>
+                <a:solidFill>
+                  <a:srgbClr val="003B4F"/>
+                </a:solidFill>
+                <a:latin typeface="Courier"/>
+              </a:rPr>
+              <a:t> zone_identifier)</a:t>
+            </a:r>
+          </a:p>
+        </p:txBody>
+      </p:sp>
+      <p:graphicFrame>
+        <p:nvGraphicFramePr>
+          <p:cNvPr id="6" name="Content Placeholder 5"/>
+          <p:cNvGraphicFramePr>
+            <a:graphicFrameLocks noGrp="1"/>
+          </p:cNvGraphicFramePr>
+          <p:nvPr>
+            <p:ph idx="1"/>
+          </p:nvPr>
+        </p:nvGraphicFramePr>
+        <p:xfrm>
+          <a:off x="4648200" y="1193800"/>
+          <a:ext cx="4038600" cy="3390900"/>
+        </p:xfrm>
+        <a:graphic>
+          <a:graphicData uri="http://schemas.openxmlformats.org/drawingml/2006/table">
+            <a:tbl>
+              <a:tblPr firstRow="1" bandRow="1">
+                <a:tableStyleId>{5C22544A-7EE6-4342-B048-85BDC9FD1C3A}</a:tableStyleId>
+              </a:tblPr>
+              <a:tblGrid>
+                <a:gridCol w="1346200"/>
+                <a:gridCol w="1346200"/>
+                <a:gridCol w="1346200"/>
+              </a:tblGrid>
+              <a:tr h="0">
+                <a:tc>
+                  <a:txBody>
+                    <a:bodyPr/>
+                    <a:lstStyle/>
+                    <a:p>
+                      <a:endParaRPr/>
+                    </a:p>
+                  </a:txBody>
+                  <a:tcPr/>
+                </a:tc>
+                <a:tc>
+                  <a:txBody>
+                    <a:bodyPr/>
+                    <a:lstStyle/>
+                    <a:p>
+                      <a:pPr lvl="0" indent="0" marL="0" algn="ctr">
+                        <a:buNone/>
+                      </a:pPr>
+                      <a:r>
+                        <a:rPr/>
                         <a:t>No covariate adj.</a:t>
                       </a:r>
                     </a:p>
@@ -9733,7 +12594,7 @@
                       </a:pPr>
                       <a:r>
                         <a:rPr/>
-                        <a:t>17980.550***</a:t>
+                        <a:t>1798.055***</a:t>
                       </a:r>
                     </a:p>
                   </a:txBody>
@@ -9748,7 +12609,7 @@
                       </a:pPr>
                       <a:r>
                         <a:rPr/>
-                        <a:t>27223.565***</a:t>
+                        <a:t>2722.356***</a:t>
                       </a:r>
                     </a:p>
                   </a:txBody>
@@ -9774,7 +12635,7 @@
                       </a:pPr>
                       <a:r>
                         <a:rPr/>
-                        <a:t>(309.123)</a:t>
+                        <a:t>(30.912)</a:t>
                       </a:r>
                     </a:p>
                   </a:txBody>
@@ -9789,7 +12650,7 @@
                       </a:pPr>
                       <a:r>
                         <a:rPr/>
-                        <a:t>(709.757)</a:t>
+                        <a:t>(70.976)</a:t>
                       </a:r>
                     </a:p>
                   </a:txBody>
@@ -9821,7 +12682,7 @@
                       </a:pPr>
                       <a:r>
                         <a:rPr/>
-                        <a:t>−10140.371***</a:t>
+                        <a:t>−1014.037***</a:t>
                       </a:r>
                     </a:p>
                   </a:txBody>
@@ -9836,7 +12697,7 @@
                       </a:pPr>
                       <a:r>
                         <a:rPr/>
-                        <a:t>−10011.495***</a:t>
+                        <a:t>−1001.150***</a:t>
                       </a:r>
                     </a:p>
                   </a:txBody>
@@ -9862,7 +12723,7 @@
                       </a:pPr>
                       <a:r>
                         <a:rPr/>
-                        <a:t>(398.899)</a:t>
+                        <a:t>(39.890)</a:t>
                       </a:r>
                     </a:p>
                   </a:txBody>
@@ -9877,7 +12738,7 @@
                       </a:pPr>
                       <a:r>
                         <a:rPr/>
-                        <a:t>(345.884)</a:t>
+                        <a:t>(34.588)</a:t>
                       </a:r>
                     </a:p>
                   </a:txBody>
@@ -9918,7 +12779,7 @@
                       </a:pPr>
                       <a:r>
                         <a:rPr/>
-                        <a:t>44.704**</a:t>
+                        <a:t>4.470**</a:t>
                       </a:r>
                     </a:p>
                   </a:txBody>
@@ -9953,7 +12814,7 @@
                       </a:pPr>
                       <a:r>
                         <a:rPr/>
-                        <a:t>(14.910)</a:t>
+                        <a:t>(1.491)</a:t>
                       </a:r>
                     </a:p>
                   </a:txBody>
@@ -9994,7 +12855,7 @@
                       </a:pPr>
                       <a:r>
                         <a:rPr/>
-                        <a:t>5.676</a:t>
+                        <a:t>0.568</a:t>
                       </a:r>
                     </a:p>
                   </a:txBody>
@@ -10029,7 +12890,7 @@
                       </a:pPr>
                       <a:r>
                         <a:rPr/>
-                        <a:t>(16.558)</a:t>
+                        <a:t>(1.656)</a:t>
                       </a:r>
                     </a:p>
                   </a:txBody>
@@ -10070,7 +12931,7 @@
                       </a:pPr>
                       <a:r>
                         <a:rPr/>
-                        <a:t>656.864</a:t>
+                        <a:t>65.686</a:t>
                       </a:r>
                     </a:p>
                   </a:txBody>
@@ -10105,7 +12966,7 @@
                       </a:pPr>
                       <a:r>
                         <a:rPr/>
-                        <a:t>(450.642)</a:t>
+                        <a:t>(45.064)</a:t>
                       </a:r>
                     </a:p>
                   </a:txBody>
@@ -10146,7 +13007,7 @@
                       </a:pPr>
                       <a:r>
                         <a:rPr/>
-                        <a:t>−1866.504***</a:t>
+                        <a:t>−186.650***</a:t>
                       </a:r>
                     </a:p>
                   </a:txBody>
@@ -10181,7 +13042,7 @@
                       </a:pPr>
                       <a:r>
                         <a:rPr/>
-                        <a:t>(357.736)</a:t>
+                        <a:t>(35.774)</a:t>
                       </a:r>
                     </a:p>
                   </a:txBody>
@@ -10222,7 +13083,7 @@
                       </a:pPr>
                       <a:r>
                         <a:rPr/>
-                        <a:t>−1593.934***</a:t>
+                        <a:t>−159.393***</a:t>
                       </a:r>
                     </a:p>
                   </a:txBody>
@@ -10257,7 +13118,7 @@
                       </a:pPr>
                       <a:r>
                         <a:rPr/>
-                        <a:t>(65.646)</a:t>
+                        <a:t>(6.565)</a:t>
                       </a:r>
                     </a:p>
                   </a:txBody>
@@ -10298,7 +13159,7 @@
                       </a:pPr>
                       <a:r>
                         <a:rPr/>
-                        <a:t>−1847.307***</a:t>
+                        <a:t>−184.731***</a:t>
                       </a:r>
                     </a:p>
                   </a:txBody>
@@ -10333,7 +13194,7 @@
                       </a:pPr>
                       <a:r>
                         <a:rPr/>
-                        <a:t>(279.524)</a:t>
+                        <a:t>(27.952)</a:t>
                       </a:r>
                     </a:p>
                   </a:txBody>
@@ -10374,7 +13235,7 @@
                       </a:pPr>
                       <a:r>
                         <a:rPr/>
-                        <a:t>40.065</a:t>
+                        <a:t>4.007</a:t>
                       </a:r>
                     </a:p>
                   </a:txBody>
@@ -10409,7 +13270,7 @@
                       </a:pPr>
                       <a:r>
                         <a:rPr/>
-                        <a:t>(38.362)</a:t>
+                        <a:t>(3.836)</a:t>
                       </a:r>
                     </a:p>
                   </a:txBody>
@@ -10450,7 +13311,7 @@
                       </a:pPr>
                       <a:r>
                         <a:rPr/>
-                        <a:t>−2.517</a:t>
+                        <a:t>−0.252</a:t>
                       </a:r>
                     </a:p>
                   </a:txBody>
@@ -10485,7 +13346,7 @@
                       </a:pPr>
                       <a:r>
                         <a:rPr/>
-                        <a:t>(4.263)</a:t>
+                        <a:t>(0.426)</a:t>
                       </a:r>
                     </a:p>
                   </a:txBody>
@@ -10671,229 +13532,12 @@
           </a:graphicData>
         </a:graphic>
       </p:graphicFrame>
-      <p:sp>
-        <p:nvSpPr>
-          <p:cNvPr id="6" name="Content Placeholder 5"/>
-          <p:cNvSpPr>
-            <a:spLocks noGrp="1"/>
-          </p:cNvSpPr>
-          <p:nvPr>
-            <p:ph idx="4" sz="quarter"/>
-          </p:nvPr>
-        </p:nvSpPr>
-        <p:spPr/>
-        <p:txBody>
-          <a:bodyPr/>
-          <a:lstStyle/>
-          <a:p>
-            <a:pPr lvl="0"/>
-            <a:r>
-              <a:rPr/>
-              <a:t>Treatment effect remains stable with addition of control variables</a:t>
-            </a:r>
-          </a:p>
-          <a:p>
-            <a:pPr lvl="0"/>
-            <a:r>
-              <a:rPr/>
-              <a:t>Controls improve precision (smaller standard errors)</a:t>
-            </a:r>
-          </a:p>
-          <a:p>
-            <a:pPr lvl="0"/>
-            <a:r>
-              <a:rPr/>
-              <a:t>Adding controls increases R² from 0.30 to 0.43</a:t>
-            </a:r>
-          </a:p>
-        </p:txBody>
-      </p:sp>
     </p:spTree>
   </p:cSld>
-  <p:timing>
-    <p:tnLst>
-      <p:par>
-        <p:cTn id="1" dur="indefinite" restart="never" nodeType="tmRoot">
-          <p:childTnLst>
-            <p:seq concurrent="1" nextAc="seek">
-              <p:cTn id="2" dur="indefinite" nodeType="mainSeq">
-                <p:childTnLst>
-                  <p:par>
-                    <p:cTn id="3" fill="hold">
-                      <p:stCondLst>
-                        <p:cond delay="indefinite"/>
-                      </p:stCondLst>
-                      <p:childTnLst>
-                        <p:par>
-                          <p:cTn id="4" fill="hold">
-                            <p:stCondLst>
-                              <p:cond delay="0"/>
-                            </p:stCondLst>
-                            <p:childTnLst>
-                              <p:par>
-                                <p:cTn id="5" presetID="1" presetClass="entr" presetSubtype="0" fill="hold" grpId="0" nodeType="clickEffect">
-                                  <p:stCondLst>
-                                    <p:cond delay="0"/>
-                                  </p:stCondLst>
-                                  <p:childTnLst>
-                                    <p:set>
-                                      <p:cBhvr>
-                                        <p:cTn id="6" dur="1" fill="hold">
-                                          <p:stCondLst>
-                                            <p:cond delay="0"/>
-                                          </p:stCondLst>
-                                        </p:cTn>
-                                        <p:tgtEl>
-                                          <p:spTgt spid="6">
-                                            <p:txEl>
-                                              <p:pRg st="0" end="0"/>
-                                            </p:txEl>
-                                          </p:spTgt>
-                                        </p:tgtEl>
-                                        <p:attrNameLst>
-                                          <p:attrName>style.visibility</p:attrName>
-                                        </p:attrNameLst>
-                                      </p:cBhvr>
-                                      <p:to>
-                                        <p:strVal val="visible"/>
-                                      </p:to>
-                                    </p:set>
-                                  </p:childTnLst>
-                                </p:cTn>
-                              </p:par>
-                            </p:childTnLst>
-                          </p:cTn>
-                        </p:par>
-                      </p:childTnLst>
-                    </p:cTn>
-                  </p:par>
-                  <p:par>
-                    <p:cTn id="7" fill="hold">
-                      <p:stCondLst>
-                        <p:cond delay="indefinite"/>
-                      </p:stCondLst>
-                      <p:childTnLst>
-                        <p:par>
-                          <p:cTn id="8" fill="hold">
-                            <p:stCondLst>
-                              <p:cond delay="0"/>
-                            </p:stCondLst>
-                            <p:childTnLst>
-                              <p:par>
-                                <p:cTn id="9" presetID="1" presetClass="entr" presetSubtype="0" fill="hold" grpId="0" nodeType="clickEffect">
-                                  <p:stCondLst>
-                                    <p:cond delay="0"/>
-                                  </p:stCondLst>
-                                  <p:childTnLst>
-                                    <p:set>
-                                      <p:cBhvr>
-                                        <p:cTn id="10" dur="1" fill="hold">
-                                          <p:stCondLst>
-                                            <p:cond delay="0"/>
-                                          </p:stCondLst>
-                                        </p:cTn>
-                                        <p:tgtEl>
-                                          <p:spTgt spid="6">
-                                            <p:txEl>
-                                              <p:pRg st="1" end="1"/>
-                                            </p:txEl>
-                                          </p:spTgt>
-                                        </p:tgtEl>
-                                        <p:attrNameLst>
-                                          <p:attrName>style.visibility</p:attrName>
-                                        </p:attrNameLst>
-                                      </p:cBhvr>
-                                      <p:to>
-                                        <p:strVal val="visible"/>
-                                      </p:to>
-                                    </p:set>
-                                  </p:childTnLst>
-                                </p:cTn>
-                              </p:par>
-                            </p:childTnLst>
-                          </p:cTn>
-                        </p:par>
-                      </p:childTnLst>
-                    </p:cTn>
-                  </p:par>
-                  <p:par>
-                    <p:cTn id="11" fill="hold">
-                      <p:stCondLst>
-                        <p:cond delay="indefinite"/>
-                      </p:stCondLst>
-                      <p:childTnLst>
-                        <p:par>
-                          <p:cTn id="12" fill="hold">
-                            <p:stCondLst>
-                              <p:cond delay="0"/>
-                            </p:stCondLst>
-                            <p:childTnLst>
-                              <p:par>
-                                <p:cTn id="13" presetID="1" presetClass="entr" presetSubtype="0" fill="hold" grpId="0" nodeType="clickEffect">
-                                  <p:stCondLst>
-                                    <p:cond delay="0"/>
-                                  </p:stCondLst>
-                                  <p:childTnLst>
-                                    <p:set>
-                                      <p:cBhvr>
-                                        <p:cTn id="14" dur="1" fill="hold">
-                                          <p:stCondLst>
-                                            <p:cond delay="0"/>
-                                          </p:stCondLst>
-                                        </p:cTn>
-                                        <p:tgtEl>
-                                          <p:spTgt spid="6">
-                                            <p:txEl>
-                                              <p:pRg st="2" end="2"/>
-                                            </p:txEl>
-                                          </p:spTgt>
-                                        </p:tgtEl>
-                                        <p:attrNameLst>
-                                          <p:attrName>style.visibility</p:attrName>
-                                        </p:attrNameLst>
-                                      </p:cBhvr>
-                                      <p:to>
-                                        <p:strVal val="visible"/>
-                                      </p:to>
-                                    </p:set>
-                                  </p:childTnLst>
-                                </p:cTn>
-                              </p:par>
-                            </p:childTnLst>
-                          </p:cTn>
-                        </p:par>
-                      </p:childTnLst>
-                    </p:cTn>
-                  </p:par>
-                </p:childTnLst>
-              </p:cTn>
-              <p:prevCondLst>
-                <p:cond evt="onPrev" delay="0">
-                  <p:tgtEl>
-                    <p:sldTgt/>
-                  </p:tgtEl>
-                </p:cond>
-              </p:prevCondLst>
-              <p:nextCondLst>
-                <p:cond evt="onNext" delay="0">
-                  <p:tgtEl>
-                    <p:sldTgt/>
-                  </p:tgtEl>
-                </p:cond>
-              </p:nextCondLst>
-            </p:seq>
-          </p:childTnLst>
-        </p:cTn>
-      </p:par>
-    </p:tnLst>
-    <p:bldLst>
-      <p:bldP spid="6" grpId="0" uiExpand="1" build="p"/>
-    </p:bldLst>
-  </p:timing>
 </p:sld>
 </file>
 
-<file path=ppt/slides/slide8.xml><?xml version="1.0" encoding="utf-8"?>
+<file path=ppt/slides/slide9.xml><?xml version="1.0" encoding="utf-8"?>
 <p:sld xmlns:a="http://schemas.openxmlformats.org/drawingml/2006/main" xmlns:r="http://schemas.openxmlformats.org/officeDocument/2006/relationships" xmlns:p="http://schemas.openxmlformats.org/presentationml/2006/main">
   <p:cSld>
     <p:spTree>
@@ -11337,1138 +13981,6 @@
       <p:bldP spid="3" grpId="0" uiExpand="1" build="p"/>
     </p:bldLst>
   </p:timing>
-</p:sld>
-</file>
-
-<file path=ppt/slides/slide9.xml><?xml version="1.0" encoding="utf-8"?>
-<p:sld xmlns:a="http://schemas.openxmlformats.org/drawingml/2006/main" xmlns:r="http://schemas.openxmlformats.org/officeDocument/2006/relationships" xmlns:p="http://schemas.openxmlformats.org/presentationml/2006/main">
-  <p:cSld>
-    <p:spTree>
-      <p:nvGrpSpPr>
-        <p:cNvPr id="1" name=""/>
-        <p:cNvGrpSpPr/>
-        <p:nvPr/>
-      </p:nvGrpSpPr>
-      <p:grpSpPr>
-        <a:xfrm>
-          <a:off x="0" y="0"/>
-          <a:ext cx="0" cy="0"/>
-          <a:chOff x="0" y="0"/>
-          <a:chExt cx="0" cy="0"/>
-        </a:xfrm>
-      </p:grpSpPr>
-      <p:sp>
-        <p:nvSpPr>
-          <p:cNvPr id="2" name="Title 1"/>
-          <p:cNvSpPr>
-            <a:spLocks noGrp="1"/>
-          </p:cNvSpPr>
-          <p:nvPr>
-            <p:ph type="title"/>
-          </p:nvPr>
-        </p:nvSpPr>
-        <p:spPr/>
-        <p:txBody>
-          <a:bodyPr/>
-          <a:lstStyle/>
-          <a:p>
-            <a:pPr lvl="0" indent="0" marL="0">
-              <a:buNone/>
-            </a:pPr>
-            <a:r>
-              <a:rPr/>
-              <a:t>Visualizing the Results</a:t>
-            </a:r>
-          </a:p>
-        </p:txBody>
-      </p:sp>
-      <p:sp>
-        <p:nvSpPr>
-          <p:cNvPr id="3" name="Content Placeholder 2"/>
-          <p:cNvSpPr>
-            <a:spLocks noGrp="1"/>
-          </p:cNvSpPr>
-          <p:nvPr>
-            <p:ph idx="1" sz="half"/>
-          </p:nvPr>
-        </p:nvSpPr>
-        <p:spPr/>
-        <p:txBody>
-          <a:bodyPr/>
-          <a:lstStyle/>
-          <a:p>
-            <a:pPr lvl="0" indent="0">
-              <a:buNone/>
-            </a:pPr>
-            <a:r>
-              <a:rPr>
-                <a:solidFill>
-                  <a:srgbClr val="003B4F"/>
-                </a:solidFill>
-                <a:latin typeface="Courier"/>
-              </a:rPr>
-              <a:t>df </a:t>
-            </a:r>
-            <a:r>
-              <a:rPr>
-                <a:solidFill>
-                  <a:srgbClr val="5E5E5E"/>
-                </a:solidFill>
-                <a:latin typeface="Courier"/>
-              </a:rPr>
-              <a:t>%&gt;%</a:t>
-            </a:r>
-            <a:r>
-              <a:rPr>
-                <a:solidFill>
-                  <a:srgbClr val="003B4F"/>
-                </a:solidFill>
-                <a:latin typeface="Courier"/>
-              </a:rPr>
-              <a:t> </a:t>
-            </a:r>
-            <a:r>
-              <a:rPr>
-                <a:solidFill>
-                  <a:srgbClr val="4758AB"/>
-                </a:solidFill>
-                <a:latin typeface="Courier"/>
-              </a:rPr>
-              <a:t>group_by</a:t>
-            </a:r>
-            <a:r>
-              <a:rPr>
-                <a:solidFill>
-                  <a:srgbClr val="003B4F"/>
-                </a:solidFill>
-                <a:latin typeface="Courier"/>
-              </a:rPr>
-              <a:t>(enrolled, round) </a:t>
-            </a:r>
-            <a:r>
-              <a:rPr>
-                <a:solidFill>
-                  <a:srgbClr val="5E5E5E"/>
-                </a:solidFill>
-                <a:latin typeface="Courier"/>
-              </a:rPr>
-              <a:t>%&gt;%</a:t>
-            </a:r>
-            <a:r>
-              <a:rPr>
-                <a:solidFill>
-                  <a:srgbClr val="003B4F"/>
-                </a:solidFill>
-                <a:latin typeface="Courier"/>
-              </a:rPr>
-              <a:t> </a:t>
-            </a:r>
-            <a:br/>
-            <a:r>
-              <a:rPr>
-                <a:solidFill>
-                  <a:srgbClr val="003B4F"/>
-                </a:solidFill>
-                <a:latin typeface="Courier"/>
-              </a:rPr>
-              <a:t>  </a:t>
-            </a:r>
-            <a:r>
-              <a:rPr>
-                <a:solidFill>
-                  <a:srgbClr val="4758AB"/>
-                </a:solidFill>
-                <a:latin typeface="Courier"/>
-              </a:rPr>
-              <a:t>mutate</a:t>
-            </a:r>
-            <a:r>
-              <a:rPr>
-                <a:solidFill>
-                  <a:srgbClr val="003B4F"/>
-                </a:solidFill>
-                <a:latin typeface="Courier"/>
-              </a:rPr>
-              <a:t>(</a:t>
-            </a:r>
-            <a:r>
-              <a:rPr>
-                <a:solidFill>
-                  <a:srgbClr val="657422"/>
-                </a:solidFill>
-                <a:latin typeface="Courier"/>
-              </a:rPr>
-              <a:t>enrolled =</a:t>
-            </a:r>
-            <a:r>
-              <a:rPr>
-                <a:solidFill>
-                  <a:srgbClr val="003B4F"/>
-                </a:solidFill>
-                <a:latin typeface="Courier"/>
-              </a:rPr>
-              <a:t> </a:t>
-            </a:r>
-            <a:r>
-              <a:rPr>
-                <a:solidFill>
-                  <a:srgbClr val="4758AB"/>
-                </a:solidFill>
-                <a:latin typeface="Courier"/>
-              </a:rPr>
-              <a:t>recode</a:t>
-            </a:r>
-            <a:r>
-              <a:rPr>
-                <a:solidFill>
-                  <a:srgbClr val="003B4F"/>
-                </a:solidFill>
-                <a:latin typeface="Courier"/>
-              </a:rPr>
-              <a:t>(</a:t>
-            </a:r>
-            <a:r>
-              <a:rPr>
-                <a:solidFill>
-                  <a:srgbClr val="4758AB"/>
-                </a:solidFill>
-                <a:latin typeface="Courier"/>
-              </a:rPr>
-              <a:t>as.factor</a:t>
-            </a:r>
-            <a:r>
-              <a:rPr>
-                <a:solidFill>
-                  <a:srgbClr val="003B4F"/>
-                </a:solidFill>
-                <a:latin typeface="Courier"/>
-              </a:rPr>
-              <a:t>(enrolled), </a:t>
-            </a:r>
-            <a:r>
-              <a:rPr>
-                <a:solidFill>
-                  <a:srgbClr val="20794D"/>
-                </a:solidFill>
-                <a:latin typeface="Courier"/>
-              </a:rPr>
-              <a:t>`</a:t>
-            </a:r>
-            <a:r>
-              <a:rPr>
-                <a:solidFill>
-                  <a:srgbClr val="657422"/>
-                </a:solidFill>
-                <a:latin typeface="Courier"/>
-              </a:rPr>
-              <a:t>0</a:t>
-            </a:r>
-            <a:r>
-              <a:rPr>
-                <a:solidFill>
-                  <a:srgbClr val="20794D"/>
-                </a:solidFill>
-                <a:latin typeface="Courier"/>
-              </a:rPr>
-              <a:t>`</a:t>
-            </a:r>
-            <a:r>
-              <a:rPr>
-                <a:solidFill>
-                  <a:srgbClr val="003B4F"/>
-                </a:solidFill>
-                <a:latin typeface="Courier"/>
-              </a:rPr>
-              <a:t> = </a:t>
-            </a:r>
-            <a:r>
-              <a:rPr>
-                <a:solidFill>
-                  <a:srgbClr val="20794D"/>
-                </a:solidFill>
-                <a:latin typeface="Courier"/>
-              </a:rPr>
-              <a:t>"Control"</a:t>
-            </a:r>
-            <a:r>
-              <a:rPr>
-                <a:solidFill>
-                  <a:srgbClr val="003B4F"/>
-                </a:solidFill>
-                <a:latin typeface="Courier"/>
-              </a:rPr>
-              <a:t>, </a:t>
-            </a:r>
-            <a:r>
-              <a:rPr>
-                <a:solidFill>
-                  <a:srgbClr val="20794D"/>
-                </a:solidFill>
-                <a:latin typeface="Courier"/>
-              </a:rPr>
-              <a:t>`</a:t>
-            </a:r>
-            <a:r>
-              <a:rPr>
-                <a:solidFill>
-                  <a:srgbClr val="657422"/>
-                </a:solidFill>
-                <a:latin typeface="Courier"/>
-              </a:rPr>
-              <a:t>1</a:t>
-            </a:r>
-            <a:r>
-              <a:rPr>
-                <a:solidFill>
-                  <a:srgbClr val="20794D"/>
-                </a:solidFill>
-                <a:latin typeface="Courier"/>
-              </a:rPr>
-              <a:t>`</a:t>
-            </a:r>
-            <a:r>
-              <a:rPr>
-                <a:solidFill>
-                  <a:srgbClr val="003B4F"/>
-                </a:solidFill>
-                <a:latin typeface="Courier"/>
-              </a:rPr>
-              <a:t> = </a:t>
-            </a:r>
-            <a:r>
-              <a:rPr>
-                <a:solidFill>
-                  <a:srgbClr val="20794D"/>
-                </a:solidFill>
-                <a:latin typeface="Courier"/>
-              </a:rPr>
-              <a:t>"Treatment"</a:t>
-            </a:r>
-            <a:r>
-              <a:rPr>
-                <a:solidFill>
-                  <a:srgbClr val="003B4F"/>
-                </a:solidFill>
-                <a:latin typeface="Courier"/>
-              </a:rPr>
-              <a:t>),</a:t>
-            </a:r>
-            <a:br/>
-            <a:r>
-              <a:rPr>
-                <a:solidFill>
-                  <a:srgbClr val="003B4F"/>
-                </a:solidFill>
-                <a:latin typeface="Courier"/>
-              </a:rPr>
-              <a:t>             </a:t>
-            </a:r>
-            <a:r>
-              <a:rPr>
-                <a:solidFill>
-                  <a:srgbClr val="657422"/>
-                </a:solidFill>
-                <a:latin typeface="Courier"/>
-              </a:rPr>
-              <a:t>round =</a:t>
-            </a:r>
-            <a:r>
-              <a:rPr>
-                <a:solidFill>
-                  <a:srgbClr val="003B4F"/>
-                </a:solidFill>
-                <a:latin typeface="Courier"/>
-              </a:rPr>
-              <a:t> </a:t>
-            </a:r>
-            <a:r>
-              <a:rPr>
-                <a:solidFill>
-                  <a:srgbClr val="4758AB"/>
-                </a:solidFill>
-                <a:latin typeface="Courier"/>
-              </a:rPr>
-              <a:t>recode</a:t>
-            </a:r>
-            <a:r>
-              <a:rPr>
-                <a:solidFill>
-                  <a:srgbClr val="003B4F"/>
-                </a:solidFill>
-                <a:latin typeface="Courier"/>
-              </a:rPr>
-              <a:t>(</a:t>
-            </a:r>
-            <a:r>
-              <a:rPr>
-                <a:solidFill>
-                  <a:srgbClr val="4758AB"/>
-                </a:solidFill>
-                <a:latin typeface="Courier"/>
-              </a:rPr>
-              <a:t>as.factor</a:t>
-            </a:r>
-            <a:r>
-              <a:rPr>
-                <a:solidFill>
-                  <a:srgbClr val="003B4F"/>
-                </a:solidFill>
-                <a:latin typeface="Courier"/>
-              </a:rPr>
-              <a:t>(round), </a:t>
-            </a:r>
-            <a:r>
-              <a:rPr>
-                <a:solidFill>
-                  <a:srgbClr val="20794D"/>
-                </a:solidFill>
-                <a:latin typeface="Courier"/>
-              </a:rPr>
-              <a:t>`</a:t>
-            </a:r>
-            <a:r>
-              <a:rPr>
-                <a:solidFill>
-                  <a:srgbClr val="657422"/>
-                </a:solidFill>
-                <a:latin typeface="Courier"/>
-              </a:rPr>
-              <a:t>0</a:t>
-            </a:r>
-            <a:r>
-              <a:rPr>
-                <a:solidFill>
-                  <a:srgbClr val="20794D"/>
-                </a:solidFill>
-                <a:latin typeface="Courier"/>
-              </a:rPr>
-              <a:t>`</a:t>
-            </a:r>
-            <a:r>
-              <a:rPr>
-                <a:solidFill>
-                  <a:srgbClr val="003B4F"/>
-                </a:solidFill>
-                <a:latin typeface="Courier"/>
-              </a:rPr>
-              <a:t> = </a:t>
-            </a:r>
-            <a:r>
-              <a:rPr>
-                <a:solidFill>
-                  <a:srgbClr val="20794D"/>
-                </a:solidFill>
-                <a:latin typeface="Courier"/>
-              </a:rPr>
-              <a:t>"Before"</a:t>
-            </a:r>
-            <a:r>
-              <a:rPr>
-                <a:solidFill>
-                  <a:srgbClr val="003B4F"/>
-                </a:solidFill>
-                <a:latin typeface="Courier"/>
-              </a:rPr>
-              <a:t>, </a:t>
-            </a:r>
-            <a:r>
-              <a:rPr>
-                <a:solidFill>
-                  <a:srgbClr val="20794D"/>
-                </a:solidFill>
-                <a:latin typeface="Courier"/>
-              </a:rPr>
-              <a:t>`</a:t>
-            </a:r>
-            <a:r>
-              <a:rPr>
-                <a:solidFill>
-                  <a:srgbClr val="657422"/>
-                </a:solidFill>
-                <a:latin typeface="Courier"/>
-              </a:rPr>
-              <a:t>1</a:t>
-            </a:r>
-            <a:r>
-              <a:rPr>
-                <a:solidFill>
-                  <a:srgbClr val="20794D"/>
-                </a:solidFill>
-                <a:latin typeface="Courier"/>
-              </a:rPr>
-              <a:t>`</a:t>
-            </a:r>
-            <a:r>
-              <a:rPr>
-                <a:solidFill>
-                  <a:srgbClr val="003B4F"/>
-                </a:solidFill>
-                <a:latin typeface="Courier"/>
-              </a:rPr>
-              <a:t> = </a:t>
-            </a:r>
-            <a:r>
-              <a:rPr>
-                <a:solidFill>
-                  <a:srgbClr val="20794D"/>
-                </a:solidFill>
-                <a:latin typeface="Courier"/>
-              </a:rPr>
-              <a:t>"After"</a:t>
-            </a:r>
-            <a:r>
-              <a:rPr>
-                <a:solidFill>
-                  <a:srgbClr val="003B4F"/>
-                </a:solidFill>
-                <a:latin typeface="Courier"/>
-              </a:rPr>
-              <a:t>)) </a:t>
-            </a:r>
-            <a:r>
-              <a:rPr>
-                <a:solidFill>
-                  <a:srgbClr val="5E5E5E"/>
-                </a:solidFill>
-                <a:latin typeface="Courier"/>
-              </a:rPr>
-              <a:t>%&gt;%</a:t>
-            </a:r>
-            <a:br/>
-            <a:r>
-              <a:rPr>
-                <a:solidFill>
-                  <a:srgbClr val="003B4F"/>
-                </a:solidFill>
-                <a:latin typeface="Courier"/>
-              </a:rPr>
-              <a:t>  </a:t>
-            </a:r>
-            <a:r>
-              <a:rPr>
-                <a:solidFill>
-                  <a:srgbClr val="4758AB"/>
-                </a:solidFill>
-                <a:latin typeface="Courier"/>
-              </a:rPr>
-              <a:t>summarise</a:t>
-            </a:r>
-            <a:r>
-              <a:rPr>
-                <a:solidFill>
-                  <a:srgbClr val="003B4F"/>
-                </a:solidFill>
-                <a:latin typeface="Courier"/>
-              </a:rPr>
-              <a:t>(</a:t>
-            </a:r>
-            <a:r>
-              <a:rPr>
-                <a:solidFill>
-                  <a:srgbClr val="657422"/>
-                </a:solidFill>
-                <a:latin typeface="Courier"/>
-              </a:rPr>
-              <a:t>waste_management_costs =</a:t>
-            </a:r>
-            <a:r>
-              <a:rPr>
-                <a:solidFill>
-                  <a:srgbClr val="003B4F"/>
-                </a:solidFill>
-                <a:latin typeface="Courier"/>
-              </a:rPr>
-              <a:t> </a:t>
-            </a:r>
-            <a:r>
-              <a:rPr>
-                <a:solidFill>
-                  <a:srgbClr val="4758AB"/>
-                </a:solidFill>
-                <a:latin typeface="Courier"/>
-              </a:rPr>
-              <a:t>mean</a:t>
-            </a:r>
-            <a:r>
-              <a:rPr>
-                <a:solidFill>
-                  <a:srgbClr val="003B4F"/>
-                </a:solidFill>
-                <a:latin typeface="Courier"/>
-              </a:rPr>
-              <a:t>(waste_management_costs)) </a:t>
-            </a:r>
-            <a:r>
-              <a:rPr>
-                <a:solidFill>
-                  <a:srgbClr val="5E5E5E"/>
-                </a:solidFill>
-                <a:latin typeface="Courier"/>
-              </a:rPr>
-              <a:t>%&gt;%</a:t>
-            </a:r>
-            <a:br/>
-            <a:r>
-              <a:rPr>
-                <a:solidFill>
-                  <a:srgbClr val="003B4F"/>
-                </a:solidFill>
-                <a:latin typeface="Courier"/>
-              </a:rPr>
-              <a:t>  </a:t>
-            </a:r>
-            <a:r>
-              <a:rPr>
-                <a:solidFill>
-                  <a:srgbClr val="4758AB"/>
-                </a:solidFill>
-                <a:latin typeface="Courier"/>
-              </a:rPr>
-              <a:t>ggplot</a:t>
-            </a:r>
-            <a:r>
-              <a:rPr>
-                <a:solidFill>
-                  <a:srgbClr val="003B4F"/>
-                </a:solidFill>
-                <a:latin typeface="Courier"/>
-              </a:rPr>
-              <a:t>(</a:t>
-            </a:r>
-            <a:r>
-              <a:rPr>
-                <a:solidFill>
-                  <a:srgbClr val="4758AB"/>
-                </a:solidFill>
-                <a:latin typeface="Courier"/>
-              </a:rPr>
-              <a:t>aes</a:t>
-            </a:r>
-            <a:r>
-              <a:rPr>
-                <a:solidFill>
-                  <a:srgbClr val="003B4F"/>
-                </a:solidFill>
-                <a:latin typeface="Courier"/>
-              </a:rPr>
-              <a:t>(</a:t>
-            </a:r>
-            <a:r>
-              <a:rPr>
-                <a:solidFill>
-                  <a:srgbClr val="657422"/>
-                </a:solidFill>
-                <a:latin typeface="Courier"/>
-              </a:rPr>
-              <a:t>x =</a:t>
-            </a:r>
-            <a:r>
-              <a:rPr>
-                <a:solidFill>
-                  <a:srgbClr val="003B4F"/>
-                </a:solidFill>
-                <a:latin typeface="Courier"/>
-              </a:rPr>
-              <a:t> round, </a:t>
-            </a:r>
-            <a:r>
-              <a:rPr>
-                <a:solidFill>
-                  <a:srgbClr val="657422"/>
-                </a:solidFill>
-                <a:latin typeface="Courier"/>
-              </a:rPr>
-              <a:t>y =</a:t>
-            </a:r>
-            <a:r>
-              <a:rPr>
-                <a:solidFill>
-                  <a:srgbClr val="003B4F"/>
-                </a:solidFill>
-                <a:latin typeface="Courier"/>
-              </a:rPr>
-              <a:t> waste_management_costs, </a:t>
-            </a:r>
-            <a:r>
-              <a:rPr>
-                <a:solidFill>
-                  <a:srgbClr val="657422"/>
-                </a:solidFill>
-                <a:latin typeface="Courier"/>
-              </a:rPr>
-              <a:t>group =</a:t>
-            </a:r>
-            <a:r>
-              <a:rPr>
-                <a:solidFill>
-                  <a:srgbClr val="003B4F"/>
-                </a:solidFill>
-                <a:latin typeface="Courier"/>
-              </a:rPr>
-              <a:t> enrolled, </a:t>
-            </a:r>
-            <a:r>
-              <a:rPr>
-                <a:solidFill>
-                  <a:srgbClr val="657422"/>
-                </a:solidFill>
-                <a:latin typeface="Courier"/>
-              </a:rPr>
-              <a:t>color =</a:t>
-            </a:r>
-            <a:r>
-              <a:rPr>
-                <a:solidFill>
-                  <a:srgbClr val="003B4F"/>
-                </a:solidFill>
-                <a:latin typeface="Courier"/>
-              </a:rPr>
-              <a:t> enrolled)) </a:t>
-            </a:r>
-            <a:r>
-              <a:rPr>
-                <a:solidFill>
-                  <a:srgbClr val="5E5E5E"/>
-                </a:solidFill>
-                <a:latin typeface="Courier"/>
-              </a:rPr>
-              <a:t>+</a:t>
-            </a:r>
-            <a:br/>
-            <a:r>
-              <a:rPr>
-                <a:solidFill>
-                  <a:srgbClr val="003B4F"/>
-                </a:solidFill>
-                <a:latin typeface="Courier"/>
-              </a:rPr>
-              <a:t>  </a:t>
-            </a:r>
-            <a:r>
-              <a:rPr>
-                <a:solidFill>
-                  <a:srgbClr val="4758AB"/>
-                </a:solidFill>
-                <a:latin typeface="Courier"/>
-              </a:rPr>
-              <a:t>geom_line</a:t>
-            </a:r>
-            <a:r>
-              <a:rPr>
-                <a:solidFill>
-                  <a:srgbClr val="003B4F"/>
-                </a:solidFill>
-                <a:latin typeface="Courier"/>
-              </a:rPr>
-              <a:t>(</a:t>
-            </a:r>
-            <a:r>
-              <a:rPr>
-                <a:solidFill>
-                  <a:srgbClr val="657422"/>
-                </a:solidFill>
-                <a:latin typeface="Courier"/>
-              </a:rPr>
-              <a:t>size =</a:t>
-            </a:r>
-            <a:r>
-              <a:rPr>
-                <a:solidFill>
-                  <a:srgbClr val="003B4F"/>
-                </a:solidFill>
-                <a:latin typeface="Courier"/>
-              </a:rPr>
-              <a:t> </a:t>
-            </a:r>
-            <a:r>
-              <a:rPr>
-                <a:solidFill>
-                  <a:srgbClr val="AD0000"/>
-                </a:solidFill>
-                <a:latin typeface="Courier"/>
-              </a:rPr>
-              <a:t>1.2</a:t>
-            </a:r>
-            <a:r>
-              <a:rPr>
-                <a:solidFill>
-                  <a:srgbClr val="003B4F"/>
-                </a:solidFill>
-                <a:latin typeface="Courier"/>
-              </a:rPr>
-              <a:t>) </a:t>
-            </a:r>
-            <a:r>
-              <a:rPr>
-                <a:solidFill>
-                  <a:srgbClr val="5E5E5E"/>
-                </a:solidFill>
-                <a:latin typeface="Courier"/>
-              </a:rPr>
-              <a:t>+</a:t>
-            </a:r>
-            <a:r>
-              <a:rPr>
-                <a:solidFill>
-                  <a:srgbClr val="003B4F"/>
-                </a:solidFill>
-                <a:latin typeface="Courier"/>
-              </a:rPr>
-              <a:t> </a:t>
-            </a:r>
-            <a:r>
-              <a:rPr>
-                <a:solidFill>
-                  <a:srgbClr val="4758AB"/>
-                </a:solidFill>
-                <a:latin typeface="Courier"/>
-              </a:rPr>
-              <a:t>geom_point</a:t>
-            </a:r>
-            <a:r>
-              <a:rPr>
-                <a:solidFill>
-                  <a:srgbClr val="003B4F"/>
-                </a:solidFill>
-                <a:latin typeface="Courier"/>
-              </a:rPr>
-              <a:t>(</a:t>
-            </a:r>
-            <a:r>
-              <a:rPr>
-                <a:solidFill>
-                  <a:srgbClr val="657422"/>
-                </a:solidFill>
-                <a:latin typeface="Courier"/>
-              </a:rPr>
-              <a:t>size =</a:t>
-            </a:r>
-            <a:r>
-              <a:rPr>
-                <a:solidFill>
-                  <a:srgbClr val="003B4F"/>
-                </a:solidFill>
-                <a:latin typeface="Courier"/>
-              </a:rPr>
-              <a:t> </a:t>
-            </a:r>
-            <a:r>
-              <a:rPr>
-                <a:solidFill>
-                  <a:srgbClr val="AD0000"/>
-                </a:solidFill>
-                <a:latin typeface="Courier"/>
-              </a:rPr>
-              <a:t>3</a:t>
-            </a:r>
-            <a:r>
-              <a:rPr>
-                <a:solidFill>
-                  <a:srgbClr val="003B4F"/>
-                </a:solidFill>
-                <a:latin typeface="Courier"/>
-              </a:rPr>
-              <a:t>) </a:t>
-            </a:r>
-            <a:r>
-              <a:rPr>
-                <a:solidFill>
-                  <a:srgbClr val="5E5E5E"/>
-                </a:solidFill>
-                <a:latin typeface="Courier"/>
-              </a:rPr>
-              <a:t>+</a:t>
-            </a:r>
-            <a:br/>
-            <a:r>
-              <a:rPr>
-                <a:solidFill>
-                  <a:srgbClr val="003B4F"/>
-                </a:solidFill>
-                <a:latin typeface="Courier"/>
-              </a:rPr>
-              <a:t>  </a:t>
-            </a:r>
-            <a:r>
-              <a:rPr>
-                <a:solidFill>
-                  <a:srgbClr val="4758AB"/>
-                </a:solidFill>
-                <a:latin typeface="Courier"/>
-              </a:rPr>
-              <a:t>labs</a:t>
-            </a:r>
-            <a:r>
-              <a:rPr>
-                <a:solidFill>
-                  <a:srgbClr val="003B4F"/>
-                </a:solidFill>
-                <a:latin typeface="Courier"/>
-              </a:rPr>
-              <a:t>(</a:t>
-            </a:r>
-            <a:r>
-              <a:rPr>
-                <a:solidFill>
-                  <a:srgbClr val="657422"/>
-                </a:solidFill>
-                <a:latin typeface="Courier"/>
-              </a:rPr>
-              <a:t>title =</a:t>
-            </a:r>
-            <a:r>
-              <a:rPr>
-                <a:solidFill>
-                  <a:srgbClr val="003B4F"/>
-                </a:solidFill>
-                <a:latin typeface="Courier"/>
-              </a:rPr>
-              <a:t> </a:t>
-            </a:r>
-            <a:r>
-              <a:rPr>
-                <a:solidFill>
-                  <a:srgbClr val="20794D"/>
-                </a:solidFill>
-                <a:latin typeface="Courier"/>
-              </a:rPr>
-              <a:t>"Program Impact on Waste Expenditures"</a:t>
-            </a:r>
-            <a:r>
-              <a:rPr>
-                <a:solidFill>
-                  <a:srgbClr val="003B4F"/>
-                </a:solidFill>
-                <a:latin typeface="Courier"/>
-              </a:rPr>
-              <a:t>, </a:t>
-            </a:r>
-            <a:r>
-              <a:rPr>
-                <a:solidFill>
-                  <a:srgbClr val="657422"/>
-                </a:solidFill>
-                <a:latin typeface="Courier"/>
-              </a:rPr>
-              <a:t>x =</a:t>
-            </a:r>
-            <a:r>
-              <a:rPr>
-                <a:solidFill>
-                  <a:srgbClr val="003B4F"/>
-                </a:solidFill>
-                <a:latin typeface="Courier"/>
-              </a:rPr>
-              <a:t> </a:t>
-            </a:r>
-            <a:r>
-              <a:rPr>
-                <a:solidFill>
-                  <a:srgbClr val="20794D"/>
-                </a:solidFill>
-                <a:latin typeface="Courier"/>
-              </a:rPr>
-              <a:t>"Round"</a:t>
-            </a:r>
-            <a:r>
-              <a:rPr>
-                <a:solidFill>
-                  <a:srgbClr val="003B4F"/>
-                </a:solidFill>
-                <a:latin typeface="Courier"/>
-              </a:rPr>
-              <a:t>,</a:t>
-            </a:r>
-            <a:br/>
-            <a:r>
-              <a:rPr>
-                <a:solidFill>
-                  <a:srgbClr val="003B4F"/>
-                </a:solidFill>
-                <a:latin typeface="Courier"/>
-              </a:rPr>
-              <a:t>       </a:t>
-            </a:r>
-            <a:r>
-              <a:rPr>
-                <a:solidFill>
-                  <a:srgbClr val="657422"/>
-                </a:solidFill>
-                <a:latin typeface="Courier"/>
-              </a:rPr>
-              <a:t>y =</a:t>
-            </a:r>
-            <a:r>
-              <a:rPr>
-                <a:solidFill>
-                  <a:srgbClr val="003B4F"/>
-                </a:solidFill>
-                <a:latin typeface="Courier"/>
-              </a:rPr>
-              <a:t> </a:t>
-            </a:r>
-            <a:r>
-              <a:rPr>
-                <a:solidFill>
-                  <a:srgbClr val="20794D"/>
-                </a:solidFill>
-                <a:latin typeface="Courier"/>
-              </a:rPr>
-              <a:t>"Waste Expenditures (USD)"</a:t>
-            </a:r>
-            <a:r>
-              <a:rPr>
-                <a:solidFill>
-                  <a:srgbClr val="003B4F"/>
-                </a:solidFill>
-                <a:latin typeface="Courier"/>
-              </a:rPr>
-              <a:t>) </a:t>
-            </a:r>
-            <a:r>
-              <a:rPr>
-                <a:solidFill>
-                  <a:srgbClr val="5E5E5E"/>
-                </a:solidFill>
-                <a:latin typeface="Courier"/>
-              </a:rPr>
-              <a:t>+</a:t>
-            </a:r>
-            <a:br/>
-            <a:r>
-              <a:rPr>
-                <a:solidFill>
-                  <a:srgbClr val="003B4F"/>
-                </a:solidFill>
-                <a:latin typeface="Courier"/>
-              </a:rPr>
-              <a:t>  </a:t>
-            </a:r>
-            <a:r>
-              <a:rPr>
-                <a:solidFill>
-                  <a:srgbClr val="4758AB"/>
-                </a:solidFill>
-                <a:latin typeface="Courier"/>
-              </a:rPr>
-              <a:t>theme_minimal</a:t>
-            </a:r>
-            <a:r>
-              <a:rPr>
-                <a:solidFill>
-                  <a:srgbClr val="003B4F"/>
-                </a:solidFill>
-                <a:latin typeface="Courier"/>
-              </a:rPr>
-              <a:t>() </a:t>
-            </a:r>
-            <a:r>
-              <a:rPr>
-                <a:solidFill>
-                  <a:srgbClr val="5E5E5E"/>
-                </a:solidFill>
-                <a:latin typeface="Courier"/>
-              </a:rPr>
-              <a:t>+</a:t>
-            </a:r>
-            <a:r>
-              <a:rPr>
-                <a:solidFill>
-                  <a:srgbClr val="003B4F"/>
-                </a:solidFill>
-                <a:latin typeface="Courier"/>
-              </a:rPr>
-              <a:t>  </a:t>
-            </a:r>
-            <a:r>
-              <a:rPr>
-                <a:solidFill>
-                  <a:srgbClr val="4758AB"/>
-                </a:solidFill>
-                <a:latin typeface="Courier"/>
-              </a:rPr>
-              <a:t>theme</a:t>
-            </a:r>
-            <a:r>
-              <a:rPr>
-                <a:solidFill>
-                  <a:srgbClr val="003B4F"/>
-                </a:solidFill>
-                <a:latin typeface="Courier"/>
-              </a:rPr>
-              <a:t>(</a:t>
-            </a:r>
-            <a:r>
-              <a:rPr>
-                <a:solidFill>
-                  <a:srgbClr val="657422"/>
-                </a:solidFill>
-                <a:latin typeface="Courier"/>
-              </a:rPr>
-              <a:t>legend.position =</a:t>
-            </a:r>
-            <a:r>
-              <a:rPr>
-                <a:solidFill>
-                  <a:srgbClr val="003B4F"/>
-                </a:solidFill>
-                <a:latin typeface="Courier"/>
-              </a:rPr>
-              <a:t> </a:t>
-            </a:r>
-            <a:r>
-              <a:rPr>
-                <a:solidFill>
-                  <a:srgbClr val="20794D"/>
-                </a:solidFill>
-                <a:latin typeface="Courier"/>
-              </a:rPr>
-              <a:t>"bottom"</a:t>
-            </a:r>
-            <a:r>
-              <a:rPr>
-                <a:solidFill>
-                  <a:srgbClr val="003B4F"/>
-                </a:solidFill>
-                <a:latin typeface="Courier"/>
-              </a:rPr>
-              <a:t>)</a:t>
-            </a:r>
-          </a:p>
-        </p:txBody>
-      </p:sp>
-      <p:pic>
-        <p:nvPicPr>
-          <p:cNvPr descr="session_6_files/figure-pptx/unnamed-chunk-11-1.png" id="0" name="Picture 1"/>
-          <p:cNvPicPr>
-            <a:picLocks noGrp="1" noChangeAspect="1"/>
-          </p:cNvPicPr>
-          <p:nvPr/>
-        </p:nvPicPr>
-        <p:blipFill>
-          <a:blip r:embed="rId2"/>
-          <a:stretch>
-            <a:fillRect/>
-          </a:stretch>
-        </p:blipFill>
-        <p:spPr bwMode="auto">
-          <a:xfrm>
-            <a:off x="4648200" y="1600200"/>
-            <a:ext cx="4038600" cy="2565400"/>
-          </a:xfrm>
-          <a:prstGeom prst="rect">
-            <a:avLst/>
-          </a:prstGeom>
-          <a:noFill/>
-          <a:ln w="9525">
-            <a:noFill/>
-            <a:headEnd/>
-            <a:tailEnd/>
-          </a:ln>
-        </p:spPr>
-      </p:pic>
-    </p:spTree>
-  </p:cSld>
 </p:sld>
 </file>
 
